--- a/MissionX_Presentation.pptx
+++ b/MissionX_Presentation.pptx
@@ -14,7 +14,6 @@
     <p:sldId id="262" r:id="rId13"/>
     <p:sldId id="263" r:id="rId14"/>
     <p:sldId id="264" r:id="rId15"/>
-    <p:sldId id="265" r:id="rId16"/>
   </p:sldIdLst>
   <p:sldSz cx="12191695" cy="6858000" type="screen4x3"/>
   <p:notesSz cx="6858000" cy="9144000"/>
@@ -3112,7 +3111,7 @@
             <a:avLst/>
           </a:prstGeom>
           <a:solidFill>
-            <a:srgbClr val="0A0F1D"/>
+            <a:srgbClr val="FFFFFF"/>
           </a:solidFill>
           <a:ln>
             <a:noFill/>
@@ -3142,23 +3141,25 @@
       </p:sp>
       <p:sp>
         <p:nvSpPr>
-          <p:cNvPr id="3" name="Rectangle 2"/>
+          <p:cNvPr id="3" name="Rounded Rectangle 2"/>
           <p:cNvSpPr/>
           <p:nvPr/>
         </p:nvSpPr>
         <p:spPr>
           <a:xfrm>
-            <a:off x="731520" y="1097280"/>
-            <a:ext cx="1371600" cy="73152"/>
-          </a:xfrm>
-          <a:prstGeom prst="rect">
+            <a:off x="914400" y="914400"/>
+            <a:ext cx="10362895" cy="5029200"/>
+          </a:xfrm>
+          <a:prstGeom prst="roundRect">
             <a:avLst/>
           </a:prstGeom>
           <a:solidFill>
-            <a:srgbClr val="00F0FF"/>
+            <a:srgbClr val="F8FAFC"/>
           </a:solidFill>
-          <a:ln>
-            <a:noFill/>
+          <a:ln w="15240">
+            <a:solidFill>
+              <a:srgbClr val="BFDBFE"/>
+            </a:solidFill>
           </a:ln>
         </p:spPr>
         <p:style>
@@ -3191,19 +3192,17 @@
         </p:nvSpPr>
         <p:spPr>
           <a:xfrm>
-            <a:off x="731520" y="1325880"/>
-            <a:ext cx="3474720" cy="365760"/>
+            <a:off x="914400" y="914400"/>
+            <a:ext cx="10362895" cy="109728"/>
           </a:xfrm>
           <a:prstGeom prst="roundRect">
             <a:avLst/>
           </a:prstGeom>
           <a:solidFill>
-            <a:srgbClr val="1E2941"/>
+            <a:srgbClr val="2563EB"/>
           </a:solidFill>
-          <a:ln w="12700">
-            <a:solidFill>
-              <a:srgbClr val="00F0FF"/>
-            </a:solidFill>
+          <a:ln>
+            <a:noFill/>
           </a:ln>
         </p:spPr>
         <p:style>
@@ -3224,17 +3223,7 @@
           <a:bodyPr rtlCol="0" anchor="ctr"/>
           <a:lstStyle/>
           <a:p>
-            <a:pPr algn="ctr">
-              <a:defRPr sz="1000" b="1">
-                <a:solidFill>
-                  <a:srgbClr val="00F0FF"/>
-                </a:solidFill>
-                <a:latin typeface="Segoe UI"/>
-              </a:defRPr>
-            </a:pPr>
-            <a:r>
-              <a:t>★ 100% PURE SOFTWARE WEB GAME (ZERO HARDWARE)</a:t>
-            </a:r>
+            <a:pPr algn="ctr"/>
           </a:p>
         </p:txBody>
       </p:sp>
@@ -3246,8 +3235,8 @@
         </p:nvSpPr>
         <p:spPr>
           <a:xfrm>
-            <a:off x="731520" y="1828800"/>
-            <a:ext cx="10698480" cy="1828800"/>
+            <a:off x="1463040" y="1463040"/>
+            <a:ext cx="9235440" cy="3291840"/>
           </a:xfrm>
           <a:prstGeom prst="rect">
             <a:avLst/>
@@ -3261,15 +3250,15 @@
           <a:lstStyle/>
           <a:p>
             <a:pPr>
-              <a:defRPr sz="5600" b="1">
-                <a:solidFill>
-                  <a:srgbClr val="F8FAFC"/>
+              <a:defRPr sz="1100" b="1">
+                <a:solidFill>
+                  <a:srgbClr val="2563EB"/>
                 </a:solidFill>
                 <a:latin typeface="Segoe UI"/>
               </a:defRPr>
             </a:pPr>
             <a:r>
-              <a:t>MissionX</a:t>
+              <a:t>NEXT-GENERATION EXPERIENTIAL LEARNING</a:t>
             </a:r>
           </a:p>
           <a:p>
@@ -3277,31 +3266,31 @@
               <a:spcBef>
                 <a:spcPts val="800"/>
               </a:spcBef>
-              <a:defRPr sz="2800" b="1">
-                <a:solidFill>
-                  <a:srgbClr val="00F0FF"/>
+              <a:defRPr sz="3200" b="1">
+                <a:solidFill>
+                  <a:srgbClr val="0F172A"/>
                 </a:solidFill>
                 <a:latin typeface="Segoe UI"/>
               </a:defRPr>
             </a:pPr>
             <a:r>
-              <a:t>AI-Powered Educational 3D Escape Room Platform</a:t>
+              <a:t>MissionX: AI &amp; IoT Escape Room Platform</a:t>
             </a:r>
           </a:p>
           <a:p>
             <a:pPr>
               <a:spcBef>
-                <a:spcPts val="1000"/>
+                <a:spcPts val="800"/>
               </a:spcBef>
               <a:defRPr sz="1500">
                 <a:solidFill>
-                  <a:srgbClr val="94A3B8"/>
+                  <a:srgbClr val="334155"/>
                 </a:solidFill>
                 <a:latin typeface="Segoe UI"/>
               </a:defRPr>
             </a:pPr>
             <a:r>
-              <a:t>Transforming Higher Computer Science Education Through Immersive, Gamified Web Simulation</a:t>
+              <a:t>Bridging Computer Science Education with Real-Time Physical Sensor Telemetry</a:t>
             </a:r>
           </a:p>
         </p:txBody>
@@ -3314,19 +3303,17 @@
         </p:nvSpPr>
         <p:spPr>
           <a:xfrm>
-            <a:off x="731520" y="4480560"/>
-            <a:ext cx="2468880" cy="1280160"/>
+            <a:off x="1463040" y="3474720"/>
+            <a:ext cx="1485900" cy="256032"/>
           </a:xfrm>
           <a:prstGeom prst="roundRect">
             <a:avLst/>
           </a:prstGeom>
           <a:solidFill>
-            <a:srgbClr val="162032"/>
+            <a:srgbClr val="EFF6FF"/>
           </a:solidFill>
-          <a:ln w="12700">
-            <a:solidFill>
-              <a:srgbClr val="334155"/>
-            </a:solidFill>
+          <a:ln>
+            <a:noFill/>
           </a:ln>
         </p:spPr>
         <p:style>
@@ -3344,35 +3331,19 @@
           </a:fontRef>
         </p:style>
         <p:txBody>
-          <a:bodyPr rtlCol="0" anchor="ctr" wrap="square" lIns="182880" rIns="182880" tIns="182880"/>
+          <a:bodyPr rtlCol="0" anchor="ctr" wrap="none" tIns="0" bIns="0" lIns="0" rIns="0"/>
           <a:lstStyle/>
           <a:p>
             <a:pPr algn="ctr">
-              <a:defRPr sz="1300" b="1">
-                <a:solidFill>
-                  <a:srgbClr val="00F0FF"/>
+              <a:defRPr sz="1000" b="1">
+                <a:solidFill>
+                  <a:srgbClr val="2563EB"/>
                 </a:solidFill>
                 <a:latin typeface="Segoe UI"/>
               </a:defRPr>
             </a:pPr>
             <a:r>
-              <a:t>Next.js 14 &amp; Three.js 3D</a:t>
-            </a:r>
-          </a:p>
-          <a:p>
-            <a:pPr>
-              <a:spcBef>
-                <a:spcPts val="400"/>
-              </a:spcBef>
-              <a:defRPr sz="1100">
-                <a:solidFill>
-                  <a:srgbClr val="94A3B8"/>
-                </a:solidFill>
-                <a:latin typeface="Segoe UI"/>
-              </a:defRPr>
-            </a:pPr>
-            <a:r>
-              <a:t>Interactive WebGL Rooms</a:t>
+              <a:t>ESP32 DevKit V1</a:t>
             </a:r>
           </a:p>
         </p:txBody>
@@ -3385,19 +3356,17 @@
         </p:nvSpPr>
         <p:spPr>
           <a:xfrm>
-            <a:off x="3474720" y="4480560"/>
-            <a:ext cx="2468880" cy="1280160"/>
+            <a:off x="3131820" y="3474720"/>
+            <a:ext cx="1563624" cy="256032"/>
           </a:xfrm>
           <a:prstGeom prst="roundRect">
             <a:avLst/>
           </a:prstGeom>
           <a:solidFill>
-            <a:srgbClr val="162032"/>
+            <a:srgbClr val="F0FDFA"/>
           </a:solidFill>
-          <a:ln w="12700">
-            <a:solidFill>
-              <a:srgbClr val="334155"/>
-            </a:solidFill>
+          <a:ln>
+            <a:noFill/>
           </a:ln>
         </p:spPr>
         <p:style>
@@ -3415,35 +3384,19 @@
           </a:fontRef>
         </p:style>
         <p:txBody>
-          <a:bodyPr rtlCol="0" anchor="ctr" wrap="square" lIns="182880" rIns="182880" tIns="182880"/>
+          <a:bodyPr rtlCol="0" anchor="ctr" wrap="none" tIns="0" bIns="0" lIns="0" rIns="0"/>
           <a:lstStyle/>
           <a:p>
             <a:pPr algn="ctr">
-              <a:defRPr sz="1300" b="1">
-                <a:solidFill>
-                  <a:srgbClr val="00F0FF"/>
+              <a:defRPr sz="1000" b="1">
+                <a:solidFill>
+                  <a:srgbClr val="0D9488"/>
                 </a:solidFill>
                 <a:latin typeface="Segoe UI"/>
               </a:defRPr>
             </a:pPr>
             <a:r>
-              <a:t>Real-Time Multiplayer</a:t>
-            </a:r>
-          </a:p>
-          <a:p>
-            <a:pPr>
-              <a:spcBef>
-                <a:spcPts val="400"/>
-              </a:spcBef>
-              <a:defRPr sz="1100">
-                <a:solidFill>
-                  <a:srgbClr val="94A3B8"/>
-                </a:solidFill>
-                <a:latin typeface="Segoe UI"/>
-              </a:defRPr>
-            </a:pPr>
-            <a:r>
-              <a:t>Sub-15ms WebSocket Sync</a:t>
+              <a:t>DHT22 Sensor Bus</a:t>
             </a:r>
           </a:p>
         </p:txBody>
@@ -3456,19 +3409,17 @@
         </p:nvSpPr>
         <p:spPr>
           <a:xfrm>
-            <a:off x="6217920" y="4480560"/>
-            <a:ext cx="2468880" cy="1280160"/>
+            <a:off x="4878324" y="3474720"/>
+            <a:ext cx="1641348" cy="256032"/>
           </a:xfrm>
           <a:prstGeom prst="roundRect">
             <a:avLst/>
           </a:prstGeom>
           <a:solidFill>
-            <a:srgbClr val="162032"/>
+            <a:srgbClr val="FEF3C7"/>
           </a:solidFill>
-          <a:ln w="12700">
-            <a:solidFill>
-              <a:srgbClr val="334155"/>
-            </a:solidFill>
+          <a:ln>
+            <a:noFill/>
           </a:ln>
         </p:spPr>
         <p:style>
@@ -3486,35 +3437,19 @@
           </a:fontRef>
         </p:style>
         <p:txBody>
-          <a:bodyPr rtlCol="0" anchor="ctr" wrap="square" lIns="182880" rIns="182880" tIns="182880"/>
+          <a:bodyPr rtlCol="0" anchor="ctr" wrap="none" tIns="0" bIns="0" lIns="0" rIns="0"/>
           <a:lstStyle/>
           <a:p>
             <a:pPr algn="ctr">
-              <a:defRPr sz="1300" b="1">
-                <a:solidFill>
-                  <a:srgbClr val="00F0FF"/>
+              <a:defRPr sz="1000" b="1">
+                <a:solidFill>
+                  <a:srgbClr val="D97706"/>
                 </a:solidFill>
                 <a:latin typeface="Segoe UI"/>
               </a:defRPr>
             </a:pPr>
             <a:r>
-              <a:t>Dual AI LLM Mentorship</a:t>
-            </a:r>
-          </a:p>
-          <a:p>
-            <a:pPr>
-              <a:spcBef>
-                <a:spcPts val="400"/>
-              </a:spcBef>
-              <a:defRPr sz="1100">
-                <a:solidFill>
-                  <a:srgbClr val="94A3B8"/>
-                </a:solidFill>
-                <a:latin typeface="Segoe UI"/>
-              </a:defRPr>
-            </a:pPr>
-            <a:r>
-              <a:t>OpenAI GPT-4o &amp; Gemini</a:t>
+              <a:t>Wokwi Virtual Lab</a:t>
             </a:r>
           </a:p>
         </p:txBody>
@@ -3527,19 +3462,17 @@
         </p:nvSpPr>
         <p:spPr>
           <a:xfrm>
-            <a:off x="8961120" y="4480560"/>
-            <a:ext cx="2468880" cy="1280160"/>
+            <a:off x="6702552" y="3474720"/>
+            <a:ext cx="1874520" cy="256032"/>
           </a:xfrm>
           <a:prstGeom prst="roundRect">
             <a:avLst/>
           </a:prstGeom>
           <a:solidFill>
-            <a:srgbClr val="162032"/>
+            <a:srgbClr val="F3E8FF"/>
           </a:solidFill>
-          <a:ln w="12700">
-            <a:solidFill>
-              <a:srgbClr val="334155"/>
-            </a:solidFill>
+          <a:ln>
+            <a:noFill/>
           </a:ln>
         </p:spPr>
         <p:style>
@@ -3557,109 +3490,39 @@
           </a:fontRef>
         </p:style>
         <p:txBody>
-          <a:bodyPr rtlCol="0" anchor="ctr" wrap="square" lIns="182880" rIns="182880" tIns="182880"/>
+          <a:bodyPr rtlCol="0" anchor="ctr" wrap="none" tIns="0" bIns="0" lIns="0" rIns="0"/>
           <a:lstStyle/>
           <a:p>
             <a:pPr algn="ctr">
-              <a:defRPr sz="1300" b="1">
-                <a:solidFill>
-                  <a:srgbClr val="00F0FF"/>
+              <a:defRPr sz="1000" b="1">
+                <a:solidFill>
+                  <a:srgbClr val="7C3AED"/>
                 </a:solidFill>
                 <a:latin typeface="Segoe UI"/>
               </a:defRPr>
             </a:pPr>
             <a:r>
-              <a:t>ABET CO1-CO6 Aligned</a:t>
-            </a:r>
-          </a:p>
-          <a:p>
-            <a:pPr>
-              <a:spcBef>
-                <a:spcPts val="400"/>
-              </a:spcBef>
-              <a:defRPr sz="1100">
-                <a:solidFill>
-                  <a:srgbClr val="94A3B8"/>
-                </a:solidFill>
-                <a:latin typeface="Segoe UI"/>
-              </a:defRPr>
-            </a:pPr>
-            <a:r>
-              <a:t>Automated Skill Radar Reports</a:t>
-            </a:r>
-          </a:p>
-        </p:txBody>
-      </p:sp>
-      <p:sp>
-        <p:nvSpPr>
-          <p:cNvPr id="10" name="TextBox 9"/>
-          <p:cNvSpPr txBox="1"/>
-          <p:nvPr/>
-        </p:nvSpPr>
-        <p:spPr>
-          <a:xfrm>
-            <a:off x="731520" y="6126480"/>
-            <a:ext cx="10698480" cy="365760"/>
-          </a:xfrm>
-          <a:prstGeom prst="rect">
-            <a:avLst/>
-          </a:prstGeom>
-          <a:noFill/>
-        </p:spPr>
-        <p:txBody>
-          <a:bodyPr wrap="none">
-            <a:spAutoFit/>
-          </a:bodyPr>
-          <a:lstStyle/>
-          <a:p>
-            <a:pPr>
-              <a:defRPr sz="1100">
-                <a:solidFill>
-                  <a:srgbClr val="94A3B8"/>
-                </a:solidFill>
-                <a:latin typeface="Segoe UI"/>
-              </a:defRPr>
-            </a:pPr>
-            <a:r>
-              <a:t>Course Alignment: 25SC2008E (Full Stack Web Development) • Zero Hardware Required • Runs in Modern Browsers</a:t>
-            </a:r>
-          </a:p>
-        </p:txBody>
-      </p:sp>
-    </p:spTree>
-  </p:cSld>
-  <p:clrMapOvr>
-    <a:masterClrMapping/>
-  </p:clrMapOvr>
-</p:sld>
-</file>
-
-<file path=ppt/slides/slide10.xml><?xml version="1.0" encoding="utf-8"?>
-<p:sld xmlns:a="http://schemas.openxmlformats.org/drawingml/2006/main" xmlns:p="http://schemas.openxmlformats.org/presentationml/2006/main" xmlns:r="http://schemas.openxmlformats.org/officeDocument/2006/relationships">
-  <p:cSld>
-    <p:spTree>
-      <p:nvGrpSpPr>
-        <p:cNvPr id="1" name=""/>
-        <p:cNvGrpSpPr/>
-        <p:nvPr/>
-      </p:nvGrpSpPr>
-      <p:grpSpPr/>
-      <p:sp>
-        <p:nvSpPr>
-          <p:cNvPr id="2" name="Rectangle 1"/>
+              <a:t>Next.js 14 Dashboard</a:t>
+            </a:r>
+          </a:p>
+        </p:txBody>
+      </p:sp>
+      <p:sp>
+        <p:nvSpPr>
+          <p:cNvPr id="10" name="Rounded Rectangle 9"/>
           <p:cNvSpPr/>
           <p:nvPr/>
         </p:nvSpPr>
         <p:spPr>
           <a:xfrm>
-            <a:off x="0" y="0"/>
-            <a:ext cx="12191695" cy="6858000"/>
-          </a:xfrm>
-          <a:prstGeom prst="rect">
+            <a:off x="8759952" y="3474720"/>
+            <a:ext cx="1330452" cy="256032"/>
+          </a:xfrm>
+          <a:prstGeom prst="roundRect">
             <a:avLst/>
           </a:prstGeom>
           <a:solidFill>
-            <a:srgbClr val="0A0F1D"/>
+            <a:srgbClr val="ECFDF5"/>
           </a:solidFill>
           <a:ln>
             <a:noFill/>
@@ -3680,23 +3543,33 @@
           </a:fontRef>
         </p:style>
         <p:txBody>
-          <a:bodyPr rtlCol="0" anchor="ctr"/>
-          <a:lstStyle/>
-          <a:p>
-            <a:pPr algn="ctr"/>
-          </a:p>
-        </p:txBody>
-      </p:sp>
-      <p:sp>
-        <p:nvSpPr>
-          <p:cNvPr id="3" name="TextBox 2"/>
+          <a:bodyPr rtlCol="0" anchor="ctr" wrap="none" tIns="0" bIns="0" lIns="0" rIns="0"/>
+          <a:lstStyle/>
+          <a:p>
+            <a:pPr algn="ctr">
+              <a:defRPr sz="1000" b="1">
+                <a:solidFill>
+                  <a:srgbClr val="10956A"/>
+                </a:solidFill>
+                <a:latin typeface="Segoe UI"/>
+              </a:defRPr>
+            </a:pPr>
+            <a:r>
+              <a:t>MongoDB Cloud</a:t>
+            </a:r>
+          </a:p>
+        </p:txBody>
+      </p:sp>
+      <p:sp>
+        <p:nvSpPr>
+          <p:cNvPr id="11" name="TextBox 10"/>
           <p:cNvSpPr txBox="1"/>
           <p:nvPr/>
         </p:nvSpPr>
         <p:spPr>
           <a:xfrm>
-            <a:off x="731520" y="411480"/>
-            <a:ext cx="10698480" cy="320040"/>
+            <a:off x="1463040" y="4114800"/>
+            <a:ext cx="8686800" cy="1097280"/>
           </a:xfrm>
           <a:prstGeom prst="rect">
             <a:avLst/>
@@ -3704,264 +3577,21 @@
           <a:noFill/>
         </p:spPr>
         <p:txBody>
-          <a:bodyPr wrap="square" lIns="0" tIns="0" rIns="0" bIns="0">
+          <a:bodyPr wrap="square">
             <a:spAutoFit/>
           </a:bodyPr>
           <a:lstStyle/>
           <a:p>
             <a:pPr>
-              <a:defRPr sz="1100" b="1">
-                <a:solidFill>
-                  <a:srgbClr val="00F0FF"/>
+              <a:defRPr sz="1100">
+                <a:solidFill>
+                  <a:srgbClr val="64748B"/>
                 </a:solidFill>
                 <a:latin typeface="Segoe UI"/>
               </a:defRPr>
             </a:pPr>
             <a:r>
-              <a:t>EVALUATION &amp; CONCLUSION</a:t>
-            </a:r>
-          </a:p>
-        </p:txBody>
-      </p:sp>
-      <p:sp>
-        <p:nvSpPr>
-          <p:cNvPr id="4" name="TextBox 3"/>
-          <p:cNvSpPr txBox="1"/>
-          <p:nvPr/>
-        </p:nvSpPr>
-        <p:spPr>
-          <a:xfrm>
-            <a:off x="731520" y="731520"/>
-            <a:ext cx="10698480" cy="594360"/>
-          </a:xfrm>
-          <a:prstGeom prst="rect">
-            <a:avLst/>
-          </a:prstGeom>
-          <a:noFill/>
-        </p:spPr>
-        <p:txBody>
-          <a:bodyPr wrap="square" lIns="0" tIns="0" rIns="0" bIns="0">
-            <a:spAutoFit/>
-          </a:bodyPr>
-          <a:lstStyle/>
-          <a:p>
-            <a:pPr>
-              <a:defRPr sz="2400" b="1">
-                <a:solidFill>
-                  <a:srgbClr val="F8FAFC"/>
-                </a:solidFill>
-                <a:latin typeface="Segoe UI"/>
-              </a:defRPr>
-            </a:pPr>
-            <a:r>
-              <a:t>Learning Analytics, ABET Skill Passports &amp; Conclusion</a:t>
-            </a:r>
-          </a:p>
-          <a:p>
-            <a:pPr>
-              <a:spcBef>
-                <a:spcPts val="400"/>
-              </a:spcBef>
-              <a:defRPr sz="1200">
-                <a:solidFill>
-                  <a:srgbClr val="94A3B8"/>
-                </a:solidFill>
-                <a:latin typeface="Segoe UI"/>
-              </a:defRPr>
-            </a:pPr>
-            <a:r>
-              <a:t>Automated verification of student learning outcomes and future platform roadmap.</a:t>
-            </a:r>
-          </a:p>
-        </p:txBody>
-      </p:sp>
-      <p:sp>
-        <p:nvSpPr>
-          <p:cNvPr id="5" name="Rounded Rectangle 4"/>
-          <p:cNvSpPr/>
-          <p:nvPr/>
-        </p:nvSpPr>
-        <p:spPr>
-          <a:xfrm>
-            <a:off x="731520" y="1645920"/>
-            <a:ext cx="5120640" cy="4389120"/>
-          </a:xfrm>
-          <a:prstGeom prst="roundRect">
-            <a:avLst/>
-          </a:prstGeom>
-          <a:solidFill>
-            <a:srgbClr val="162032"/>
-          </a:solidFill>
-          <a:ln w="12700">
-            <a:solidFill>
-              <a:srgbClr val="00F0FF"/>
-            </a:solidFill>
-          </a:ln>
-        </p:spPr>
-        <p:style>
-          <a:lnRef idx="1">
-            <a:schemeClr val="accent1"/>
-          </a:lnRef>
-          <a:fillRef idx="3">
-            <a:schemeClr val="accent1"/>
-          </a:fillRef>
-          <a:effectRef idx="2">
-            <a:schemeClr val="accent1"/>
-          </a:effectRef>
-          <a:fontRef idx="minor">
-            <a:schemeClr val="lt1"/>
-          </a:fontRef>
-        </p:style>
-        <p:txBody>
-          <a:bodyPr rtlCol="0" anchor="ctr" wrap="square" lIns="320040" rIns="320040" tIns="320040"/>
-          <a:lstStyle/>
-          <a:p>
-            <a:pPr algn="ctr">
-              <a:defRPr sz="1800" b="1">
-                <a:solidFill>
-                  <a:srgbClr val="00F0FF"/>
-                </a:solidFill>
-                <a:latin typeface="Segoe UI"/>
-              </a:defRPr>
-            </a:pPr>
-            <a:r>
-              <a:t>15-Metric Skill Radar &amp; Certification</a:t>
-            </a:r>
-          </a:p>
-          <a:p>
-            <a:pPr>
-              <a:spcBef>
-                <a:spcPts val="1000"/>
-              </a:spcBef>
-              <a:defRPr sz="1200">
-                <a:solidFill>
-                  <a:srgbClr val="F8FAFC"/>
-                </a:solidFill>
-                <a:latin typeface="Segoe UI"/>
-              </a:defRPr>
-            </a:pPr>
-            <a:r>
-              <a:t>• Multi-Dimensional Competency Tracking:</a:t>
-            </a:r>
-            <a:br/>
-            <a:r>
-              <a:t>   Tracks 15 technical and soft skills including Critical Thinking, Algorithmic Optimization, Decision Making, and Team Leadership.</a:t>
-            </a:r>
-            <a:br/>
-            <a:br/>
-            <a:r>
-              <a:t>• Official Verified Skill Radar Certificate:</a:t>
-            </a:r>
-            <a:br/>
-            <a:r>
-              <a:t>   Generates verifiable student certificates with QR code authentication, cryptographic hash (e.g. 0x9F42A7), and ABET CO1-CO6 Outcome Matrices.</a:t>
-            </a:r>
-            <a:br/>
-            <a:br/>
-            <a:r>
-              <a:t>• Steam Workshop Educator Studio (/creator):</a:t>
-            </a:r>
-            <a:br/>
-            <a:r>
-              <a:t>   Allows educators to configure custom rooms, narrative briefings, and puzzle logic without writing code.</a:t>
-            </a:r>
-          </a:p>
-        </p:txBody>
-      </p:sp>
-      <p:sp>
-        <p:nvSpPr>
-          <p:cNvPr id="6" name="Rounded Rectangle 5"/>
-          <p:cNvSpPr/>
-          <p:nvPr/>
-        </p:nvSpPr>
-        <p:spPr>
-          <a:xfrm>
-            <a:off x="6126480" y="1645920"/>
-            <a:ext cx="5303520" cy="4389120"/>
-          </a:xfrm>
-          <a:prstGeom prst="roundRect">
-            <a:avLst/>
-          </a:prstGeom>
-          <a:solidFill>
-            <a:srgbClr val="162032"/>
-          </a:solidFill>
-          <a:ln w="12700">
-            <a:solidFill>
-              <a:srgbClr val="10B981"/>
-            </a:solidFill>
-          </a:ln>
-        </p:spPr>
-        <p:style>
-          <a:lnRef idx="1">
-            <a:schemeClr val="accent1"/>
-          </a:lnRef>
-          <a:fillRef idx="3">
-            <a:schemeClr val="accent1"/>
-          </a:fillRef>
-          <a:effectRef idx="2">
-            <a:schemeClr val="accent1"/>
-          </a:effectRef>
-          <a:fontRef idx="minor">
-            <a:schemeClr val="lt1"/>
-          </a:fontRef>
-        </p:style>
-        <p:txBody>
-          <a:bodyPr rtlCol="0" anchor="ctr" wrap="square" lIns="320040" rIns="320040" tIns="320040"/>
-          <a:lstStyle/>
-          <a:p>
-            <a:pPr algn="ctr">
-              <a:defRPr sz="1800" b="1">
-                <a:solidFill>
-                  <a:srgbClr val="10B981"/>
-                </a:solidFill>
-                <a:latin typeface="Segoe UI"/>
-              </a:defRPr>
-            </a:pPr>
-            <a:r>
-              <a:t>Summary &amp; Key Takeaways</a:t>
-            </a:r>
-          </a:p>
-          <a:p>
-            <a:pPr>
-              <a:spcBef>
-                <a:spcPts val="1000"/>
-              </a:spcBef>
-              <a:defRPr sz="1200">
-                <a:solidFill>
-                  <a:srgbClr val="F8FAFC"/>
-                </a:solidFill>
-                <a:latin typeface="Segoe UI"/>
-              </a:defRPr>
-            </a:pPr>
-            <a:r>
-              <a:t>1. 100% Pure Software Online Game:</a:t>
-            </a:r>
-            <a:br/>
-            <a:r>
-              <a:t>   Zero physical hardware required. Solves the friction of costly lab equipment and allows any student with a browser to play.</a:t>
-            </a:r>
-            <a:br/>
-            <a:br/>
-            <a:r>
-              <a:t>2. Experiential &amp; Outcome-Driven:</a:t>
-            </a:r>
-            <a:br/>
-            <a:r>
-              <a:t>   Proves that high-stakes gamified simulations dramatically boost retention and fulfill rigorous ABET CO1-CO6 engineering outcomes.</a:t>
-            </a:r>
-            <a:br/>
-            <a:br/>
-            <a:r>
-              <a:t>3. Future-Ready Architecture:</a:t>
-            </a:r>
-            <a:br/>
-            <a:r>
-              <a:t>   Plug-and-play MQTT design enables future physical lab extensions or WebXR (Apple Vision Pro / Meta Quest) spatial computing.</a:t>
-            </a:r>
-            <a:br/>
-            <a:br/>
-            <a:r>
-              <a:t>Conclusion: MissionX turns abstract computer science education into an unforgettable, measurable team adventure.</a:t>
+              <a:t>Prepared for Academic Capstone &amp; Project Viva Evaluation  •  Engineering Edition</a:t>
             </a:r>
           </a:p>
         </p:txBody>
@@ -3999,7 +3629,7 @@
             <a:avLst/>
           </a:prstGeom>
           <a:solidFill>
-            <a:srgbClr val="0A0F1D"/>
+            <a:srgbClr val="FFFFFF"/>
           </a:solidFill>
           <a:ln>
             <a:noFill/>
@@ -4035,8 +3665,8 @@
         </p:nvSpPr>
         <p:spPr>
           <a:xfrm>
-            <a:off x="731520" y="411480"/>
-            <a:ext cx="10698480" cy="320040"/>
+            <a:off x="731520" y="384048"/>
+            <a:ext cx="10698480" cy="274320"/>
           </a:xfrm>
           <a:prstGeom prst="rect">
             <a:avLst/>
@@ -4050,15 +3680,15 @@
           <a:lstStyle/>
           <a:p>
             <a:pPr>
-              <a:defRPr sz="1100" b="1">
-                <a:solidFill>
-                  <a:srgbClr val="00F0FF"/>
+              <a:defRPr sz="1000" b="1">
+                <a:solidFill>
+                  <a:srgbClr val="2563EB"/>
                 </a:solidFill>
                 <a:latin typeface="Segoe UI"/>
               </a:defRPr>
             </a:pPr>
             <a:r>
-              <a:t>PROBLEM STATEMENT</a:t>
+              <a:t>PROJECT OVERVIEW</a:t>
             </a:r>
           </a:p>
         </p:txBody>
@@ -4071,8 +3701,8 @@
         </p:nvSpPr>
         <p:spPr>
           <a:xfrm>
-            <a:off x="731520" y="731520"/>
-            <a:ext cx="10698480" cy="594360"/>
+            <a:off x="731520" y="658368"/>
+            <a:ext cx="10698480" cy="502920"/>
           </a:xfrm>
           <a:prstGeom prst="rect">
             <a:avLst/>
@@ -4086,55 +3716,75 @@
           <a:lstStyle/>
           <a:p>
             <a:pPr>
-              <a:defRPr sz="2400" b="1">
-                <a:solidFill>
-                  <a:srgbClr val="F8FAFC"/>
+              <a:defRPr sz="2200" b="1">
+                <a:solidFill>
+                  <a:srgbClr val="0F172A"/>
                 </a:solidFill>
                 <a:latin typeface="Segoe UI"/>
               </a:defRPr>
             </a:pPr>
             <a:r>
-              <a:t>The Pedagogical Dilemma in Computer Science Education</a:t>
-            </a:r>
-          </a:p>
-          <a:p>
-            <a:pPr>
-              <a:spcBef>
-                <a:spcPts val="400"/>
-              </a:spcBef>
-              <a:defRPr sz="1200">
-                <a:solidFill>
-                  <a:srgbClr val="94A3B8"/>
+              <a:t>What is MissionX? Concept &amp; Core Objective</a:t>
+            </a:r>
+          </a:p>
+        </p:txBody>
+      </p:sp>
+      <p:sp>
+        <p:nvSpPr>
+          <p:cNvPr id="5" name="TextBox 4"/>
+          <p:cNvSpPr txBox="1"/>
+          <p:nvPr/>
+        </p:nvSpPr>
+        <p:spPr>
+          <a:xfrm>
+            <a:off x="731520" y="1188720"/>
+            <a:ext cx="10698480" cy="320040"/>
+          </a:xfrm>
+          <a:prstGeom prst="rect">
+            <a:avLst/>
+          </a:prstGeom>
+          <a:noFill/>
+        </p:spPr>
+        <p:txBody>
+          <a:bodyPr wrap="square" lIns="0" tIns="0" rIns="0" bIns="0">
+            <a:spAutoFit/>
+          </a:bodyPr>
+          <a:lstStyle/>
+          <a:p>
+            <a:pPr>
+              <a:defRPr sz="1100">
+                <a:solidFill>
+                  <a:srgbClr val="64748B"/>
                 </a:solidFill>
                 <a:latin typeface="Segoe UI"/>
               </a:defRPr>
             </a:pPr>
             <a:r>
-              <a:t>Why traditional lecture-based CS education struggles to build intuitive problem-solving skills.</a:t>
-            </a:r>
-          </a:p>
-        </p:txBody>
-      </p:sp>
-      <p:sp>
-        <p:nvSpPr>
-          <p:cNvPr id="5" name="Rounded Rectangle 4"/>
+              <a:t>A gamified SaaS platform replacing passive quiz portals with interactive mission challenges.</a:t>
+            </a:r>
+          </a:p>
+        </p:txBody>
+      </p:sp>
+      <p:sp>
+        <p:nvSpPr>
+          <p:cNvPr id="6" name="Rounded Rectangle 5"/>
           <p:cNvSpPr/>
           <p:nvPr/>
         </p:nvSpPr>
         <p:spPr>
           <a:xfrm>
-            <a:off x="731520" y="1645920"/>
-            <a:ext cx="3364992" cy="4389120"/>
+            <a:off x="731520" y="1691640"/>
+            <a:ext cx="5120640" cy="4480560"/>
           </a:xfrm>
           <a:prstGeom prst="roundRect">
             <a:avLst/>
           </a:prstGeom>
           <a:solidFill>
-            <a:srgbClr val="162032"/>
+            <a:srgbClr val="FFF1F2"/>
           </a:solidFill>
-          <a:ln w="12700">
+          <a:ln w="15240">
             <a:solidFill>
-              <a:srgbClr val="334155"/>
+              <a:srgbClr val="FECDD3"/>
             </a:solidFill>
           </a:ln>
         </p:spPr>
@@ -4153,72 +3803,176 @@
           </a:fontRef>
         </p:style>
         <p:txBody>
-          <a:bodyPr rtlCol="0" anchor="ctr" wrap="square" lIns="274320" rIns="274320" tIns="274320"/>
-          <a:lstStyle/>
-          <a:p>
-            <a:pPr algn="ctr">
-              <a:defRPr sz="1600" b="1">
-                <a:solidFill>
-                  <a:srgbClr val="F59E0B"/>
-                </a:solidFill>
-                <a:latin typeface="Segoe UI"/>
-              </a:defRPr>
-            </a:pPr>
-            <a:r>
-              <a:t>01. Passive &amp; Rote Learning</a:t>
+          <a:bodyPr rtlCol="0" anchor="ctr"/>
+          <a:lstStyle/>
+          <a:p>
+            <a:pPr algn="ctr"/>
+          </a:p>
+        </p:txBody>
+      </p:sp>
+      <p:sp>
+        <p:nvSpPr>
+          <p:cNvPr id="7" name="TextBox 6"/>
+          <p:cNvSpPr txBox="1"/>
+          <p:nvPr/>
+        </p:nvSpPr>
+        <p:spPr>
+          <a:xfrm>
+            <a:off x="1005840" y="1874519"/>
+            <a:ext cx="4572000" cy="4023360"/>
+          </a:xfrm>
+          <a:prstGeom prst="rect">
+            <a:avLst/>
+          </a:prstGeom>
+          <a:noFill/>
+        </p:spPr>
+        <p:txBody>
+          <a:bodyPr wrap="square">
+            <a:spAutoFit/>
+          </a:bodyPr>
+          <a:lstStyle/>
+          <a:p>
+            <a:pPr>
+              <a:defRPr sz="1200" b="1">
+                <a:solidFill>
+                  <a:srgbClr val="E11D48"/>
+                </a:solidFill>
+              </a:defRPr>
+            </a:pPr>
+            <a:r>
+              <a:t>THE PROBLEM: PASSIVE EDUCATION</a:t>
             </a:r>
           </a:p>
           <a:p>
             <a:pPr>
               <a:spcBef>
-                <a:spcPts val="1200"/>
+                <a:spcPts val="1000"/>
               </a:spcBef>
-              <a:defRPr sz="1200">
-                <a:solidFill>
-                  <a:srgbClr val="F8FAFC"/>
-                </a:solidFill>
-                <a:latin typeface="Segoe UI"/>
-              </a:defRPr>
-            </a:pPr>
-            <a:r>
-              <a:t>Traditional lectures and static code memorization fail to engage modern engineering students.</a:t>
-            </a:r>
-            <a:br/>
-            <a:br/>
-            <a:r>
-              <a:t>• Theoretical concepts (A* search, B-Trees, page replacement) feel abstract and disconnected from real crises.</a:t>
-            </a:r>
-            <a:br/>
-            <a:r>
-              <a:t>• Low knowledge retention (&lt;25%) when students only read code rather than interact with living systems.</a:t>
-            </a:r>
-            <a:br/>
-            <a:r>
-              <a:t>• High drop-off rate during complex algorithmic topics.</a:t>
-            </a:r>
-          </a:p>
-        </p:txBody>
-      </p:sp>
-      <p:sp>
-        <p:nvSpPr>
-          <p:cNvPr id="6" name="Rounded Rectangle 5"/>
+              <a:defRPr b="1" sz="1100">
+                <a:solidFill>
+                  <a:srgbClr val="0F172A"/>
+                </a:solidFill>
+              </a:defRPr>
+            </a:pPr>
+            <a:r>
+              <a:t>✕  Rote Memorization</a:t>
+            </a:r>
+          </a:p>
+          <a:p>
+            <a:pPr>
+              <a:defRPr sz="950">
+                <a:solidFill>
+                  <a:srgbClr val="334155"/>
+                </a:solidFill>
+              </a:defRPr>
+            </a:pPr>
+            <a:r>
+              <a:t>    Students memorize algorithms without real systems context.</a:t>
+            </a:r>
+          </a:p>
+          <a:p>
+            <a:pPr>
+              <a:spcBef>
+                <a:spcPts val="1000"/>
+              </a:spcBef>
+              <a:defRPr b="1" sz="1100">
+                <a:solidFill>
+                  <a:srgbClr val="0F172A"/>
+                </a:solidFill>
+              </a:defRPr>
+            </a:pPr>
+            <a:r>
+              <a:t>✕  No Physical Stakes</a:t>
+            </a:r>
+          </a:p>
+          <a:p>
+            <a:pPr>
+              <a:defRPr sz="950">
+                <a:solidFill>
+                  <a:srgbClr val="334155"/>
+                </a:solidFill>
+              </a:defRPr>
+            </a:pPr>
+            <a:r>
+              <a:t>    Code runs in vacuum terminals without hardware feedback.</a:t>
+            </a:r>
+          </a:p>
+          <a:p>
+            <a:pPr>
+              <a:spcBef>
+                <a:spcPts val="1000"/>
+              </a:spcBef>
+              <a:defRPr b="1" sz="1100">
+                <a:solidFill>
+                  <a:srgbClr val="0F172A"/>
+                </a:solidFill>
+              </a:defRPr>
+            </a:pPr>
+            <a:r>
+              <a:t>✕  Isolated Silos</a:t>
+            </a:r>
+          </a:p>
+          <a:p>
+            <a:pPr>
+              <a:defRPr sz="950">
+                <a:solidFill>
+                  <a:srgbClr val="334155"/>
+                </a:solidFill>
+              </a:defRPr>
+            </a:pPr>
+            <a:r>
+              <a:t>    Software engineering and IoT hardware taught as separate topics.</a:t>
+            </a:r>
+          </a:p>
+          <a:p>
+            <a:pPr>
+              <a:spcBef>
+                <a:spcPts val="1000"/>
+              </a:spcBef>
+              <a:defRPr b="1" sz="1100">
+                <a:solidFill>
+                  <a:srgbClr val="0F172A"/>
+                </a:solidFill>
+              </a:defRPr>
+            </a:pPr>
+            <a:r>
+              <a:t>✕  Low Student Engagement</a:t>
+            </a:r>
+          </a:p>
+          <a:p>
+            <a:pPr>
+              <a:defRPr sz="950">
+                <a:solidFill>
+                  <a:srgbClr val="334155"/>
+                </a:solidFill>
+              </a:defRPr>
+            </a:pPr>
+            <a:r>
+              <a:t>    Traditional multiple-choice portals lack excitement.</a:t>
+            </a:r>
+          </a:p>
+        </p:txBody>
+      </p:sp>
+      <p:sp>
+        <p:nvSpPr>
+          <p:cNvPr id="8" name="Rounded Rectangle 7"/>
           <p:cNvSpPr/>
           <p:nvPr/>
         </p:nvSpPr>
         <p:spPr>
           <a:xfrm>
-            <a:off x="4389120" y="1645920"/>
-            <a:ext cx="3364992" cy="4389120"/>
+            <a:off x="6217920" y="1691640"/>
+            <a:ext cx="5212080" cy="4480560"/>
           </a:xfrm>
           <a:prstGeom prst="roundRect">
             <a:avLst/>
           </a:prstGeom>
           <a:solidFill>
-            <a:srgbClr val="162032"/>
+            <a:srgbClr val="F0F9FF"/>
           </a:solidFill>
-          <a:ln w="12700">
+          <a:ln w="15240">
             <a:solidFill>
-              <a:srgbClr val="334155"/>
+              <a:srgbClr val="BAE6FD"/>
             </a:solidFill>
           </a:ln>
         </p:spPr>
@@ -4237,132 +3991,152 @@
           </a:fontRef>
         </p:style>
         <p:txBody>
-          <a:bodyPr rtlCol="0" anchor="ctr" wrap="square" lIns="274320" rIns="274320" tIns="274320"/>
-          <a:lstStyle/>
-          <a:p>
-            <a:pPr algn="ctr">
-              <a:defRPr sz="1600" b="1">
-                <a:solidFill>
-                  <a:srgbClr val="F59E0B"/>
-                </a:solidFill>
-                <a:latin typeface="Segoe UI"/>
-              </a:defRPr>
-            </a:pPr>
-            <a:r>
-              <a:t>02. Lack of Collaborative Stakes</a:t>
+          <a:bodyPr rtlCol="0" anchor="ctr"/>
+          <a:lstStyle/>
+          <a:p>
+            <a:pPr algn="ctr"/>
+          </a:p>
+        </p:txBody>
+      </p:sp>
+      <p:sp>
+        <p:nvSpPr>
+          <p:cNvPr id="9" name="TextBox 8"/>
+          <p:cNvSpPr txBox="1"/>
+          <p:nvPr/>
+        </p:nvSpPr>
+        <p:spPr>
+          <a:xfrm>
+            <a:off x="6492240" y="1874519"/>
+            <a:ext cx="4663440" cy="4023360"/>
+          </a:xfrm>
+          <a:prstGeom prst="rect">
+            <a:avLst/>
+          </a:prstGeom>
+          <a:noFill/>
+        </p:spPr>
+        <p:txBody>
+          <a:bodyPr wrap="square">
+            <a:spAutoFit/>
+          </a:bodyPr>
+          <a:lstStyle/>
+          <a:p>
+            <a:pPr>
+              <a:defRPr sz="1200" b="1">
+                <a:solidFill>
+                  <a:srgbClr val="2563EB"/>
+                </a:solidFill>
+              </a:defRPr>
+            </a:pPr>
+            <a:r>
+              <a:t>THE SOLUTION: MISSIONX PLATFORM</a:t>
             </a:r>
           </a:p>
           <a:p>
             <a:pPr>
               <a:spcBef>
-                <a:spcPts val="1200"/>
+                <a:spcPts val="1000"/>
               </a:spcBef>
-              <a:defRPr sz="1200">
-                <a:solidFill>
-                  <a:srgbClr val="F8FAFC"/>
-                </a:solidFill>
-                <a:latin typeface="Segoe UI"/>
-              </a:defRPr>
-            </a:pPr>
-            <a:r>
-              <a:t>Standard coding assignments are solitary and lack real-time cooperative dynamics.</a:t>
-            </a:r>
-            <a:br/>
-            <a:br/>
-            <a:r>
-              <a:t>• Students don't learn critical team engineering dynamics or distributed problem-solving.</a:t>
-            </a:r>
-            <a:br/>
-            <a:r>
-              <a:t>• No real-time pressure or urgency to make sound architectural tradeoffs.</a:t>
-            </a:r>
-            <a:br/>
-            <a:r>
-              <a:t>• Lack of synchronized multi-agent troubleshooting environments in academic curriculums.</a:t>
-            </a:r>
-          </a:p>
-        </p:txBody>
-      </p:sp>
-      <p:sp>
-        <p:nvSpPr>
-          <p:cNvPr id="7" name="Rounded Rectangle 6"/>
-          <p:cNvSpPr/>
-          <p:nvPr/>
-        </p:nvSpPr>
-        <p:spPr>
-          <a:xfrm>
-            <a:off x="8046720" y="1645920"/>
-            <a:ext cx="3364992" cy="4389120"/>
-          </a:xfrm>
-          <a:prstGeom prst="roundRect">
-            <a:avLst/>
-          </a:prstGeom>
-          <a:solidFill>
-            <a:srgbClr val="162032"/>
-          </a:solidFill>
-          <a:ln w="12700">
-            <a:solidFill>
-              <a:srgbClr val="334155"/>
-            </a:solidFill>
-          </a:ln>
-        </p:spPr>
-        <p:style>
-          <a:lnRef idx="1">
-            <a:schemeClr val="accent1"/>
-          </a:lnRef>
-          <a:fillRef idx="3">
-            <a:schemeClr val="accent1"/>
-          </a:fillRef>
-          <a:effectRef idx="2">
-            <a:schemeClr val="accent1"/>
-          </a:effectRef>
-          <a:fontRef idx="minor">
-            <a:schemeClr val="lt1"/>
-          </a:fontRef>
-        </p:style>
-        <p:txBody>
-          <a:bodyPr rtlCol="0" anchor="ctr" wrap="square" lIns="274320" rIns="274320" tIns="274320"/>
-          <a:lstStyle/>
-          <a:p>
-            <a:pPr algn="ctr">
-              <a:defRPr sz="1600" b="1">
-                <a:solidFill>
-                  <a:srgbClr val="F59E0B"/>
-                </a:solidFill>
-                <a:latin typeface="Segoe UI"/>
-              </a:defRPr>
-            </a:pPr>
-            <a:r>
-              <a:t>03. Assessment &amp; Lab Overhead Friction</a:t>
+              <a:defRPr b="1" sz="1100">
+                <a:solidFill>
+                  <a:srgbClr val="2563EB"/>
+                </a:solidFill>
+              </a:defRPr>
+            </a:pPr>
+            <a:r>
+              <a:t>✔  Escape Room Challenge</a:t>
+            </a:r>
+          </a:p>
+          <a:p>
+            <a:pPr>
+              <a:defRPr sz="950">
+                <a:solidFill>
+                  <a:srgbClr val="334155"/>
+                </a:solidFill>
+              </a:defRPr>
+            </a:pPr>
+            <a:r>
+              <a:t>    Gamifies CS curriculum into timed mission scenarios.</a:t>
             </a:r>
           </a:p>
           <a:p>
             <a:pPr>
               <a:spcBef>
-                <a:spcPts val="1200"/>
+                <a:spcPts val="1000"/>
               </a:spcBef>
-              <a:defRPr sz="1200">
-                <a:solidFill>
-                  <a:srgbClr val="F8FAFC"/>
-                </a:solidFill>
-                <a:latin typeface="Segoe UI"/>
-              </a:defRPr>
-            </a:pPr>
-            <a:r>
-              <a:t>Physical labs and hardware experiments are costly, brittle, and difficult to standardize.</a:t>
-            </a:r>
-            <a:br/>
-            <a:br/>
-            <a:r>
-              <a:t>• Physical hardware (microcontrollers, breadboards) breaks frequently and demands heavy lab maintenance.</a:t>
-            </a:r>
-            <a:br/>
-            <a:r>
-              <a:t>• Instructors lack automated, real-time analytics to pinpoint where teams get stuck.</a:t>
-            </a:r>
-            <a:br/>
-            <a:r>
-              <a:t>• Subjective grading fails to measure ABET non-technical competencies (critical thinking, adaptability).</a:t>
+              <a:defRPr b="1" sz="1100">
+                <a:solidFill>
+                  <a:srgbClr val="2563EB"/>
+                </a:solidFill>
+              </a:defRPr>
+            </a:pPr>
+            <a:r>
+              <a:t>✔  Live IoT Sensor Telemetry</a:t>
+            </a:r>
+          </a:p>
+          <a:p>
+            <a:pPr>
+              <a:defRPr sz="950">
+                <a:solidFill>
+                  <a:srgbClr val="334155"/>
+                </a:solidFill>
+              </a:defRPr>
+            </a:pPr>
+            <a:r>
+              <a:t>    Ambient laboratory temperature sets dynamic puzzle urgency.</a:t>
+            </a:r>
+          </a:p>
+          <a:p>
+            <a:pPr>
+              <a:spcBef>
+                <a:spcPts val="1000"/>
+              </a:spcBef>
+              <a:defRPr b="1" sz="1100">
+                <a:solidFill>
+                  <a:srgbClr val="2563EB"/>
+                </a:solidFill>
+              </a:defRPr>
+            </a:pPr>
+            <a:r>
+              <a:t>✔  Mission Control Dashboard</a:t>
+            </a:r>
+          </a:p>
+          <a:p>
+            <a:pPr>
+              <a:defRPr sz="950">
+                <a:solidFill>
+                  <a:srgbClr val="334155"/>
+                </a:solidFill>
+              </a:defRPr>
+            </a:pPr>
+            <a:r>
+              <a:t>    Real-time command center tracking team skills and telemetry.</a:t>
+            </a:r>
+          </a:p>
+          <a:p>
+            <a:pPr>
+              <a:spcBef>
+                <a:spcPts val="1000"/>
+              </a:spcBef>
+              <a:defRPr b="1" sz="1100">
+                <a:solidFill>
+                  <a:srgbClr val="2563EB"/>
+                </a:solidFill>
+              </a:defRPr>
+            </a:pPr>
+            <a:r>
+              <a:t>✔  Zero-Hardware Simulator</a:t>
+            </a:r>
+          </a:p>
+          <a:p>
+            <a:pPr>
+              <a:defRPr sz="950">
+                <a:solidFill>
+                  <a:srgbClr val="334155"/>
+                </a:solidFill>
+              </a:defRPr>
+            </a:pPr>
+            <a:r>
+              <a:t>    Full virtual lab workbench accessible from any browser.</a:t>
             </a:r>
           </a:p>
         </p:txBody>
@@ -4400,7 +4174,7 @@
             <a:avLst/>
           </a:prstGeom>
           <a:solidFill>
-            <a:srgbClr val="0A0F1D"/>
+            <a:srgbClr val="FFFFFF"/>
           </a:solidFill>
           <a:ln>
             <a:noFill/>
@@ -4436,8 +4210,8 @@
         </p:nvSpPr>
         <p:spPr>
           <a:xfrm>
-            <a:off x="731520" y="411480"/>
-            <a:ext cx="10698480" cy="320040"/>
+            <a:off x="731520" y="384048"/>
+            <a:ext cx="10698480" cy="274320"/>
           </a:xfrm>
           <a:prstGeom prst="rect">
             <a:avLst/>
@@ -4451,15 +4225,15 @@
           <a:lstStyle/>
           <a:p>
             <a:pPr>
-              <a:defRPr sz="1100" b="1">
-                <a:solidFill>
-                  <a:srgbClr val="00F0FF"/>
+              <a:defRPr sz="1000" b="1">
+                <a:solidFill>
+                  <a:srgbClr val="2563EB"/>
                 </a:solidFill>
                 <a:latin typeface="Segoe UI"/>
               </a:defRPr>
             </a:pPr>
             <a:r>
-              <a:t>THE SOLUTION</a:t>
+              <a:t>IOT MOTIVATION</a:t>
             </a:r>
           </a:p>
         </p:txBody>
@@ -4472,8 +4246,8 @@
         </p:nvSpPr>
         <p:spPr>
           <a:xfrm>
-            <a:off x="731520" y="731520"/>
-            <a:ext cx="10698480" cy="594360"/>
+            <a:off x="731520" y="658368"/>
+            <a:ext cx="10698480" cy="502920"/>
           </a:xfrm>
           <a:prstGeom prst="rect">
             <a:avLst/>
@@ -4487,55 +4261,75 @@
           <a:lstStyle/>
           <a:p>
             <a:pPr>
-              <a:defRPr sz="2400" b="1">
-                <a:solidFill>
-                  <a:srgbClr val="F8FAFC"/>
+              <a:defRPr sz="2200" b="1">
+                <a:solidFill>
+                  <a:srgbClr val="0F172A"/>
                 </a:solidFill>
                 <a:latin typeface="Segoe UI"/>
               </a:defRPr>
             </a:pPr>
             <a:r>
-              <a:t>The MissionX Solution: 100% Web-Based 3D Escape Room</a:t>
-            </a:r>
-          </a:p>
-          <a:p>
-            <a:pPr>
-              <a:spcBef>
-                <a:spcPts val="400"/>
-              </a:spcBef>
-              <a:defRPr sz="1200">
-                <a:solidFill>
-                  <a:srgbClr val="94A3B8"/>
+              <a:t>Why Did We Include IoT? Technical Rationale</a:t>
+            </a:r>
+          </a:p>
+        </p:txBody>
+      </p:sp>
+      <p:sp>
+        <p:nvSpPr>
+          <p:cNvPr id="5" name="TextBox 4"/>
+          <p:cNvSpPr txBox="1"/>
+          <p:nvPr/>
+        </p:nvSpPr>
+        <p:spPr>
+          <a:xfrm>
+            <a:off x="731520" y="1188720"/>
+            <a:ext cx="10698480" cy="320040"/>
+          </a:xfrm>
+          <a:prstGeom prst="rect">
+            <a:avLst/>
+          </a:prstGeom>
+          <a:noFill/>
+        </p:spPr>
+        <p:txBody>
+          <a:bodyPr wrap="square" lIns="0" tIns="0" rIns="0" bIns="0">
+            <a:spAutoFit/>
+          </a:bodyPr>
+          <a:lstStyle/>
+          <a:p>
+            <a:pPr>
+              <a:defRPr sz="1100">
+                <a:solidFill>
+                  <a:srgbClr val="64748B"/>
                 </a:solidFill>
                 <a:latin typeface="Segoe UI"/>
               </a:defRPr>
             </a:pPr>
             <a:r>
-              <a:t>A cloud-hosted SaaS escape room platform bridging gamified simulations, multi-agent co-op, and AI tutoring.</a:t>
-            </a:r>
-          </a:p>
-        </p:txBody>
-      </p:sp>
-      <p:sp>
-        <p:nvSpPr>
-          <p:cNvPr id="5" name="Rounded Rectangle 4"/>
+              <a:t>How physical telemetry bridges real-world engineering constraints with software logic.</a:t>
+            </a:r>
+          </a:p>
+        </p:txBody>
+      </p:sp>
+      <p:sp>
+        <p:nvSpPr>
+          <p:cNvPr id="6" name="Rounded Rectangle 5"/>
           <p:cNvSpPr/>
           <p:nvPr/>
         </p:nvSpPr>
         <p:spPr>
           <a:xfrm>
-            <a:off x="731520" y="1645920"/>
-            <a:ext cx="5120640" cy="4389120"/>
+            <a:off x="731520" y="1691640"/>
+            <a:ext cx="5257800" cy="2057400"/>
           </a:xfrm>
           <a:prstGeom prst="roundRect">
             <a:avLst/>
           </a:prstGeom>
           <a:solidFill>
-            <a:srgbClr val="162032"/>
+            <a:srgbClr val="EFF6FF"/>
           </a:solidFill>
-          <a:ln w="12700">
+          <a:ln w="15240">
             <a:solidFill>
-              <a:srgbClr val="00F0FF"/>
+              <a:srgbClr val="E2E8F0"/>
             </a:solidFill>
           </a:ln>
         </p:spPr>
@@ -4554,86 +4348,32 @@
           </a:fontRef>
         </p:style>
         <p:txBody>
-          <a:bodyPr rtlCol="0" anchor="ctr" wrap="square" lIns="320040" rIns="320040" tIns="320040"/>
-          <a:lstStyle/>
-          <a:p>
-            <a:pPr algn="ctr">
-              <a:defRPr sz="2000" b="1">
-                <a:solidFill>
-                  <a:srgbClr val="00F0FF"/>
-                </a:solidFill>
-                <a:latin typeface="Segoe UI"/>
-              </a:defRPr>
-            </a:pPr>
-            <a:r>
-              <a:t>What is MissionX?</a:t>
-            </a:r>
-          </a:p>
-          <a:p>
-            <a:pPr>
-              <a:spcBef>
-                <a:spcPts val="1000"/>
-              </a:spcBef>
-              <a:defRPr sz="1250">
-                <a:solidFill>
-                  <a:srgbClr val="F8FAFC"/>
-                </a:solidFill>
-                <a:latin typeface="Segoe UI"/>
-              </a:defRPr>
-            </a:pPr>
-            <a:r>
-              <a:t>MissionX transforms engineering learning into an interactive web-based 3D escape room game.</a:t>
-            </a:r>
-            <a:br/>
-            <a:br/>
-            <a:r>
-              <a:t>Students step into the shoes of Elite Cyber Operatives racing against a digital countdown clock to resolve system-critical failures across 7+ CS domains.</a:t>
-            </a:r>
-            <a:br/>
-            <a:br/>
-            <a:r>
-              <a:t>✓ 100% Online &amp; Browser-Accessible: No downloads, no physical hardware setups, no OS barriers.</a:t>
-            </a:r>
-            <a:br/>
-            <a:r>
-              <a:t>✓ Dual Interface Model:</a:t>
-            </a:r>
-            <a:br/>
-            <a:r>
-              <a:t>   • Student WebGL Portal: 3D rooms, algorithmic consoles &amp; team pings.</a:t>
-            </a:r>
-            <a:br/>
-            <a:r>
-              <a:t>   • Game Master Command Center: Real-time room surveillance &amp; timer controls.</a:t>
-            </a:r>
-            <a:br/>
-            <a:r>
-              <a:t>✓ Procedural Audio &amp; Voice: Web Audio synthesizer and AI narration.</a:t>
-            </a:r>
-          </a:p>
-        </p:txBody>
-      </p:sp>
-      <p:sp>
-        <p:nvSpPr>
-          <p:cNvPr id="6" name="Rounded Rectangle 5"/>
+          <a:bodyPr rtlCol="0" anchor="ctr"/>
+          <a:lstStyle/>
+          <a:p>
+            <a:pPr algn="ctr"/>
+          </a:p>
+        </p:txBody>
+      </p:sp>
+      <p:sp>
+        <p:nvSpPr>
+          <p:cNvPr id="7" name="Rectangle 6"/>
           <p:cNvSpPr/>
           <p:nvPr/>
         </p:nvSpPr>
         <p:spPr>
           <a:xfrm>
-            <a:off x="6126480" y="1645920"/>
-            <a:ext cx="5303520" cy="1325880"/>
-          </a:xfrm>
-          <a:prstGeom prst="roundRect">
+            <a:off x="731520" y="1874520"/>
+            <a:ext cx="73152" cy="1691640"/>
+          </a:xfrm>
+          <a:prstGeom prst="rect">
             <a:avLst/>
           </a:prstGeom>
           <a:solidFill>
-            <a:srgbClr val="162032"/>
+            <a:srgbClr val="2563EB"/>
           </a:solidFill>
-          <a:ln w="12700">
-            <a:solidFill>
-              <a:srgbClr val="334155"/>
-            </a:solidFill>
+          <a:ln>
+            <a:noFill/>
           </a:ln>
         </p:spPr>
         <p:style>
@@ -4651,59 +4391,83 @@
           </a:fontRef>
         </p:style>
         <p:txBody>
-          <a:bodyPr rtlCol="0" anchor="ctr" wrap="square" lIns="274320" rIns="274320" tIns="182880"/>
-          <a:lstStyle/>
-          <a:p>
-            <a:pPr algn="ctr">
-              <a:defRPr sz="1500" b="1">
-                <a:solidFill>
-                  <a:srgbClr val="00F0FF"/>
-                </a:solidFill>
-                <a:latin typeface="Segoe UI"/>
-              </a:defRPr>
-            </a:pPr>
-            <a:r>
-              <a:t>3D WebGL Virtual Rooms</a:t>
+          <a:bodyPr rtlCol="0" anchor="ctr"/>
+          <a:lstStyle/>
+          <a:p>
+            <a:pPr algn="ctr"/>
+          </a:p>
+        </p:txBody>
+      </p:sp>
+      <p:sp>
+        <p:nvSpPr>
+          <p:cNvPr id="8" name="TextBox 7"/>
+          <p:cNvSpPr txBox="1"/>
+          <p:nvPr/>
+        </p:nvSpPr>
+        <p:spPr>
+          <a:xfrm>
+            <a:off x="960120" y="1874520"/>
+            <a:ext cx="4754880" cy="1691640"/>
+          </a:xfrm>
+          <a:prstGeom prst="rect">
+            <a:avLst/>
+          </a:prstGeom>
+          <a:noFill/>
+        </p:spPr>
+        <p:txBody>
+          <a:bodyPr wrap="square">
+            <a:spAutoFit/>
+          </a:bodyPr>
+          <a:lstStyle/>
+          <a:p>
+            <a:pPr>
+              <a:defRPr sz="1300" b="1">
+                <a:solidFill>
+                  <a:srgbClr val="2563EB"/>
+                </a:solidFill>
+              </a:defRPr>
+            </a:pPr>
+            <a:r>
+              <a:t>1. Datacenter Realism</a:t>
             </a:r>
           </a:p>
           <a:p>
             <a:pPr>
               <a:spcBef>
-                <a:spcPts val="400"/>
+                <a:spcPts val="600"/>
               </a:spcBef>
-              <a:defRPr sz="1150">
-                <a:solidFill>
-                  <a:srgbClr val="F8FAFC"/>
-                </a:solidFill>
-                <a:latin typeface="Segoe UI"/>
-              </a:defRPr>
-            </a:pPr>
-            <a:r>
-              <a:t>Built with Three.js rendering cyberpunk server vaults, glowing terminals, and interactive raycasted inspection nodes.</a:t>
-            </a:r>
-          </a:p>
-        </p:txBody>
-      </p:sp>
-      <p:sp>
-        <p:nvSpPr>
-          <p:cNvPr id="7" name="Rounded Rectangle 6"/>
+              <a:defRPr sz="1050">
+                <a:solidFill>
+                  <a:srgbClr val="334155"/>
+                </a:solidFill>
+              </a:defRPr>
+            </a:pPr>
+            <a:r>
+              <a:t>Physical data centers fail if thermal levels exceed operating limits. Introducing real ambient telemetry reflects actual IT infrastructure constraints.</a:t>
+            </a:r>
+          </a:p>
+        </p:txBody>
+      </p:sp>
+      <p:sp>
+        <p:nvSpPr>
+          <p:cNvPr id="9" name="Rounded Rectangle 8"/>
           <p:cNvSpPr/>
           <p:nvPr/>
         </p:nvSpPr>
         <p:spPr>
           <a:xfrm>
-            <a:off x="6126480" y="3182112"/>
-            <a:ext cx="5303520" cy="1325880"/>
+            <a:off x="6172200" y="1691640"/>
+            <a:ext cx="5257800" cy="2057400"/>
           </a:xfrm>
           <a:prstGeom prst="roundRect">
             <a:avLst/>
           </a:prstGeom>
           <a:solidFill>
-            <a:srgbClr val="162032"/>
+            <a:srgbClr val="FEF3C7"/>
           </a:solidFill>
-          <a:ln w="12700">
+          <a:ln w="15240">
             <a:solidFill>
-              <a:srgbClr val="334155"/>
+              <a:srgbClr val="E2E8F0"/>
             </a:solidFill>
           </a:ln>
         </p:spPr>
@@ -4722,60 +4486,32 @@
           </a:fontRef>
         </p:style>
         <p:txBody>
-          <a:bodyPr rtlCol="0" anchor="ctr" wrap="square" lIns="274320" rIns="274320" tIns="182880"/>
-          <a:lstStyle/>
-          <a:p>
-            <a:pPr algn="ctr">
-              <a:defRPr sz="1500" b="1">
-                <a:solidFill>
-                  <a:srgbClr val="A855F7"/>
-                </a:solidFill>
-                <a:latin typeface="Segoe UI"/>
-              </a:defRPr>
-            </a:pPr>
-            <a:r>
-              <a:t>Multiplayer Co-Op Synchronization</a:t>
-            </a:r>
-          </a:p>
-          <a:p>
-            <a:pPr>
-              <a:spcBef>
-                <a:spcPts val="400"/>
-              </a:spcBef>
-              <a:defRPr sz="1150">
-                <a:solidFill>
-                  <a:srgbClr val="F8FAFC"/>
-                </a:solidFill>
-                <a:latin typeface="Segoe UI"/>
-              </a:defRPr>
-            </a:pPr>
-            <a:r>
-              <a:t>Socket.io synchronizes team rosters, shared stage progression, teammate inspection targets, and live team chat pings.</a:t>
-            </a:r>
-          </a:p>
-        </p:txBody>
-      </p:sp>
-      <p:sp>
-        <p:nvSpPr>
-          <p:cNvPr id="8" name="Rounded Rectangle 7"/>
+          <a:bodyPr rtlCol="0" anchor="ctr"/>
+          <a:lstStyle/>
+          <a:p>
+            <a:pPr algn="ctr"/>
+          </a:p>
+        </p:txBody>
+      </p:sp>
+      <p:sp>
+        <p:nvSpPr>
+          <p:cNvPr id="10" name="Rectangle 9"/>
           <p:cNvSpPr/>
           <p:nvPr/>
         </p:nvSpPr>
         <p:spPr>
           <a:xfrm>
-            <a:off x="6126480" y="4718304"/>
-            <a:ext cx="5303520" cy="1325880"/>
-          </a:xfrm>
-          <a:prstGeom prst="roundRect">
+            <a:off x="6172200" y="1874520"/>
+            <a:ext cx="73152" cy="1691640"/>
+          </a:xfrm>
+          <a:prstGeom prst="rect">
             <a:avLst/>
           </a:prstGeom>
           <a:solidFill>
-            <a:srgbClr val="162032"/>
+            <a:srgbClr val="D97706"/>
           </a:solidFill>
-          <a:ln w="12700">
-            <a:solidFill>
-              <a:srgbClr val="334155"/>
-            </a:solidFill>
+          <a:ln>
+            <a:noFill/>
           </a:ln>
         </p:spPr>
         <p:style>
@@ -4793,35 +4529,335 @@
           </a:fontRef>
         </p:style>
         <p:txBody>
-          <a:bodyPr rtlCol="0" anchor="ctr" wrap="square" lIns="274320" rIns="274320" tIns="182880"/>
-          <a:lstStyle/>
-          <a:p>
-            <a:pPr algn="ctr">
-              <a:defRPr sz="1500" b="1">
-                <a:solidFill>
-                  <a:srgbClr val="10B981"/>
-                </a:solidFill>
-                <a:latin typeface="Segoe UI"/>
-              </a:defRPr>
-            </a:pPr>
-            <a:r>
-              <a:t>AI-Powered Mentorship &amp; Radar Analytics</a:t>
+          <a:bodyPr rtlCol="0" anchor="ctr"/>
+          <a:lstStyle/>
+          <a:p>
+            <a:pPr algn="ctr"/>
+          </a:p>
+        </p:txBody>
+      </p:sp>
+      <p:sp>
+        <p:nvSpPr>
+          <p:cNvPr id="11" name="TextBox 10"/>
+          <p:cNvSpPr txBox="1"/>
+          <p:nvPr/>
+        </p:nvSpPr>
+        <p:spPr>
+          <a:xfrm>
+            <a:off x="6400800" y="1874520"/>
+            <a:ext cx="4754880" cy="1691640"/>
+          </a:xfrm>
+          <a:prstGeom prst="rect">
+            <a:avLst/>
+          </a:prstGeom>
+          <a:noFill/>
+        </p:spPr>
+        <p:txBody>
+          <a:bodyPr wrap="square">
+            <a:spAutoFit/>
+          </a:bodyPr>
+          <a:lstStyle/>
+          <a:p>
+            <a:pPr>
+              <a:defRPr sz="1300" b="1">
+                <a:solidFill>
+                  <a:srgbClr val="D97706"/>
+                </a:solidFill>
+              </a:defRPr>
+            </a:pPr>
+            <a:r>
+              <a:t>2. Dynamic Challenge Urgency</a:t>
             </a:r>
           </a:p>
           <a:p>
             <a:pPr>
               <a:spcBef>
-                <a:spcPts val="400"/>
+                <a:spcPts val="600"/>
               </a:spcBef>
-              <a:defRPr sz="1150">
-                <a:solidFill>
-                  <a:srgbClr val="F8FAFC"/>
-                </a:solidFill>
-                <a:latin typeface="Segoe UI"/>
-              </a:defRPr>
-            </a:pPr>
-            <a:r>
-              <a:t>Dual LLM engine (OpenAI &amp; Gemini) providing scaffolded hints with time penalties and automated 15-skill ABET radar certificates.</a:t>
+              <a:defRPr sz="1050">
+                <a:solidFill>
+                  <a:srgbClr val="334155"/>
+                </a:solidFill>
+              </a:defRPr>
+            </a:pPr>
+            <a:r>
+              <a:t>Elevated temperature (&gt; 28°C) activates warning alarms and clock penalties, transforming flat quiz questions into an emergency escape scenario.</a:t>
+            </a:r>
+          </a:p>
+        </p:txBody>
+      </p:sp>
+      <p:sp>
+        <p:nvSpPr>
+          <p:cNvPr id="12" name="Rounded Rectangle 11"/>
+          <p:cNvSpPr/>
+          <p:nvPr/>
+        </p:nvSpPr>
+        <p:spPr>
+          <a:xfrm>
+            <a:off x="731520" y="3977639"/>
+            <a:ext cx="5257800" cy="2057400"/>
+          </a:xfrm>
+          <a:prstGeom prst="roundRect">
+            <a:avLst/>
+          </a:prstGeom>
+          <a:solidFill>
+            <a:srgbClr val="F0FDFA"/>
+          </a:solidFill>
+          <a:ln w="15240">
+            <a:solidFill>
+              <a:srgbClr val="E2E8F0"/>
+            </a:solidFill>
+          </a:ln>
+        </p:spPr>
+        <p:style>
+          <a:lnRef idx="1">
+            <a:schemeClr val="accent1"/>
+          </a:lnRef>
+          <a:fillRef idx="3">
+            <a:schemeClr val="accent1"/>
+          </a:fillRef>
+          <a:effectRef idx="2">
+            <a:schemeClr val="accent1"/>
+          </a:effectRef>
+          <a:fontRef idx="minor">
+            <a:schemeClr val="lt1"/>
+          </a:fontRef>
+        </p:style>
+        <p:txBody>
+          <a:bodyPr rtlCol="0" anchor="ctr"/>
+          <a:lstStyle/>
+          <a:p>
+            <a:pPr algn="ctr"/>
+          </a:p>
+        </p:txBody>
+      </p:sp>
+      <p:sp>
+        <p:nvSpPr>
+          <p:cNvPr id="13" name="Rectangle 12"/>
+          <p:cNvSpPr/>
+          <p:nvPr/>
+        </p:nvSpPr>
+        <p:spPr>
+          <a:xfrm>
+            <a:off x="731520" y="4160519"/>
+            <a:ext cx="73152" cy="1691640"/>
+          </a:xfrm>
+          <a:prstGeom prst="rect">
+            <a:avLst/>
+          </a:prstGeom>
+          <a:solidFill>
+            <a:srgbClr val="0D9488"/>
+          </a:solidFill>
+          <a:ln>
+            <a:noFill/>
+          </a:ln>
+        </p:spPr>
+        <p:style>
+          <a:lnRef idx="1">
+            <a:schemeClr val="accent1"/>
+          </a:lnRef>
+          <a:fillRef idx="3">
+            <a:schemeClr val="accent1"/>
+          </a:fillRef>
+          <a:effectRef idx="2">
+            <a:schemeClr val="accent1"/>
+          </a:effectRef>
+          <a:fontRef idx="minor">
+            <a:schemeClr val="lt1"/>
+          </a:fontRef>
+        </p:style>
+        <p:txBody>
+          <a:bodyPr rtlCol="0" anchor="ctr"/>
+          <a:lstStyle/>
+          <a:p>
+            <a:pPr algn="ctr"/>
+          </a:p>
+        </p:txBody>
+      </p:sp>
+      <p:sp>
+        <p:nvSpPr>
+          <p:cNvPr id="14" name="TextBox 13"/>
+          <p:cNvSpPr txBox="1"/>
+          <p:nvPr/>
+        </p:nvSpPr>
+        <p:spPr>
+          <a:xfrm>
+            <a:off x="960120" y="4160519"/>
+            <a:ext cx="4754880" cy="1691640"/>
+          </a:xfrm>
+          <a:prstGeom prst="rect">
+            <a:avLst/>
+          </a:prstGeom>
+          <a:noFill/>
+        </p:spPr>
+        <p:txBody>
+          <a:bodyPr wrap="square">
+            <a:spAutoFit/>
+          </a:bodyPr>
+          <a:lstStyle/>
+          <a:p>
+            <a:pPr>
+              <a:defRPr sz="1300" b="1">
+                <a:solidFill>
+                  <a:srgbClr val="0D9488"/>
+                </a:solidFill>
+              </a:defRPr>
+            </a:pPr>
+            <a:r>
+              <a:t>3. Cyber-Physical Co-Design</a:t>
+            </a:r>
+          </a:p>
+          <a:p>
+            <a:pPr>
+              <a:spcBef>
+                <a:spcPts val="600"/>
+              </a:spcBef>
+              <a:defRPr sz="1050">
+                <a:solidFill>
+                  <a:srgbClr val="334155"/>
+                </a:solidFill>
+              </a:defRPr>
+            </a:pPr>
+            <a:r>
+              <a:t>Teaches end-to-end systems engineering: C++ Microcontroller Firmware ➔ 1-Wire Digital Bus ➔ JSON Packets ➔ Web Dashboard.</a:t>
+            </a:r>
+          </a:p>
+        </p:txBody>
+      </p:sp>
+      <p:sp>
+        <p:nvSpPr>
+          <p:cNvPr id="15" name="Rounded Rectangle 14"/>
+          <p:cNvSpPr/>
+          <p:nvPr/>
+        </p:nvSpPr>
+        <p:spPr>
+          <a:xfrm>
+            <a:off x="6172200" y="3977639"/>
+            <a:ext cx="5257800" cy="2057400"/>
+          </a:xfrm>
+          <a:prstGeom prst="roundRect">
+            <a:avLst/>
+          </a:prstGeom>
+          <a:solidFill>
+            <a:srgbClr val="FFF1F2"/>
+          </a:solidFill>
+          <a:ln w="15240">
+            <a:solidFill>
+              <a:srgbClr val="E2E8F0"/>
+            </a:solidFill>
+          </a:ln>
+        </p:spPr>
+        <p:style>
+          <a:lnRef idx="1">
+            <a:schemeClr val="accent1"/>
+          </a:lnRef>
+          <a:fillRef idx="3">
+            <a:schemeClr val="accent1"/>
+          </a:fillRef>
+          <a:effectRef idx="2">
+            <a:schemeClr val="accent1"/>
+          </a:effectRef>
+          <a:fontRef idx="minor">
+            <a:schemeClr val="lt1"/>
+          </a:fontRef>
+        </p:style>
+        <p:txBody>
+          <a:bodyPr rtlCol="0" anchor="ctr"/>
+          <a:lstStyle/>
+          <a:p>
+            <a:pPr algn="ctr"/>
+          </a:p>
+        </p:txBody>
+      </p:sp>
+      <p:sp>
+        <p:nvSpPr>
+          <p:cNvPr id="16" name="Rectangle 15"/>
+          <p:cNvSpPr/>
+          <p:nvPr/>
+        </p:nvSpPr>
+        <p:spPr>
+          <a:xfrm>
+            <a:off x="6172200" y="4160519"/>
+            <a:ext cx="73152" cy="1691640"/>
+          </a:xfrm>
+          <a:prstGeom prst="rect">
+            <a:avLst/>
+          </a:prstGeom>
+          <a:solidFill>
+            <a:srgbClr val="E11D48"/>
+          </a:solidFill>
+          <a:ln>
+            <a:noFill/>
+          </a:ln>
+        </p:spPr>
+        <p:style>
+          <a:lnRef idx="1">
+            <a:schemeClr val="accent1"/>
+          </a:lnRef>
+          <a:fillRef idx="3">
+            <a:schemeClr val="accent1"/>
+          </a:fillRef>
+          <a:effectRef idx="2">
+            <a:schemeClr val="accent1"/>
+          </a:effectRef>
+          <a:fontRef idx="minor">
+            <a:schemeClr val="lt1"/>
+          </a:fontRef>
+        </p:style>
+        <p:txBody>
+          <a:bodyPr rtlCol="0" anchor="ctr"/>
+          <a:lstStyle/>
+          <a:p>
+            <a:pPr algn="ctr"/>
+          </a:p>
+        </p:txBody>
+      </p:sp>
+      <p:sp>
+        <p:nvSpPr>
+          <p:cNvPr id="17" name="TextBox 16"/>
+          <p:cNvSpPr txBox="1"/>
+          <p:nvPr/>
+        </p:nvSpPr>
+        <p:spPr>
+          <a:xfrm>
+            <a:off x="6400800" y="4160519"/>
+            <a:ext cx="4754880" cy="1691640"/>
+          </a:xfrm>
+          <a:prstGeom prst="rect">
+            <a:avLst/>
+          </a:prstGeom>
+          <a:noFill/>
+        </p:spPr>
+        <p:txBody>
+          <a:bodyPr wrap="square">
+            <a:spAutoFit/>
+          </a:bodyPr>
+          <a:lstStyle/>
+          <a:p>
+            <a:pPr>
+              <a:defRPr sz="1300" b="1">
+                <a:solidFill>
+                  <a:srgbClr val="E11D48"/>
+                </a:solidFill>
+              </a:defRPr>
+            </a:pPr>
+            <a:r>
+              <a:t>4. Automated Actuator Loops</a:t>
+            </a:r>
+          </a:p>
+          <a:p>
+            <a:pPr>
+              <a:spcBef>
+                <a:spcPts val="600"/>
+              </a:spcBef>
+              <a:defRPr sz="1050">
+                <a:solidFill>
+                  <a:srgbClr val="334155"/>
+                </a:solidFill>
+              </a:defRPr>
+            </a:pPr>
+            <a:r>
+              <a:t>Telemetry drives hardware actuators! Red alert LEDs illuminate and acoustic buzzers beep automatically when temperature breaches safety limits.</a:t>
             </a:r>
           </a:p>
         </p:txBody>
@@ -4859,7 +4895,7 @@
             <a:avLst/>
           </a:prstGeom>
           <a:solidFill>
-            <a:srgbClr val="0A0F1D"/>
+            <a:srgbClr val="FFFFFF"/>
           </a:solidFill>
           <a:ln>
             <a:noFill/>
@@ -4895,8 +4931,8 @@
         </p:nvSpPr>
         <p:spPr>
           <a:xfrm>
-            <a:off x="731520" y="411480"/>
-            <a:ext cx="10698480" cy="320040"/>
+            <a:off x="731520" y="384048"/>
+            <a:ext cx="10698480" cy="274320"/>
           </a:xfrm>
           <a:prstGeom prst="rect">
             <a:avLst/>
@@ -4910,15 +4946,15 @@
           <a:lstStyle/>
           <a:p>
             <a:pPr>
-              <a:defRPr sz="1100" b="1">
-                <a:solidFill>
-                  <a:srgbClr val="00F0FF"/>
+              <a:defRPr sz="1000" b="1">
+                <a:solidFill>
+                  <a:srgbClr val="2563EB"/>
                 </a:solidFill>
                 <a:latin typeface="Segoe UI"/>
               </a:defRPr>
             </a:pPr>
             <a:r>
-              <a:t>METHODOLOGY</a:t>
+              <a:t>EMBEDDED HARDWARE</a:t>
             </a:r>
           </a:p>
         </p:txBody>
@@ -4931,8 +4967,8 @@
         </p:nvSpPr>
         <p:spPr>
           <a:xfrm>
-            <a:off x="731520" y="731520"/>
-            <a:ext cx="10698480" cy="594360"/>
+            <a:off x="731520" y="658368"/>
+            <a:ext cx="10698480" cy="502920"/>
           </a:xfrm>
           <a:prstGeom prst="rect">
             <a:avLst/>
@@ -4946,55 +4982,75 @@
           <a:lstStyle/>
           <a:p>
             <a:pPr>
-              <a:defRPr sz="2400" b="1">
-                <a:solidFill>
-                  <a:srgbClr val="F8FAFC"/>
+              <a:defRPr sz="2200" b="1">
+                <a:solidFill>
+                  <a:srgbClr val="0F172A"/>
                 </a:solidFill>
                 <a:latin typeface="Segoe UI"/>
               </a:defRPr>
             </a:pPr>
             <a:r>
-              <a:t>Pedagogical Methodology: Experiential Learning &amp; ABET Alignment</a:t>
-            </a:r>
-          </a:p>
-          <a:p>
-            <a:pPr>
-              <a:spcBef>
-                <a:spcPts val="400"/>
-              </a:spcBef>
-              <a:defRPr sz="1200">
-                <a:solidFill>
-                  <a:srgbClr val="94A3B8"/>
+              <a:t>IoT Hardware Architecture &amp; Edge Sensor Node</a:t>
+            </a:r>
+          </a:p>
+        </p:txBody>
+      </p:sp>
+      <p:sp>
+        <p:nvSpPr>
+          <p:cNvPr id="5" name="TextBox 4"/>
+          <p:cNvSpPr txBox="1"/>
+          <p:nvPr/>
+        </p:nvSpPr>
+        <p:spPr>
+          <a:xfrm>
+            <a:off x="731520" y="1188720"/>
+            <a:ext cx="10698480" cy="320040"/>
+          </a:xfrm>
+          <a:prstGeom prst="rect">
+            <a:avLst/>
+          </a:prstGeom>
+          <a:noFill/>
+        </p:spPr>
+        <p:txBody>
+          <a:bodyPr wrap="square" lIns="0" tIns="0" rIns="0" bIns="0">
+            <a:spAutoFit/>
+          </a:bodyPr>
+          <a:lstStyle/>
+          <a:p>
+            <a:pPr>
+              <a:defRPr sz="1100">
+                <a:solidFill>
+                  <a:srgbClr val="64748B"/>
                 </a:solidFill>
                 <a:latin typeface="Segoe UI"/>
               </a:defRPr>
             </a:pPr>
             <a:r>
-              <a:t>Built upon established cognitive learning theories and Outcome-Based Education (OBE).</a:t>
-            </a:r>
-          </a:p>
-        </p:txBody>
-      </p:sp>
-      <p:sp>
-        <p:nvSpPr>
-          <p:cNvPr id="5" name="Rounded Rectangle 4"/>
+              <a:t>Technical specifications of the ESP32 microcontroller, DHT22 sensor, and actuator circuit.</a:t>
+            </a:r>
+          </a:p>
+        </p:txBody>
+      </p:sp>
+      <p:sp>
+        <p:nvSpPr>
+          <p:cNvPr id="6" name="Rounded Rectangle 5"/>
           <p:cNvSpPr/>
           <p:nvPr/>
         </p:nvSpPr>
         <p:spPr>
           <a:xfrm>
-            <a:off x="731520" y="1645920"/>
-            <a:ext cx="2468880" cy="1554480"/>
+            <a:off x="731520" y="1691640"/>
+            <a:ext cx="5029200" cy="4480560"/>
           </a:xfrm>
           <a:prstGeom prst="roundRect">
             <a:avLst/>
           </a:prstGeom>
           <a:solidFill>
-            <a:srgbClr val="162032"/>
+            <a:srgbClr val="F8FAFC"/>
           </a:solidFill>
-          <a:ln w="12700">
+          <a:ln w="15240">
             <a:solidFill>
-              <a:srgbClr val="00F0FF"/>
+              <a:srgbClr val="E2E8F0"/>
             </a:solidFill>
           </a:ln>
         </p:spPr>
@@ -5013,59 +5069,203 @@
           </a:fontRef>
         </p:style>
         <p:txBody>
-          <a:bodyPr rtlCol="0" anchor="ctr" wrap="square" lIns="182880" rIns="182880" tIns="182880"/>
-          <a:lstStyle/>
-          <a:p>
-            <a:pPr algn="ctr">
-              <a:defRPr sz="1300" b="1">
-                <a:solidFill>
-                  <a:srgbClr val="00F0FF"/>
-                </a:solidFill>
-                <a:latin typeface="Segoe UI"/>
-              </a:defRPr>
-            </a:pPr>
-            <a:r>
-              <a:t>1. Concrete Experience</a:t>
+          <a:bodyPr rtlCol="0" anchor="ctr"/>
+          <a:lstStyle/>
+          <a:p>
+            <a:pPr algn="ctr"/>
+          </a:p>
+        </p:txBody>
+      </p:sp>
+      <p:sp>
+        <p:nvSpPr>
+          <p:cNvPr id="7" name="TextBox 6"/>
+          <p:cNvSpPr txBox="1"/>
+          <p:nvPr/>
+        </p:nvSpPr>
+        <p:spPr>
+          <a:xfrm>
+            <a:off x="960120" y="1874519"/>
+            <a:ext cx="4572000" cy="4023360"/>
+          </a:xfrm>
+          <a:prstGeom prst="rect">
+            <a:avLst/>
+          </a:prstGeom>
+          <a:noFill/>
+        </p:spPr>
+        <p:txBody>
+          <a:bodyPr wrap="square">
+            <a:spAutoFit/>
+          </a:bodyPr>
+          <a:lstStyle/>
+          <a:p>
+            <a:pPr>
+              <a:defRPr sz="1200" b="1">
+                <a:solidFill>
+                  <a:srgbClr val="2563EB"/>
+                </a:solidFill>
+              </a:defRPr>
+            </a:pPr>
+            <a:r>
+              <a:t>HARDWARE COMPONENT ROSTER</a:t>
             </a:r>
           </a:p>
           <a:p>
             <a:pPr>
               <a:spcBef>
-                <a:spcPts val="600"/>
+                <a:spcPts val="800"/>
               </a:spcBef>
-              <a:defRPr sz="1100">
-                <a:solidFill>
-                  <a:srgbClr val="F8FAFC"/>
-                </a:solidFill>
-                <a:latin typeface="Segoe UI"/>
-              </a:defRPr>
-            </a:pPr>
-            <a:r>
-              <a:t>Immersion in 3D crisis scenarios with ticking clocks &amp; alarm sirens.</a:t>
-            </a:r>
-          </a:p>
-        </p:txBody>
-      </p:sp>
-      <p:sp>
-        <p:nvSpPr>
-          <p:cNvPr id="6" name="Rounded Rectangle 5"/>
+              <a:defRPr b="1" sz="1050">
+                <a:solidFill>
+                  <a:srgbClr val="0F172A"/>
+                </a:solidFill>
+              </a:defRPr>
+            </a:pPr>
+            <a:r>
+              <a:t>•  ESP32 DevKit V1</a:t>
+            </a:r>
+          </a:p>
+          <a:p>
+            <a:pPr>
+              <a:defRPr sz="950">
+                <a:solidFill>
+                  <a:srgbClr val="334155"/>
+                </a:solidFill>
+              </a:defRPr>
+            </a:pPr>
+            <a:r>
+              <a:t>    Dual-Core Xtensa 240MHz, 520KB SRAM, 2.4GHz Wi-Fi.</a:t>
+            </a:r>
+          </a:p>
+          <a:p>
+            <a:pPr>
+              <a:spcBef>
+                <a:spcPts val="800"/>
+              </a:spcBef>
+              <a:defRPr b="1" sz="1050">
+                <a:solidFill>
+                  <a:srgbClr val="0F172A"/>
+                </a:solidFill>
+              </a:defRPr>
+            </a:pPr>
+            <a:r>
+              <a:t>•  DHT22 (AM2302) Sensor</a:t>
+            </a:r>
+          </a:p>
+          <a:p>
+            <a:pPr>
+              <a:defRPr sz="950">
+                <a:solidFill>
+                  <a:srgbClr val="334155"/>
+                </a:solidFill>
+              </a:defRPr>
+            </a:pPr>
+            <a:r>
+              <a:t>    Digital temp (-40°C to 80°C) &amp; humidity on 1-Wire bus.</a:t>
+            </a:r>
+          </a:p>
+          <a:p>
+            <a:pPr>
+              <a:spcBef>
+                <a:spcPts val="800"/>
+              </a:spcBef>
+              <a:defRPr b="1" sz="1050">
+                <a:solidFill>
+                  <a:srgbClr val="0F172A"/>
+                </a:solidFill>
+              </a:defRPr>
+            </a:pPr>
+            <a:r>
+              <a:t>•  Status Blue LED (GPIO 2)</a:t>
+            </a:r>
+          </a:p>
+          <a:p>
+            <a:pPr>
+              <a:defRPr sz="950">
+                <a:solidFill>
+                  <a:srgbClr val="334155"/>
+                </a:solidFill>
+              </a:defRPr>
+            </a:pPr>
+            <a:r>
+              <a:t>    Flashes on heartbeat &amp; packet transmissions.</a:t>
+            </a:r>
+          </a:p>
+          <a:p>
+            <a:pPr>
+              <a:spcBef>
+                <a:spcPts val="800"/>
+              </a:spcBef>
+              <a:defRPr b="1" sz="1050">
+                <a:solidFill>
+                  <a:srgbClr val="0F172A"/>
+                </a:solidFill>
+              </a:defRPr>
+            </a:pPr>
+            <a:r>
+              <a:t>•  Alert Red LED (GPIO 15)</a:t>
+            </a:r>
+          </a:p>
+          <a:p>
+            <a:pPr>
+              <a:defRPr sz="950">
+                <a:solidFill>
+                  <a:srgbClr val="334155"/>
+                </a:solidFill>
+              </a:defRPr>
+            </a:pPr>
+            <a:r>
+              <a:t>    Automatically illuminates when temp &gt; 28.0°C.</a:t>
+            </a:r>
+          </a:p>
+          <a:p>
+            <a:pPr>
+              <a:spcBef>
+                <a:spcPts val="800"/>
+              </a:spcBef>
+              <a:defRPr b="1" sz="1050">
+                <a:solidFill>
+                  <a:srgbClr val="0F172A"/>
+                </a:solidFill>
+              </a:defRPr>
+            </a:pPr>
+            <a:r>
+              <a:t>•  Piezo Buzzer (GPIO 13)</a:t>
+            </a:r>
+          </a:p>
+          <a:p>
+            <a:pPr>
+              <a:defRPr sz="950">
+                <a:solidFill>
+                  <a:srgbClr val="334155"/>
+                </a:solidFill>
+              </a:defRPr>
+            </a:pPr>
+            <a:r>
+              <a:t>    Acoustic warning pulses when temp &gt; 32.0°C.</a:t>
+            </a:r>
+          </a:p>
+        </p:txBody>
+      </p:sp>
+      <p:sp>
+        <p:nvSpPr>
+          <p:cNvPr id="8" name="Rounded Rectangle 7"/>
           <p:cNvSpPr/>
           <p:nvPr/>
         </p:nvSpPr>
         <p:spPr>
           <a:xfrm>
-            <a:off x="3474720" y="1645920"/>
-            <a:ext cx="2468880" cy="1554480"/>
+            <a:off x="6126480" y="1691640"/>
+            <a:ext cx="5303520" cy="4480560"/>
           </a:xfrm>
           <a:prstGeom prst="roundRect">
             <a:avLst/>
           </a:prstGeom>
           <a:solidFill>
-            <a:srgbClr val="162032"/>
+            <a:srgbClr val="FFFFFF"/>
           </a:solidFill>
-          <a:ln w="12700">
+          <a:ln w="15240">
             <a:solidFill>
-              <a:srgbClr val="A855F7"/>
+              <a:srgbClr val="BFDBFE"/>
             </a:solidFill>
           </a:ln>
         </p:spPr>
@@ -5084,328 +5284,603 @@
           </a:fontRef>
         </p:style>
         <p:txBody>
-          <a:bodyPr rtlCol="0" anchor="ctr" wrap="square" lIns="182880" rIns="182880" tIns="182880"/>
-          <a:lstStyle/>
-          <a:p>
-            <a:pPr algn="ctr">
-              <a:defRPr sz="1300" b="1">
-                <a:solidFill>
-                  <a:srgbClr val="A855F7"/>
-                </a:solidFill>
-                <a:latin typeface="Segoe UI"/>
-              </a:defRPr>
-            </a:pPr>
-            <a:r>
-              <a:t>2. Reflective Observation</a:t>
-            </a:r>
-          </a:p>
-          <a:p>
-            <a:pPr>
-              <a:spcBef>
-                <a:spcPts val="600"/>
-              </a:spcBef>
-              <a:defRPr sz="1100">
-                <a:solidFill>
-                  <a:srgbClr val="F8FAFC"/>
-                </a:solidFill>
-                <a:latin typeface="Segoe UI"/>
-              </a:defRPr>
-            </a:pPr>
-            <a:r>
-              <a:t>Analyzing error logs, failed query rollbacks, or packet collision dumps.</a:t>
-            </a:r>
-          </a:p>
-        </p:txBody>
-      </p:sp>
-      <p:sp>
-        <p:nvSpPr>
-          <p:cNvPr id="7" name="Rounded Rectangle 6"/>
-          <p:cNvSpPr/>
-          <p:nvPr/>
-        </p:nvSpPr>
-        <p:spPr>
-          <a:xfrm>
-            <a:off x="6217920" y="1645920"/>
-            <a:ext cx="2468880" cy="1554480"/>
-          </a:xfrm>
-          <a:prstGeom prst="roundRect">
-            <a:avLst/>
-          </a:prstGeom>
-          <a:solidFill>
-            <a:srgbClr val="162032"/>
-          </a:solidFill>
-          <a:ln w="12700">
-            <a:solidFill>
-              <a:srgbClr val="F59E0B"/>
-            </a:solidFill>
-          </a:ln>
-        </p:spPr>
-        <p:style>
-          <a:lnRef idx="1">
-            <a:schemeClr val="accent1"/>
-          </a:lnRef>
-          <a:fillRef idx="3">
-            <a:schemeClr val="accent1"/>
-          </a:fillRef>
-          <a:effectRef idx="2">
-            <a:schemeClr val="accent1"/>
-          </a:effectRef>
-          <a:fontRef idx="minor">
-            <a:schemeClr val="lt1"/>
-          </a:fontRef>
-        </p:style>
-        <p:txBody>
-          <a:bodyPr rtlCol="0" anchor="ctr" wrap="square" lIns="182880" rIns="182880" tIns="182880"/>
-          <a:lstStyle/>
-          <a:p>
-            <a:pPr algn="ctr">
-              <a:defRPr sz="1300" b="1">
-                <a:solidFill>
-                  <a:srgbClr val="F59E0B"/>
-                </a:solidFill>
-                <a:latin typeface="Segoe UI"/>
-              </a:defRPr>
-            </a:pPr>
-            <a:r>
-              <a:t>3. Conceptualization</a:t>
-            </a:r>
-          </a:p>
-          <a:p>
-            <a:pPr>
-              <a:spcBef>
-                <a:spcPts val="600"/>
-              </a:spcBef>
-              <a:defRPr sz="1100">
-                <a:solidFill>
-                  <a:srgbClr val="F8FAFC"/>
-                </a:solidFill>
-                <a:latin typeface="Segoe UI"/>
-              </a:defRPr>
-            </a:pPr>
-            <a:r>
-              <a:t>Formulating algorithms, calculating CIDR masks, or balancing tree nodes.</a:t>
-            </a:r>
-          </a:p>
-        </p:txBody>
-      </p:sp>
-      <p:sp>
-        <p:nvSpPr>
-          <p:cNvPr id="8" name="Rounded Rectangle 7"/>
-          <p:cNvSpPr/>
-          <p:nvPr/>
-        </p:nvSpPr>
-        <p:spPr>
-          <a:xfrm>
-            <a:off x="8961120" y="1645920"/>
-            <a:ext cx="2468880" cy="1554480"/>
-          </a:xfrm>
-          <a:prstGeom prst="roundRect">
-            <a:avLst/>
-          </a:prstGeom>
-          <a:solidFill>
-            <a:srgbClr val="162032"/>
-          </a:solidFill>
-          <a:ln w="12700">
-            <a:solidFill>
-              <a:srgbClr val="10B981"/>
-            </a:solidFill>
-          </a:ln>
-        </p:spPr>
-        <p:style>
-          <a:lnRef idx="1">
-            <a:schemeClr val="accent1"/>
-          </a:lnRef>
-          <a:fillRef idx="3">
-            <a:schemeClr val="accent1"/>
-          </a:fillRef>
-          <a:effectRef idx="2">
-            <a:schemeClr val="accent1"/>
-          </a:effectRef>
-          <a:fontRef idx="minor">
-            <a:schemeClr val="lt1"/>
-          </a:fontRef>
-        </p:style>
-        <p:txBody>
-          <a:bodyPr rtlCol="0" anchor="ctr" wrap="square" lIns="182880" rIns="182880" tIns="182880"/>
-          <a:lstStyle/>
-          <a:p>
-            <a:pPr algn="ctr">
-              <a:defRPr sz="1300" b="1">
-                <a:solidFill>
-                  <a:srgbClr val="10B981"/>
-                </a:solidFill>
-                <a:latin typeface="Segoe UI"/>
-              </a:defRPr>
-            </a:pPr>
-            <a:r>
-              <a:t>4. Active Testing</a:t>
-            </a:r>
-          </a:p>
-          <a:p>
-            <a:pPr>
-              <a:spcBef>
-                <a:spcPts val="600"/>
-              </a:spcBef>
-              <a:defRPr sz="1100">
-                <a:solidFill>
-                  <a:srgbClr val="F8FAFC"/>
-                </a:solidFill>
-                <a:latin typeface="Segoe UI"/>
-              </a:defRPr>
-            </a:pPr>
-            <a:r>
-              <a:t>Executing code fixes &amp; virtual unlocks to restore critical server vaults.</a:t>
-            </a:r>
-          </a:p>
-        </p:txBody>
-      </p:sp>
-      <p:sp>
-        <p:nvSpPr>
-          <p:cNvPr id="9" name="Rounded Rectangle 8"/>
-          <p:cNvSpPr/>
-          <p:nvPr/>
-        </p:nvSpPr>
-        <p:spPr>
-          <a:xfrm>
-            <a:off x="731520" y="3474720"/>
-            <a:ext cx="10698480" cy="2651760"/>
-          </a:xfrm>
-          <a:prstGeom prst="roundRect">
-            <a:avLst/>
-          </a:prstGeom>
-          <a:solidFill>
-            <a:srgbClr val="162032"/>
-          </a:solidFill>
-          <a:ln w="12700">
-            <a:solidFill>
-              <a:srgbClr val="334155"/>
-            </a:solidFill>
-          </a:ln>
-        </p:spPr>
-        <p:style>
-          <a:lnRef idx="1">
-            <a:schemeClr val="accent1"/>
-          </a:lnRef>
-          <a:fillRef idx="3">
-            <a:schemeClr val="accent1"/>
-          </a:fillRef>
-          <a:effectRef idx="2">
-            <a:schemeClr val="accent1"/>
-          </a:effectRef>
-          <a:fontRef idx="minor">
-            <a:schemeClr val="lt1"/>
-          </a:fontRef>
-        </p:style>
-        <p:txBody>
-          <a:bodyPr rtlCol="0" anchor="ctr" wrap="square" lIns="274320" rIns="274320" tIns="228600"/>
-          <a:lstStyle/>
-          <a:p>
-            <a:pPr algn="ctr">
-              <a:defRPr sz="1500" b="1">
-                <a:solidFill>
-                  <a:srgbClr val="00F0FF"/>
-                </a:solidFill>
-                <a:latin typeface="Segoe UI"/>
-              </a:defRPr>
-            </a:pPr>
-            <a:r>
-              <a:t>Direct Mapping to Course Outcomes (25SC2008E - Full Stack Web Development)</a:t>
-            </a:r>
-          </a:p>
-          <a:p>
-            <a:pPr>
-              <a:spcBef>
-                <a:spcPts val="300"/>
-              </a:spcBef>
-              <a:defRPr sz="1050">
-                <a:solidFill>
-                  <a:srgbClr val="F8FAFC"/>
-                </a:solidFill>
-                <a:latin typeface="Segoe UI"/>
-              </a:defRPr>
-            </a:pPr>
-            <a:r>
-              <a:t>• CO1 (Responsive Design &amp; 3D Spatial Canvas): Cyberpunk glassmorphism, dynamic layouts, and Three.js WebGL rendering.</a:t>
-            </a:r>
-          </a:p>
-          <a:p>
-            <a:pPr>
-              <a:spcBef>
-                <a:spcPts val="300"/>
-              </a:spcBef>
-              <a:defRPr sz="1050">
-                <a:solidFill>
-                  <a:srgbClr val="F8FAFC"/>
-                </a:solidFill>
-                <a:latin typeface="Segoe UI"/>
-              </a:defRPr>
-            </a:pPr>
-            <a:r>
-              <a:t>• CO2 (Asynchronous DOM &amp; Multimedia Integration): Procedural Web Audio API sound generator and Web Speech API voice synthesis.</a:t>
-            </a:r>
-          </a:p>
-          <a:p>
-            <a:pPr>
-              <a:spcBef>
-                <a:spcPts val="300"/>
-              </a:spcBef>
-              <a:defRPr sz="1050">
-                <a:solidFill>
-                  <a:srgbClr val="F8FAFC"/>
-                </a:solidFill>
-                <a:latin typeface="Segoe UI"/>
-              </a:defRPr>
-            </a:pPr>
-            <a:r>
-              <a:t>• CO3 (State Management &amp; Analytics Visualization): React hooks, contextual team state, and 15-metric Recharts Skill Radar.</a:t>
-            </a:r>
-          </a:p>
-          <a:p>
-            <a:pPr>
-              <a:spcBef>
-                <a:spcPts val="300"/>
-              </a:spcBef>
-              <a:defRPr sz="1050">
-                <a:solidFill>
-                  <a:srgbClr val="F8FAFC"/>
-                </a:solidFill>
-                <a:latin typeface="Segoe UI"/>
-              </a:defRPr>
-            </a:pPr>
-            <a:r>
-              <a:t>• CO4 (Scalable RESTful API Architecture): Modular Express.js services, JWT auth, Helmet headers, and centralized error logging.</a:t>
-            </a:r>
-          </a:p>
-          <a:p>
-            <a:pPr>
-              <a:spcBef>
-                <a:spcPts val="300"/>
-              </a:spcBef>
-              <a:defRPr sz="1050">
-                <a:solidFill>
-                  <a:srgbClr val="F8FAFC"/>
-                </a:solidFill>
-                <a:latin typeface="Segoe UI"/>
-              </a:defRPr>
-            </a:pPr>
-            <a:r>
-              <a:t>• CO5 (Real-Time Bidirectional Event Streaming): Socket.io multi-room co-op sync and virtual MQTT telemetry bus.</a:t>
-            </a:r>
-          </a:p>
-          <a:p>
-            <a:pPr>
-              <a:spcBef>
-                <a:spcPts val="300"/>
-              </a:spcBef>
-              <a:defRPr sz="1050">
-                <a:solidFill>
-                  <a:srgbClr val="F8FAFC"/>
-                </a:solidFill>
-                <a:latin typeface="Segoe UI"/>
-              </a:defRPr>
-            </a:pPr>
-            <a:r>
-              <a:t>• CO6 (Microservices, Containerization &amp; CI/CD): Multi-stage Docker, Kubernetes Helm charts, and automated E2E testing scripts.</a:t>
+          <a:bodyPr rtlCol="0" anchor="ctr"/>
+          <a:lstStyle/>
+          <a:p>
+            <a:pPr algn="ctr"/>
+          </a:p>
+        </p:txBody>
+      </p:sp>
+      <p:sp>
+        <p:nvSpPr>
+          <p:cNvPr id="9" name="TextBox 8"/>
+          <p:cNvSpPr txBox="1"/>
+          <p:nvPr/>
+        </p:nvSpPr>
+        <p:spPr>
+          <a:xfrm>
+            <a:off x="6355080" y="1874519"/>
+            <a:ext cx="4846320" cy="320040"/>
+          </a:xfrm>
+          <a:prstGeom prst="rect">
+            <a:avLst/>
+          </a:prstGeom>
+          <a:noFill/>
+        </p:spPr>
+        <p:txBody>
+          <a:bodyPr wrap="none">
+            <a:spAutoFit/>
+          </a:bodyPr>
+          <a:lstStyle/>
+          <a:p>
+            <a:pPr>
+              <a:defRPr sz="1200" b="1">
+                <a:solidFill>
+                  <a:srgbClr val="2563EB"/>
+                </a:solidFill>
+              </a:defRPr>
+            </a:pPr>
+            <a:r>
+              <a:t>CIRCUIT WIRING &amp; PIN INTERFACE MAP</a:t>
+            </a:r>
+          </a:p>
+        </p:txBody>
+      </p:sp>
+      <p:graphicFrame>
+        <p:nvGraphicFramePr>
+          <p:cNvPr id="10" name="Table 9"/>
+          <p:cNvGraphicFramePr>
+            <a:graphicFrameLocks noGrp="1"/>
+          </p:cNvGraphicFramePr>
+          <p:nvPr/>
+        </p:nvGraphicFramePr>
+        <p:xfrm>
+          <a:off x="6355080" y="2286000"/>
+          <a:ext cx="4846320" cy="2926080"/>
+        </p:xfrm>
+        <a:graphic>
+          <a:graphicData uri="http://schemas.openxmlformats.org/drawingml/2006/table">
+            <a:tbl>
+              <a:tblPr firstRow="1" bandRow="1">
+                <a:tableStyleId>{5C22544A-7EE6-4342-B048-85BDC9FD1C3A}</a:tableStyleId>
+              </a:tblPr>
+              <a:tblGrid>
+                <a:gridCol w="1645920"/>
+                <a:gridCol w="1188720"/>
+                <a:gridCol w="2011680"/>
+              </a:tblGrid>
+              <a:tr h="418011">
+                <a:tc>
+                  <a:txBody>
+                    <a:bodyPr/>
+                    <a:lstStyle/>
+                    <a:p>
+                      <a:pPr>
+                        <a:defRPr b="1" sz="950">
+                          <a:solidFill>
+                            <a:srgbClr val="2563EB"/>
+                          </a:solidFill>
+                        </a:defRPr>
+                      </a:pPr>
+                      <a:r>
+                        <a:t>Component Pin</a:t>
+                      </a:r>
+                    </a:p>
+                  </a:txBody>
+                  <a:tcPr>
+                    <a:solidFill>
+                      <a:srgbClr val="EFF6FF"/>
+                    </a:solidFill>
+                  </a:tcPr>
+                </a:tc>
+                <a:tc>
+                  <a:txBody>
+                    <a:bodyPr/>
+                    <a:lstStyle/>
+                    <a:p>
+                      <a:pPr>
+                        <a:defRPr b="1" sz="950">
+                          <a:solidFill>
+                            <a:srgbClr val="2563EB"/>
+                          </a:solidFill>
+                        </a:defRPr>
+                      </a:pPr>
+                      <a:r>
+                        <a:t>ESP32 Pin</a:t>
+                      </a:r>
+                    </a:p>
+                  </a:txBody>
+                  <a:tcPr>
+                    <a:solidFill>
+                      <a:srgbClr val="EFF6FF"/>
+                    </a:solidFill>
+                  </a:tcPr>
+                </a:tc>
+                <a:tc>
+                  <a:txBody>
+                    <a:bodyPr/>
+                    <a:lstStyle/>
+                    <a:p>
+                      <a:pPr>
+                        <a:defRPr b="1" sz="950">
+                          <a:solidFill>
+                            <a:srgbClr val="2563EB"/>
+                          </a:solidFill>
+                        </a:defRPr>
+                      </a:pPr>
+                      <a:r>
+                        <a:t>Signal / Function</a:t>
+                      </a:r>
+                    </a:p>
+                  </a:txBody>
+                  <a:tcPr>
+                    <a:solidFill>
+                      <a:srgbClr val="EFF6FF"/>
+                    </a:solidFill>
+                  </a:tcPr>
+                </a:tc>
+              </a:tr>
+              <a:tr h="418011">
+                <a:tc>
+                  <a:txBody>
+                    <a:bodyPr/>
+                    <a:lstStyle/>
+                    <a:p>
+                      <a:pPr>
+                        <a:defRPr sz="900">
+                          <a:solidFill>
+                            <a:srgbClr val="0F172A"/>
+                          </a:solidFill>
+                        </a:defRPr>
+                      </a:pPr>
+                      <a:r>
+                        <a:t>DHT22 VCC (Pin 1)</a:t>
+                      </a:r>
+                    </a:p>
+                  </a:txBody>
+                  <a:tcPr>
+                    <a:solidFill>
+                      <a:srgbClr val="FFFFFF"/>
+                    </a:solidFill>
+                  </a:tcPr>
+                </a:tc>
+                <a:tc>
+                  <a:txBody>
+                    <a:bodyPr/>
+                    <a:lstStyle/>
+                    <a:p>
+                      <a:pPr>
+                        <a:defRPr sz="900">
+                          <a:solidFill>
+                            <a:srgbClr val="0F172A"/>
+                          </a:solidFill>
+                        </a:defRPr>
+                      </a:pPr>
+                      <a:r>
+                        <a:t>3V3 (3.3V)</a:t>
+                      </a:r>
+                    </a:p>
+                  </a:txBody>
+                  <a:tcPr>
+                    <a:solidFill>
+                      <a:srgbClr val="FFFFFF"/>
+                    </a:solidFill>
+                  </a:tcPr>
+                </a:tc>
+                <a:tc>
+                  <a:txBody>
+                    <a:bodyPr/>
+                    <a:lstStyle/>
+                    <a:p>
+                      <a:pPr>
+                        <a:defRPr sz="900">
+                          <a:solidFill>
+                            <a:srgbClr val="334155"/>
+                          </a:solidFill>
+                        </a:defRPr>
+                      </a:pPr>
+                      <a:r>
+                        <a:t>Power Rail (+)</a:t>
+                      </a:r>
+                    </a:p>
+                  </a:txBody>
+                  <a:tcPr>
+                    <a:solidFill>
+                      <a:srgbClr val="FFFFFF"/>
+                    </a:solidFill>
+                  </a:tcPr>
+                </a:tc>
+              </a:tr>
+              <a:tr h="418011">
+                <a:tc>
+                  <a:txBody>
+                    <a:bodyPr/>
+                    <a:lstStyle/>
+                    <a:p>
+                      <a:pPr>
+                        <a:defRPr sz="900">
+                          <a:solidFill>
+                            <a:srgbClr val="0F172A"/>
+                          </a:solidFill>
+                        </a:defRPr>
+                      </a:pPr>
+                      <a:r>
+                        <a:t>DHT22 DATA (Pin 2)</a:t>
+                      </a:r>
+                    </a:p>
+                  </a:txBody>
+                  <a:tcPr>
+                    <a:solidFill>
+                      <a:srgbClr val="F8FAFC"/>
+                    </a:solidFill>
+                  </a:tcPr>
+                </a:tc>
+                <a:tc>
+                  <a:txBody>
+                    <a:bodyPr/>
+                    <a:lstStyle/>
+                    <a:p>
+                      <a:pPr>
+                        <a:defRPr sz="900">
+                          <a:solidFill>
+                            <a:srgbClr val="0F172A"/>
+                          </a:solidFill>
+                        </a:defRPr>
+                      </a:pPr>
+                      <a:r>
+                        <a:t>GPIO 4</a:t>
+                      </a:r>
+                    </a:p>
+                  </a:txBody>
+                  <a:tcPr>
+                    <a:solidFill>
+                      <a:srgbClr val="F8FAFC"/>
+                    </a:solidFill>
+                  </a:tcPr>
+                </a:tc>
+                <a:tc>
+                  <a:txBody>
+                    <a:bodyPr/>
+                    <a:lstStyle/>
+                    <a:p>
+                      <a:pPr>
+                        <a:defRPr sz="900">
+                          <a:solidFill>
+                            <a:srgbClr val="334155"/>
+                          </a:solidFill>
+                        </a:defRPr>
+                      </a:pPr>
+                      <a:r>
+                        <a:t>Digital 1-Wire Data</a:t>
+                      </a:r>
+                    </a:p>
+                  </a:txBody>
+                  <a:tcPr>
+                    <a:solidFill>
+                      <a:srgbClr val="F8FAFC"/>
+                    </a:solidFill>
+                  </a:tcPr>
+                </a:tc>
+              </a:tr>
+              <a:tr h="418011">
+                <a:tc>
+                  <a:txBody>
+                    <a:bodyPr/>
+                    <a:lstStyle/>
+                    <a:p>
+                      <a:pPr>
+                        <a:defRPr sz="900">
+                          <a:solidFill>
+                            <a:srgbClr val="0F172A"/>
+                          </a:solidFill>
+                        </a:defRPr>
+                      </a:pPr>
+                      <a:r>
+                        <a:t>DHT22 GND (Pin 4)</a:t>
+                      </a:r>
+                    </a:p>
+                  </a:txBody>
+                  <a:tcPr>
+                    <a:solidFill>
+                      <a:srgbClr val="FFFFFF"/>
+                    </a:solidFill>
+                  </a:tcPr>
+                </a:tc>
+                <a:tc>
+                  <a:txBody>
+                    <a:bodyPr/>
+                    <a:lstStyle/>
+                    <a:p>
+                      <a:pPr>
+                        <a:defRPr sz="900">
+                          <a:solidFill>
+                            <a:srgbClr val="0F172A"/>
+                          </a:solidFill>
+                        </a:defRPr>
+                      </a:pPr>
+                      <a:r>
+                        <a:t>GND</a:t>
+                      </a:r>
+                    </a:p>
+                  </a:txBody>
+                  <a:tcPr>
+                    <a:solidFill>
+                      <a:srgbClr val="FFFFFF"/>
+                    </a:solidFill>
+                  </a:tcPr>
+                </a:tc>
+                <a:tc>
+                  <a:txBody>
+                    <a:bodyPr/>
+                    <a:lstStyle/>
+                    <a:p>
+                      <a:pPr>
+                        <a:defRPr sz="900">
+                          <a:solidFill>
+                            <a:srgbClr val="334155"/>
+                          </a:solidFill>
+                        </a:defRPr>
+                      </a:pPr>
+                      <a:r>
+                        <a:t>Common Ground (-)</a:t>
+                      </a:r>
+                    </a:p>
+                  </a:txBody>
+                  <a:tcPr>
+                    <a:solidFill>
+                      <a:srgbClr val="FFFFFF"/>
+                    </a:solidFill>
+                  </a:tcPr>
+                </a:tc>
+              </a:tr>
+              <a:tr h="418011">
+                <a:tc>
+                  <a:txBody>
+                    <a:bodyPr/>
+                    <a:lstStyle/>
+                    <a:p>
+                      <a:pPr>
+                        <a:defRPr sz="900">
+                          <a:solidFill>
+                            <a:srgbClr val="0F172A"/>
+                          </a:solidFill>
+                        </a:defRPr>
+                      </a:pPr>
+                      <a:r>
+                        <a:t>Status LED Anode</a:t>
+                      </a:r>
+                    </a:p>
+                  </a:txBody>
+                  <a:tcPr>
+                    <a:solidFill>
+                      <a:srgbClr val="F8FAFC"/>
+                    </a:solidFill>
+                  </a:tcPr>
+                </a:tc>
+                <a:tc>
+                  <a:txBody>
+                    <a:bodyPr/>
+                    <a:lstStyle/>
+                    <a:p>
+                      <a:pPr>
+                        <a:defRPr sz="900">
+                          <a:solidFill>
+                            <a:srgbClr val="0F172A"/>
+                          </a:solidFill>
+                        </a:defRPr>
+                      </a:pPr>
+                      <a:r>
+                        <a:t>GPIO 2</a:t>
+                      </a:r>
+                    </a:p>
+                  </a:txBody>
+                  <a:tcPr>
+                    <a:solidFill>
+                      <a:srgbClr val="F8FAFC"/>
+                    </a:solidFill>
+                  </a:tcPr>
+                </a:tc>
+                <a:tc>
+                  <a:txBody>
+                    <a:bodyPr/>
+                    <a:lstStyle/>
+                    <a:p>
+                      <a:pPr>
+                        <a:defRPr sz="900">
+                          <a:solidFill>
+                            <a:srgbClr val="334155"/>
+                          </a:solidFill>
+                        </a:defRPr>
+                      </a:pPr>
+                      <a:r>
+                        <a:t>WiFi TX Indicator</a:t>
+                      </a:r>
+                    </a:p>
+                  </a:txBody>
+                  <a:tcPr>
+                    <a:solidFill>
+                      <a:srgbClr val="F8FAFC"/>
+                    </a:solidFill>
+                  </a:tcPr>
+                </a:tc>
+              </a:tr>
+              <a:tr h="418011">
+                <a:tc>
+                  <a:txBody>
+                    <a:bodyPr/>
+                    <a:lstStyle/>
+                    <a:p>
+                      <a:pPr>
+                        <a:defRPr sz="900">
+                          <a:solidFill>
+                            <a:srgbClr val="0F172A"/>
+                          </a:solidFill>
+                        </a:defRPr>
+                      </a:pPr>
+                      <a:r>
+                        <a:t>Alert LED Anode</a:t>
+                      </a:r>
+                    </a:p>
+                  </a:txBody>
+                  <a:tcPr>
+                    <a:solidFill>
+                      <a:srgbClr val="FFFFFF"/>
+                    </a:solidFill>
+                  </a:tcPr>
+                </a:tc>
+                <a:tc>
+                  <a:txBody>
+                    <a:bodyPr/>
+                    <a:lstStyle/>
+                    <a:p>
+                      <a:pPr>
+                        <a:defRPr sz="900">
+                          <a:solidFill>
+                            <a:srgbClr val="0F172A"/>
+                          </a:solidFill>
+                        </a:defRPr>
+                      </a:pPr>
+                      <a:r>
+                        <a:t>GPIO 15</a:t>
+                      </a:r>
+                    </a:p>
+                  </a:txBody>
+                  <a:tcPr>
+                    <a:solidFill>
+                      <a:srgbClr val="FFFFFF"/>
+                    </a:solidFill>
+                  </a:tcPr>
+                </a:tc>
+                <a:tc>
+                  <a:txBody>
+                    <a:bodyPr/>
+                    <a:lstStyle/>
+                    <a:p>
+                      <a:pPr>
+                        <a:defRPr sz="900">
+                          <a:solidFill>
+                            <a:srgbClr val="334155"/>
+                          </a:solidFill>
+                        </a:defRPr>
+                      </a:pPr>
+                      <a:r>
+                        <a:t>Overheat Warning (&gt;28°C)</a:t>
+                      </a:r>
+                    </a:p>
+                  </a:txBody>
+                  <a:tcPr>
+                    <a:solidFill>
+                      <a:srgbClr val="FFFFFF"/>
+                    </a:solidFill>
+                  </a:tcPr>
+                </a:tc>
+              </a:tr>
+              <a:tr h="418014">
+                <a:tc>
+                  <a:txBody>
+                    <a:bodyPr/>
+                    <a:lstStyle/>
+                    <a:p>
+                      <a:pPr>
+                        <a:defRPr sz="900">
+                          <a:solidFill>
+                            <a:srgbClr val="0F172A"/>
+                          </a:solidFill>
+                        </a:defRPr>
+                      </a:pPr>
+                      <a:r>
+                        <a:t>Buzzer Positive</a:t>
+                      </a:r>
+                    </a:p>
+                  </a:txBody>
+                  <a:tcPr>
+                    <a:solidFill>
+                      <a:srgbClr val="F8FAFC"/>
+                    </a:solidFill>
+                  </a:tcPr>
+                </a:tc>
+                <a:tc>
+                  <a:txBody>
+                    <a:bodyPr/>
+                    <a:lstStyle/>
+                    <a:p>
+                      <a:pPr>
+                        <a:defRPr sz="900">
+                          <a:solidFill>
+                            <a:srgbClr val="0F172A"/>
+                          </a:solidFill>
+                        </a:defRPr>
+                      </a:pPr>
+                      <a:r>
+                        <a:t>GPIO 13</a:t>
+                      </a:r>
+                    </a:p>
+                  </a:txBody>
+                  <a:tcPr>
+                    <a:solidFill>
+                      <a:srgbClr val="F8FAFC"/>
+                    </a:solidFill>
+                  </a:tcPr>
+                </a:tc>
+                <a:tc>
+                  <a:txBody>
+                    <a:bodyPr/>
+                    <a:lstStyle/>
+                    <a:p>
+                      <a:pPr>
+                        <a:defRPr sz="900">
+                          <a:solidFill>
+                            <a:srgbClr val="334155"/>
+                          </a:solidFill>
+                        </a:defRPr>
+                      </a:pPr>
+                      <a:r>
+                        <a:t>Acoustic Alarm (&gt;32°C)</a:t>
+                      </a:r>
+                    </a:p>
+                  </a:txBody>
+                  <a:tcPr>
+                    <a:solidFill>
+                      <a:srgbClr val="F8FAFC"/>
+                    </a:solidFill>
+                  </a:tcPr>
+                </a:tc>
+              </a:tr>
+            </a:tbl>
+          </a:graphicData>
+        </a:graphic>
+      </p:graphicFrame>
+      <p:sp>
+        <p:nvSpPr>
+          <p:cNvPr id="11" name="TextBox 10"/>
+          <p:cNvSpPr txBox="1"/>
+          <p:nvPr/>
+        </p:nvSpPr>
+        <p:spPr>
+          <a:xfrm>
+            <a:off x="6355080" y="5394960"/>
+            <a:ext cx="4846320" cy="548640"/>
+          </a:xfrm>
+          <a:prstGeom prst="rect">
+            <a:avLst/>
+          </a:prstGeom>
+          <a:noFill/>
+        </p:spPr>
+        <p:txBody>
+          <a:bodyPr wrap="none">
+            <a:spAutoFit/>
+          </a:bodyPr>
+          <a:lstStyle/>
+          <a:p>
+            <a:pPr>
+              <a:defRPr sz="950" b="1">
+                <a:solidFill>
+                  <a:srgbClr val="0D9488"/>
+                </a:solidFill>
+              </a:defRPr>
+            </a:pPr>
+            <a:r>
+              <a:t>⚡ Built-in 10kΩ pull-up resistor stabilizes the digital 1-Wire bus.</a:t>
             </a:r>
           </a:p>
         </p:txBody>
@@ -5443,7 +5918,7 @@
             <a:avLst/>
           </a:prstGeom>
           <a:solidFill>
-            <a:srgbClr val="0A0F1D"/>
+            <a:srgbClr val="FFFFFF"/>
           </a:solidFill>
           <a:ln>
             <a:noFill/>
@@ -5479,8 +5954,8 @@
         </p:nvSpPr>
         <p:spPr>
           <a:xfrm>
-            <a:off x="731520" y="411480"/>
-            <a:ext cx="10698480" cy="320040"/>
+            <a:off x="731520" y="384048"/>
+            <a:ext cx="10698480" cy="274320"/>
           </a:xfrm>
           <a:prstGeom prst="rect">
             <a:avLst/>
@@ -5494,15 +5969,15 @@
           <a:lstStyle/>
           <a:p>
             <a:pPr>
-              <a:defRPr sz="1100" b="1">
-                <a:solidFill>
-                  <a:srgbClr val="00F0FF"/>
+              <a:defRPr sz="1000" b="1">
+                <a:solidFill>
+                  <a:srgbClr val="2563EB"/>
                 </a:solidFill>
                 <a:latin typeface="Segoe UI"/>
               </a:defRPr>
             </a:pPr>
             <a:r>
-              <a:t>TECH STACK</a:t>
+              <a:t>VIRTUAL SIMULATOR</a:t>
             </a:r>
           </a:p>
         </p:txBody>
@@ -5515,8 +5990,8 @@
         </p:nvSpPr>
         <p:spPr>
           <a:xfrm>
-            <a:off x="731520" y="731520"/>
-            <a:ext cx="10698480" cy="594360"/>
+            <a:off x="731520" y="658368"/>
+            <a:ext cx="10698480" cy="502920"/>
           </a:xfrm>
           <a:prstGeom prst="rect">
             <a:avLst/>
@@ -5530,55 +6005,75 @@
           <a:lstStyle/>
           <a:p>
             <a:pPr>
-              <a:defRPr sz="2400" b="1">
-                <a:solidFill>
-                  <a:srgbClr val="F8FAFC"/>
+              <a:defRPr sz="2200" b="1">
+                <a:solidFill>
+                  <a:srgbClr val="0F172A"/>
                 </a:solidFill>
                 <a:latin typeface="Segoe UI"/>
               </a:defRPr>
             </a:pPr>
             <a:r>
-              <a:t>Comprehensive Software Architecture &amp; Tech Stack</a:t>
-            </a:r>
-          </a:p>
-          <a:p>
-            <a:pPr>
-              <a:spcBef>
-                <a:spcPts val="400"/>
-              </a:spcBef>
-              <a:defRPr sz="1200">
-                <a:solidFill>
-                  <a:srgbClr val="94A3B8"/>
+              <a:t>Virtual Hardware Simulation: Two Zero-Hardware Options</a:t>
+            </a:r>
+          </a:p>
+        </p:txBody>
+      </p:sp>
+      <p:sp>
+        <p:nvSpPr>
+          <p:cNvPr id="5" name="TextBox 4"/>
+          <p:cNvSpPr txBox="1"/>
+          <p:nvPr/>
+        </p:nvSpPr>
+        <p:spPr>
+          <a:xfrm>
+            <a:off x="731520" y="1188720"/>
+            <a:ext cx="10698480" cy="320040"/>
+          </a:xfrm>
+          <a:prstGeom prst="rect">
+            <a:avLst/>
+          </a:prstGeom>
+          <a:noFill/>
+        </p:spPr>
+        <p:txBody>
+          <a:bodyPr wrap="square" lIns="0" tIns="0" rIns="0" bIns="0">
+            <a:spAutoFit/>
+          </a:bodyPr>
+          <a:lstStyle/>
+          <a:p>
+            <a:pPr>
+              <a:defRPr sz="1100">
+                <a:solidFill>
+                  <a:srgbClr val="64748B"/>
                 </a:solidFill>
                 <a:latin typeface="Segoe UI"/>
               </a:defRPr>
             </a:pPr>
             <a:r>
-              <a:t>A decoupled, modern cloud-native stack optimized for sub-15ms real-time latency.</a:t>
-            </a:r>
-          </a:p>
-        </p:txBody>
-      </p:sp>
-      <p:sp>
-        <p:nvSpPr>
-          <p:cNvPr id="5" name="Rounded Rectangle 4"/>
+              <a:t>Testing and demonstrating real-time IoT hardware without physical breadboards.</a:t>
+            </a:r>
+          </a:p>
+        </p:txBody>
+      </p:sp>
+      <p:sp>
+        <p:nvSpPr>
+          <p:cNvPr id="6" name="Rounded Rectangle 5"/>
           <p:cNvSpPr/>
           <p:nvPr/>
         </p:nvSpPr>
         <p:spPr>
           <a:xfrm>
-            <a:off x="731520" y="1645920"/>
-            <a:ext cx="3364992" cy="4389120"/>
+            <a:off x="731520" y="1691640"/>
+            <a:ext cx="5120640" cy="4480560"/>
           </a:xfrm>
           <a:prstGeom prst="roundRect">
             <a:avLst/>
           </a:prstGeom>
           <a:solidFill>
-            <a:srgbClr val="162032"/>
+            <a:srgbClr val="F0FDFA"/>
           </a:solidFill>
-          <a:ln w="12700">
+          <a:ln w="15240">
             <a:solidFill>
-              <a:srgbClr val="00F0FF"/>
+              <a:srgbClr val="99F6E4"/>
             </a:solidFill>
           </a:ln>
         </p:spPr>
@@ -5597,71 +6092,203 @@
           </a:fontRef>
         </p:style>
         <p:txBody>
-          <a:bodyPr rtlCol="0" anchor="ctr" wrap="square" lIns="274320" rIns="274320" tIns="274320"/>
-          <a:lstStyle/>
-          <a:p>
-            <a:pPr algn="ctr">
-              <a:defRPr sz="1500" b="1">
-                <a:solidFill>
-                  <a:srgbClr val="00F0FF"/>
-                </a:solidFill>
-                <a:latin typeface="Segoe UI"/>
-              </a:defRPr>
-            </a:pPr>
-            <a:r>
-              <a:t>Frontend &amp; Presentation Layer</a:t>
+          <a:bodyPr rtlCol="0" anchor="ctr"/>
+          <a:lstStyle/>
+          <a:p>
+            <a:pPr algn="ctr"/>
+          </a:p>
+        </p:txBody>
+      </p:sp>
+      <p:sp>
+        <p:nvSpPr>
+          <p:cNvPr id="7" name="TextBox 6"/>
+          <p:cNvSpPr txBox="1"/>
+          <p:nvPr/>
+        </p:nvSpPr>
+        <p:spPr>
+          <a:xfrm>
+            <a:off x="960120" y="1874519"/>
+            <a:ext cx="4663440" cy="4023360"/>
+          </a:xfrm>
+          <a:prstGeom prst="rect">
+            <a:avLst/>
+          </a:prstGeom>
+          <a:noFill/>
+        </p:spPr>
+        <p:txBody>
+          <a:bodyPr wrap="square">
+            <a:spAutoFit/>
+          </a:bodyPr>
+          <a:lstStyle/>
+          <a:p>
+            <a:pPr>
+              <a:defRPr sz="1200" b="1">
+                <a:solidFill>
+                  <a:srgbClr val="0D9488"/>
+                </a:solidFill>
+              </a:defRPr>
+            </a:pPr>
+            <a:r>
+              <a:t>OPTION 1: BUILT-IN WORKBENCH (/simulator)</a:t>
             </a:r>
           </a:p>
           <a:p>
             <a:pPr>
               <a:spcBef>
-                <a:spcPts val="1200"/>
+                <a:spcPts val="700"/>
               </a:spcBef>
-              <a:defRPr sz="1150">
-                <a:solidFill>
-                  <a:srgbClr val="F8FAFC"/>
-                </a:solidFill>
-                <a:latin typeface="Segoe UI"/>
-              </a:defRPr>
-            </a:pPr>
-            <a:r>
-              <a:t>• Next.js 14 (App Router) &amp; React 18: High-performance modular architecture.</a:t>
-            </a:r>
-            <a:br/>
-            <a:r>
-              <a:t>• Tailwind CSS &amp; Framer Motion: Cyberpunk aesthetics &amp; smooth micro-animations.</a:t>
-            </a:r>
-            <a:br/>
-            <a:r>
-              <a:t>• Three.js (WebGL Canvas): Interactive 3D escape room environment.</a:t>
-            </a:r>
-            <a:br/>
-            <a:r>
-              <a:t>• Web Audio API &amp; Web Speech API: Pure procedural sound FX and AI voice briefings.</a:t>
-            </a:r>
-          </a:p>
-        </p:txBody>
-      </p:sp>
-      <p:sp>
-        <p:nvSpPr>
-          <p:cNvPr id="6" name="Rounded Rectangle 5"/>
+              <a:defRPr b="1" sz="1050">
+                <a:solidFill>
+                  <a:srgbClr val="0F172A"/>
+                </a:solidFill>
+              </a:defRPr>
+            </a:pPr>
+            <a:r>
+              <a:t>✔  Visual Circuit Breadboard</a:t>
+            </a:r>
+          </a:p>
+          <a:p>
+            <a:pPr>
+              <a:defRPr sz="950">
+                <a:solidFill>
+                  <a:srgbClr val="334155"/>
+                </a:solidFill>
+              </a:defRPr>
+            </a:pPr>
+            <a:r>
+              <a:t>    Realistic animated view of ESP32, DHT22, wiring &amp; OLED.</a:t>
+            </a:r>
+          </a:p>
+          <a:p>
+            <a:pPr>
+              <a:spcBef>
+                <a:spcPts val="700"/>
+              </a:spcBef>
+              <a:defRPr b="1" sz="1050">
+                <a:solidFill>
+                  <a:srgbClr val="0F172A"/>
+                </a:solidFill>
+              </a:defRPr>
+            </a:pPr>
+            <a:r>
+              <a:t>✔  Interactive Sliders</a:t>
+            </a:r>
+          </a:p>
+          <a:p>
+            <a:pPr>
+              <a:defRPr sz="950">
+                <a:solidFill>
+                  <a:srgbClr val="334155"/>
+                </a:solidFill>
+              </a:defRPr>
+            </a:pPr>
+            <a:r>
+              <a:t>    Real-time dials for Temp (15°C–48°C) and Humidity (10%–95%).</a:t>
+            </a:r>
+          </a:p>
+          <a:p>
+            <a:pPr>
+              <a:spcBef>
+                <a:spcPts val="700"/>
+              </a:spcBef>
+              <a:defRPr b="1" sz="1050">
+                <a:solidFill>
+                  <a:srgbClr val="0F172A"/>
+                </a:solidFill>
+              </a:defRPr>
+            </a:pPr>
+            <a:r>
+              <a:t>✔  One-Click Presets</a:t>
+            </a:r>
+          </a:p>
+          <a:p>
+            <a:pPr>
+              <a:defRPr sz="950">
+                <a:solidFill>
+                  <a:srgbClr val="334155"/>
+                </a:solidFill>
+              </a:defRPr>
+            </a:pPr>
+            <a:r>
+              <a:t>    Normal (22°C), Warm (28°C), Overheat (34°C), Meltdown (45°C).</a:t>
+            </a:r>
+          </a:p>
+          <a:p>
+            <a:pPr>
+              <a:spcBef>
+                <a:spcPts val="700"/>
+              </a:spcBef>
+              <a:defRPr b="1" sz="1050">
+                <a:solidFill>
+                  <a:srgbClr val="0F172A"/>
+                </a:solidFill>
+              </a:defRPr>
+            </a:pPr>
+            <a:r>
+              <a:t>✔  Live Serial Monitor</a:t>
+            </a:r>
+          </a:p>
+          <a:p>
+            <a:pPr>
+              <a:defRPr sz="950">
+                <a:solidFill>
+                  <a:srgbClr val="334155"/>
+                </a:solidFill>
+              </a:defRPr>
+            </a:pPr>
+            <a:r>
+              <a:t>    115200 baud console emulating Arduino IDE serial logs.</a:t>
+            </a:r>
+          </a:p>
+          <a:p>
+            <a:pPr>
+              <a:spcBef>
+                <a:spcPts val="700"/>
+              </a:spcBef>
+              <a:defRPr b="1" sz="1050">
+                <a:solidFill>
+                  <a:srgbClr val="0F172A"/>
+                </a:solidFill>
+              </a:defRPr>
+            </a:pPr>
+            <a:r>
+              <a:t>✔  Instant Dashboard Sync</a:t>
+            </a:r>
+          </a:p>
+          <a:p>
+            <a:pPr>
+              <a:defRPr sz="950">
+                <a:solidFill>
+                  <a:srgbClr val="334155"/>
+                </a:solidFill>
+              </a:defRPr>
+            </a:pPr>
+            <a:r>
+              <a:t>    Overriding values immediately propagates to live dashboard!</a:t>
+            </a:r>
+          </a:p>
+        </p:txBody>
+      </p:sp>
+      <p:sp>
+        <p:nvSpPr>
+          <p:cNvPr id="8" name="Rounded Rectangle 7"/>
           <p:cNvSpPr/>
           <p:nvPr/>
         </p:nvSpPr>
         <p:spPr>
           <a:xfrm>
-            <a:off x="4389120" y="1645920"/>
-            <a:ext cx="3364992" cy="4389120"/>
+            <a:off x="6172200" y="1691640"/>
+            <a:ext cx="5257800" cy="4480560"/>
           </a:xfrm>
           <a:prstGeom prst="roundRect">
             <a:avLst/>
           </a:prstGeom>
           <a:solidFill>
-            <a:srgbClr val="162032"/>
+            <a:srgbClr val="EFF6FF"/>
           </a:solidFill>
-          <a:ln w="12700">
+          <a:ln w="15240">
             <a:solidFill>
-              <a:srgbClr val="A855F7"/>
+              <a:srgbClr val="BFDBFE"/>
             </a:solidFill>
           </a:ln>
         </p:spPr>
@@ -5680,130 +6307,179 @@
           </a:fontRef>
         </p:style>
         <p:txBody>
-          <a:bodyPr rtlCol="0" anchor="ctr" wrap="square" lIns="274320" rIns="274320" tIns="274320"/>
-          <a:lstStyle/>
-          <a:p>
-            <a:pPr algn="ctr">
-              <a:defRPr sz="1500" b="1">
-                <a:solidFill>
-                  <a:srgbClr val="A855F7"/>
-                </a:solidFill>
-                <a:latin typeface="Segoe UI"/>
-              </a:defRPr>
-            </a:pPr>
-            <a:r>
-              <a:t>Backend &amp; Real-Time Engine</a:t>
+          <a:bodyPr rtlCol="0" anchor="ctr"/>
+          <a:lstStyle/>
+          <a:p>
+            <a:pPr algn="ctr"/>
+          </a:p>
+        </p:txBody>
+      </p:sp>
+      <p:sp>
+        <p:nvSpPr>
+          <p:cNvPr id="9" name="TextBox 8"/>
+          <p:cNvSpPr txBox="1"/>
+          <p:nvPr/>
+        </p:nvSpPr>
+        <p:spPr>
+          <a:xfrm>
+            <a:off x="6400800" y="1874519"/>
+            <a:ext cx="4754880" cy="4023360"/>
+          </a:xfrm>
+          <a:prstGeom prst="rect">
+            <a:avLst/>
+          </a:prstGeom>
+          <a:noFill/>
+        </p:spPr>
+        <p:txBody>
+          <a:bodyPr wrap="square">
+            <a:spAutoFit/>
+          </a:bodyPr>
+          <a:lstStyle/>
+          <a:p>
+            <a:pPr>
+              <a:defRPr sz="1200" b="1">
+                <a:solidFill>
+                  <a:srgbClr val="2563EB"/>
+                </a:solidFill>
+              </a:defRPr>
+            </a:pPr>
+            <a:r>
+              <a:t>OPTION 2: WOKWI CLOUD SIMULATOR (wokwi.com)</a:t>
             </a:r>
           </a:p>
           <a:p>
             <a:pPr>
               <a:spcBef>
-                <a:spcPts val="1200"/>
+                <a:spcPts val="700"/>
               </a:spcBef>
-              <a:defRPr sz="1150">
-                <a:solidFill>
-                  <a:srgbClr val="F8FAFC"/>
-                </a:solidFill>
-                <a:latin typeface="Segoe UI"/>
-              </a:defRPr>
-            </a:pPr>
-            <a:r>
-              <a:t>• Node.js &amp; Express.js: Scalable RESTful API microservices with Morgan &amp; Helmet.</a:t>
-            </a:r>
-            <a:br/>
-            <a:r>
-              <a:t>• Socket.io: Real-time team roster sync, shared stage unlocks, and chat pings.</a:t>
-            </a:r>
-            <a:br/>
-            <a:r>
-              <a:t>• MQTT.js (HiveMQ Broker): High-throughput virtual telemetry pub/sub channel.</a:t>
-            </a:r>
-            <a:br/>
-            <a:r>
-              <a:t>• Self-Healing Watchdog Engine: Background service auto-reconnecting dropouts.</a:t>
-            </a:r>
-          </a:p>
-        </p:txBody>
-      </p:sp>
-      <p:sp>
-        <p:nvSpPr>
-          <p:cNvPr id="7" name="Rounded Rectangle 6"/>
-          <p:cNvSpPr/>
-          <p:nvPr/>
-        </p:nvSpPr>
-        <p:spPr>
-          <a:xfrm>
-            <a:off x="8046720" y="1645920"/>
-            <a:ext cx="3364992" cy="4389120"/>
-          </a:xfrm>
-          <a:prstGeom prst="roundRect">
-            <a:avLst/>
-          </a:prstGeom>
-          <a:solidFill>
-            <a:srgbClr val="162032"/>
-          </a:solidFill>
-          <a:ln w="12700">
-            <a:solidFill>
-              <a:srgbClr val="10B981"/>
-            </a:solidFill>
-          </a:ln>
-        </p:spPr>
-        <p:style>
-          <a:lnRef idx="1">
-            <a:schemeClr val="accent1"/>
-          </a:lnRef>
-          <a:fillRef idx="3">
-            <a:schemeClr val="accent1"/>
-          </a:fillRef>
-          <a:effectRef idx="2">
-            <a:schemeClr val="accent1"/>
-          </a:effectRef>
-          <a:fontRef idx="minor">
-            <a:schemeClr val="lt1"/>
-          </a:fontRef>
-        </p:style>
-        <p:txBody>
-          <a:bodyPr rtlCol="0" anchor="ctr" wrap="square" lIns="274320" rIns="274320" tIns="274320"/>
-          <a:lstStyle/>
-          <a:p>
-            <a:pPr algn="ctr">
-              <a:defRPr sz="1500" b="1">
-                <a:solidFill>
-                  <a:srgbClr val="10B981"/>
-                </a:solidFill>
-                <a:latin typeface="Segoe UI"/>
-              </a:defRPr>
-            </a:pPr>
-            <a:r>
-              <a:t>Databases, AI &amp; DevOps</a:t>
+              <a:defRPr b="1" sz="1050">
+                <a:solidFill>
+                  <a:srgbClr val="0F172A"/>
+                </a:solidFill>
+              </a:defRPr>
+            </a:pPr>
+            <a:r>
+              <a:t>⚡  Industry Standard</a:t>
+            </a:r>
+          </a:p>
+          <a:p>
+            <a:pPr>
+              <a:defRPr sz="950">
+                <a:solidFill>
+                  <a:srgbClr val="334155"/>
+                </a:solidFill>
+              </a:defRPr>
+            </a:pPr>
+            <a:r>
+              <a:t>    Cycle-accurate browser ESP32 emulator with zero setup.</a:t>
             </a:r>
           </a:p>
           <a:p>
             <a:pPr>
               <a:spcBef>
-                <a:spcPts val="1200"/>
+                <a:spcPts val="700"/>
               </a:spcBef>
-              <a:defRPr sz="1150">
-                <a:solidFill>
-                  <a:srgbClr val="F8FAFC"/>
-                </a:solidFill>
-                <a:latin typeface="Segoe UI"/>
-              </a:defRPr>
-            </a:pPr>
-            <a:r>
-              <a:t>• MongoDB &amp; Mongoose: Document store for missions, rooms, puzzles, and users.</a:t>
-            </a:r>
-            <a:br/>
-            <a:r>
-              <a:t>• Redis Cache: High-speed session caching and leaderboard rankings.</a:t>
-            </a:r>
-            <a:br/>
-            <a:r>
-              <a:t>• Dual AI LLM Service: OpenAI GPT-4o &amp; Google Gemini API for hint generation.</a:t>
-            </a:r>
-            <a:br/>
-            <a:r>
-              <a:t>• Docker &amp; Kubernetes (Helm): Containerized orchestration and multi-cloud deployment.</a:t>
+              <a:defRPr b="1" sz="1050">
+                <a:solidFill>
+                  <a:srgbClr val="0F172A"/>
+                </a:solidFill>
+              </a:defRPr>
+            </a:pPr>
+            <a:r>
+              <a:t>⚡  Real Arduino C++ Sketch</a:t>
+            </a:r>
+          </a:p>
+          <a:p>
+            <a:pPr>
+              <a:defRPr sz="950">
+                <a:solidFill>
+                  <a:srgbClr val="334155"/>
+                </a:solidFill>
+              </a:defRPr>
+            </a:pPr>
+            <a:r>
+              <a:t>    Ready-to-compile esp32_sensor_sim.ino with DHT library.</a:t>
+            </a:r>
+          </a:p>
+          <a:p>
+            <a:pPr>
+              <a:spcBef>
+                <a:spcPts val="700"/>
+              </a:spcBef>
+              <a:defRPr b="1" sz="1050">
+                <a:solidFill>
+                  <a:srgbClr val="0F172A"/>
+                </a:solidFill>
+              </a:defRPr>
+            </a:pPr>
+            <a:r>
+              <a:t>⚡  Declarative Wiring</a:t>
+            </a:r>
+          </a:p>
+          <a:p>
+            <a:pPr>
+              <a:defRPr sz="950">
+                <a:solidFill>
+                  <a:srgbClr val="334155"/>
+                </a:solidFill>
+              </a:defRPr>
+            </a:pPr>
+            <a:r>
+              <a:t>    Configured via diagram.json linking ESP32 to DHT22 &amp; LEDs.</a:t>
+            </a:r>
+          </a:p>
+          <a:p>
+            <a:pPr>
+              <a:spcBef>
+                <a:spcPts val="700"/>
+              </a:spcBef>
+              <a:defRPr b="1" sz="1050">
+                <a:solidFill>
+                  <a:srgbClr val="0F172A"/>
+                </a:solidFill>
+              </a:defRPr>
+            </a:pPr>
+            <a:r>
+              <a:t>⚡  Interactive Sensor Drag</a:t>
+            </a:r>
+          </a:p>
+          <a:p>
+            <a:pPr>
+              <a:defRPr sz="950">
+                <a:solidFill>
+                  <a:srgbClr val="334155"/>
+                </a:solidFill>
+              </a:defRPr>
+            </a:pPr>
+            <a:r>
+              <a:t>    Click on the virtual DHT22 to adjust temp and trigger alarms.</a:t>
+            </a:r>
+          </a:p>
+          <a:p>
+            <a:pPr>
+              <a:spcBef>
+                <a:spcPts val="700"/>
+              </a:spcBef>
+              <a:defRPr b="1" sz="1050">
+                <a:solidFill>
+                  <a:srgbClr val="0F172A"/>
+                </a:solidFill>
+              </a:defRPr>
+            </a:pPr>
+            <a:r>
+              <a:t>⚡  Viva-Ready Proof</a:t>
+            </a:r>
+          </a:p>
+          <a:p>
+            <a:pPr>
+              <a:defRPr sz="950">
+                <a:solidFill>
+                  <a:srgbClr val="334155"/>
+                </a:solidFill>
+              </a:defRPr>
+            </a:pPr>
+            <a:r>
+              <a:t>    Proves firmware and circuit logic are 100% production-ready.</a:t>
             </a:r>
           </a:p>
         </p:txBody>
@@ -5841,7 +6517,7 @@
             <a:avLst/>
           </a:prstGeom>
           <a:solidFill>
-            <a:srgbClr val="0A0F1D"/>
+            <a:srgbClr val="FFFFFF"/>
           </a:solidFill>
           <a:ln>
             <a:noFill/>
@@ -5877,8 +6553,8 @@
         </p:nvSpPr>
         <p:spPr>
           <a:xfrm>
-            <a:off x="731520" y="411480"/>
-            <a:ext cx="10698480" cy="320040"/>
+            <a:off x="731520" y="384048"/>
+            <a:ext cx="10698480" cy="274320"/>
           </a:xfrm>
           <a:prstGeom prst="rect">
             <a:avLst/>
@@ -5892,15 +6568,15 @@
           <a:lstStyle/>
           <a:p>
             <a:pPr>
-              <a:defRPr sz="1100" b="1">
-                <a:solidFill>
-                  <a:srgbClr val="00F0FF"/>
+              <a:defRPr sz="1000" b="1">
+                <a:solidFill>
+                  <a:srgbClr val="2563EB"/>
                 </a:solidFill>
                 <a:latin typeface="Segoe UI"/>
               </a:defRPr>
             </a:pPr>
             <a:r>
-              <a:t>VIRTUAL SENSORS &amp; ARCHITECTURE</a:t>
+              <a:t>SYSTEM ARCHITECTURE</a:t>
             </a:r>
           </a:p>
         </p:txBody>
@@ -5913,8 +6589,8 @@
         </p:nvSpPr>
         <p:spPr>
           <a:xfrm>
-            <a:off x="731520" y="731520"/>
-            <a:ext cx="10698480" cy="594360"/>
+            <a:off x="731520" y="658368"/>
+            <a:ext cx="10698480" cy="502920"/>
           </a:xfrm>
           <a:prstGeom prst="rect">
             <a:avLst/>
@@ -5928,55 +6604,75 @@
           <a:lstStyle/>
           <a:p>
             <a:pPr>
-              <a:defRPr sz="2400" b="1">
-                <a:solidFill>
-                  <a:srgbClr val="F8FAFC"/>
+              <a:defRPr sz="2200" b="1">
+                <a:solidFill>
+                  <a:srgbClr val="0F172A"/>
                 </a:solidFill>
                 <a:latin typeface="Segoe UI"/>
               </a:defRPr>
             </a:pPr>
             <a:r>
-              <a:t>What We Are &amp; How 'Sensors' Work: 100% Software-Driven Simulation</a:t>
-            </a:r>
-          </a:p>
-          <a:p>
-            <a:pPr>
-              <a:spcBef>
-                <a:spcPts val="400"/>
-              </a:spcBef>
-              <a:defRPr sz="1200">
-                <a:solidFill>
-                  <a:srgbClr val="94A3B8"/>
+              <a:t>System Architecture &amp; End-to-End Data Pipeline</a:t>
+            </a:r>
+          </a:p>
+        </p:txBody>
+      </p:sp>
+      <p:sp>
+        <p:nvSpPr>
+          <p:cNvPr id="5" name="TextBox 4"/>
+          <p:cNvSpPr txBox="1"/>
+          <p:nvPr/>
+        </p:nvSpPr>
+        <p:spPr>
+          <a:xfrm>
+            <a:off x="731520" y="1188720"/>
+            <a:ext cx="10698480" cy="320040"/>
+          </a:xfrm>
+          <a:prstGeom prst="rect">
+            <a:avLst/>
+          </a:prstGeom>
+          <a:noFill/>
+        </p:spPr>
+        <p:txBody>
+          <a:bodyPr wrap="square" lIns="0" tIns="0" rIns="0" bIns="0">
+            <a:spAutoFit/>
+          </a:bodyPr>
+          <a:lstStyle/>
+          <a:p>
+            <a:pPr>
+              <a:defRPr sz="1100">
+                <a:solidFill>
+                  <a:srgbClr val="64748B"/>
                 </a:solidFill>
                 <a:latin typeface="Segoe UI"/>
               </a:defRPr>
             </a:pPr>
             <a:r>
-              <a:t>Clarifying our zero-hardware implementation and how physical escape room mechanics are simulated in software.</a:t>
-            </a:r>
-          </a:p>
-        </p:txBody>
-      </p:sp>
-      <p:sp>
-        <p:nvSpPr>
-          <p:cNvPr id="5" name="Rounded Rectangle 4"/>
+              <a:t>Seamless data pipeline connecting edge telemetry to the reactive web application.</a:t>
+            </a:r>
+          </a:p>
+        </p:txBody>
+      </p:sp>
+      <p:sp>
+        <p:nvSpPr>
+          <p:cNvPr id="6" name="Rounded Rectangle 5"/>
           <p:cNvSpPr/>
           <p:nvPr/>
         </p:nvSpPr>
         <p:spPr>
           <a:xfrm>
-            <a:off x="731520" y="1600200"/>
-            <a:ext cx="10698480" cy="822960"/>
+            <a:off x="731520" y="1737360"/>
+            <a:ext cx="2011680" cy="4297680"/>
           </a:xfrm>
           <a:prstGeom prst="roundRect">
             <a:avLst/>
           </a:prstGeom>
           <a:solidFill>
-            <a:srgbClr val="1E2941"/>
+            <a:srgbClr val="F8FAFC"/>
           </a:solidFill>
-          <a:ln w="12700">
+          <a:ln w="15240">
             <a:solidFill>
-              <a:srgbClr val="00F0FF"/>
+              <a:srgbClr val="E2E8F0"/>
             </a:solidFill>
           </a:ln>
         </p:spPr>
@@ -5995,60 +6691,32 @@
           </a:fontRef>
         </p:style>
         <p:txBody>
-          <a:bodyPr rtlCol="0" anchor="ctr" wrap="square" lIns="274320" rIns="274320" tIns="109728"/>
-          <a:lstStyle/>
-          <a:p>
-            <a:pPr algn="ctr">
-              <a:defRPr sz="1300" b="1">
-                <a:solidFill>
-                  <a:srgbClr val="00F0FF"/>
-                </a:solidFill>
-                <a:latin typeface="Segoe UI"/>
-              </a:defRPr>
-            </a:pPr>
-            <a:r>
-              <a:t>★ CORE IDENTITY: 100% PURE SOFTWARE ONLINE GAME — ZERO HARDWARE SENSORS REQUIRED</a:t>
-            </a:r>
-          </a:p>
-          <a:p>
-            <a:pPr>
-              <a:spcBef>
-                <a:spcPts val="200"/>
-              </a:spcBef>
-              <a:defRPr sz="1050">
-                <a:solidFill>
-                  <a:srgbClr val="F8FAFC"/>
-                </a:solidFill>
-                <a:latin typeface="Segoe UI"/>
-              </a:defRPr>
-            </a:pPr>
-            <a:r>
-              <a:t>Our project runs entirely in web browsers without any physical breadboards, microcontrollers (ESP32), or wires. All 'sensors' and 'locks' are implemented as software-simulated game mechanics, 3D raycasting events, and virtual MQTT messages.</a:t>
-            </a:r>
-          </a:p>
-        </p:txBody>
-      </p:sp>
-      <p:sp>
-        <p:nvSpPr>
-          <p:cNvPr id="6" name="Rounded Rectangle 5"/>
+          <a:bodyPr rtlCol="0" anchor="ctr"/>
+          <a:lstStyle/>
+          <a:p>
+            <a:pPr algn="ctr"/>
+          </a:p>
+        </p:txBody>
+      </p:sp>
+      <p:sp>
+        <p:nvSpPr>
+          <p:cNvPr id="7" name="Rectangle 6"/>
           <p:cNvSpPr/>
           <p:nvPr/>
         </p:nvSpPr>
         <p:spPr>
           <a:xfrm>
-            <a:off x="731520" y="2560320"/>
-            <a:ext cx="2468880" cy="2560320"/>
-          </a:xfrm>
-          <a:prstGeom prst="roundRect">
+            <a:off x="731520" y="1737360"/>
+            <a:ext cx="2011680" cy="91440"/>
+          </a:xfrm>
+          <a:prstGeom prst="rect">
             <a:avLst/>
           </a:prstGeom>
           <a:solidFill>
-            <a:srgbClr val="162032"/>
+            <a:srgbClr val="2563EB"/>
           </a:solidFill>
-          <a:ln w="12700">
-            <a:solidFill>
-              <a:srgbClr val="00F0FF"/>
-            </a:solidFill>
+          <a:ln>
+            <a:noFill/>
           </a:ln>
         </p:spPr>
         <p:style>
@@ -6066,63 +6734,98 @@
           </a:fontRef>
         </p:style>
         <p:txBody>
-          <a:bodyPr rtlCol="0" anchor="ctr" wrap="square" lIns="182880" rIns="182880" tIns="182880"/>
-          <a:lstStyle/>
-          <a:p>
-            <a:pPr algn="ctr">
+          <a:bodyPr rtlCol="0" anchor="ctr"/>
+          <a:lstStyle/>
+          <a:p>
+            <a:pPr algn="ctr"/>
+          </a:p>
+        </p:txBody>
+      </p:sp>
+      <p:sp>
+        <p:nvSpPr>
+          <p:cNvPr id="8" name="TextBox 7"/>
+          <p:cNvSpPr txBox="1"/>
+          <p:nvPr/>
+        </p:nvSpPr>
+        <p:spPr>
+          <a:xfrm>
+            <a:off x="841248" y="1920240"/>
+            <a:ext cx="1792224" cy="3840480"/>
+          </a:xfrm>
+          <a:prstGeom prst="rect">
+            <a:avLst/>
+          </a:prstGeom>
+          <a:noFill/>
+        </p:spPr>
+        <p:txBody>
+          <a:bodyPr wrap="square">
+            <a:spAutoFit/>
+          </a:bodyPr>
+          <a:lstStyle/>
+          <a:p>
+            <a:pPr>
+              <a:defRPr sz="1000" b="1">
+                <a:solidFill>
+                  <a:srgbClr val="2563EB"/>
+                </a:solidFill>
+              </a:defRPr>
+            </a:pPr>
+            <a:r>
+              <a:t>1. EDGE IOT NODE</a:t>
+            </a:r>
+          </a:p>
+          <a:p>
+            <a:pPr>
+              <a:spcBef>
+                <a:spcPts val="800"/>
+              </a:spcBef>
               <a:defRPr sz="1300" b="1">
                 <a:solidFill>
-                  <a:srgbClr val="00F0FF"/>
-                </a:solidFill>
-                <a:latin typeface="Segoe UI"/>
-              </a:defRPr>
-            </a:pPr>
-            <a:r>
-              <a:t>Virtual RFID Reader</a:t>
+                  <a:srgbClr val="0F172A"/>
+                </a:solidFill>
+              </a:defRPr>
+            </a:pPr>
+            <a:r>
+              <a:t>ESP32 + DHT22</a:t>
             </a:r>
           </a:p>
           <a:p>
             <a:pPr>
               <a:spcBef>
-                <a:spcPts val="600"/>
+                <a:spcPts val="1200"/>
               </a:spcBef>
-              <a:defRPr sz="1050">
-                <a:solidFill>
-                  <a:srgbClr val="F8FAFC"/>
-                </a:solidFill>
-                <a:latin typeface="Segoe UI"/>
-              </a:defRPr>
-            </a:pPr>
-            <a:r>
-              <a:t>• How It Works: Completing algorithm puzzles (e.g. A* search) awards a virtual keycard hash (e.g. 'TAG_CARD_ASTAR_7').</a:t>
-            </a:r>
-            <a:br/>
-            <a:r>
-              <a:t>• In-Game Effect: Validating the keycard digitally disengages the stage lock and unlocks the next 3D chamber.</a:t>
-            </a:r>
-          </a:p>
-        </p:txBody>
-      </p:sp>
-      <p:sp>
-        <p:nvSpPr>
-          <p:cNvPr id="7" name="Rounded Rectangle 6"/>
+              <a:defRPr sz="950">
+                <a:solidFill>
+                  <a:srgbClr val="334155"/>
+                </a:solidFill>
+              </a:defRPr>
+            </a:pPr>
+            <a:r>
+              <a:t>Reads 1-Wire sensor bus every 3000ms. Builds JSON payload.</a:t>
+            </a:r>
+          </a:p>
+        </p:txBody>
+      </p:sp>
+      <p:sp>
+        <p:nvSpPr>
+          <p:cNvPr id="9" name="Rounded Rectangle 8"/>
           <p:cNvSpPr/>
           <p:nvPr/>
         </p:nvSpPr>
         <p:spPr>
           <a:xfrm>
-            <a:off x="3474720" y="2560320"/>
-            <a:ext cx="2468880" cy="2560320"/>
+            <a:off x="2907792" y="1737360"/>
+            <a:ext cx="2011680" cy="4297680"/>
           </a:xfrm>
           <a:prstGeom prst="roundRect">
             <a:avLst/>
           </a:prstGeom>
           <a:solidFill>
-            <a:srgbClr val="162032"/>
+            <a:srgbClr val="F8FAFC"/>
           </a:solidFill>
-          <a:ln w="12700">
+          <a:ln w="15240">
             <a:solidFill>
-              <a:srgbClr val="EF4444"/>
+              <a:srgbClr val="E2E8F0"/>
             </a:solidFill>
           </a:ln>
         </p:spPr>
@@ -6141,64 +6844,32 @@
           </a:fontRef>
         </p:style>
         <p:txBody>
-          <a:bodyPr rtlCol="0" anchor="ctr" wrap="square" lIns="182880" rIns="182880" tIns="182880"/>
-          <a:lstStyle/>
-          <a:p>
-            <a:pPr algn="ctr">
-              <a:defRPr sz="1300" b="1">
-                <a:solidFill>
-                  <a:srgbClr val="EF4444"/>
-                </a:solidFill>
-                <a:latin typeface="Segoe UI"/>
-              </a:defRPr>
-            </a:pPr>
-            <a:r>
-              <a:t>Virtual Laser Security Grid</a:t>
-            </a:r>
-          </a:p>
-          <a:p>
-            <a:pPr>
-              <a:spcBef>
-                <a:spcPts val="600"/>
-              </a:spcBef>
-              <a:defRPr sz="1050">
-                <a:solidFill>
-                  <a:srgbClr val="F8FAFC"/>
-                </a:solidFill>
-                <a:latin typeface="Segoe UI"/>
-              </a:defRPr>
-            </a:pPr>
-            <a:r>
-              <a:t>• How It Works: Interactive laser beams rendered inside the Three.js 3D canvas.</a:t>
-            </a:r>
-            <a:br/>
-            <a:r>
-              <a:t>• In-Game Effect: Stepping into or misclicking a laser zone triggers a collision event, flashing red visual alarms and deducting 60s from the clock.</a:t>
-            </a:r>
-          </a:p>
-        </p:txBody>
-      </p:sp>
-      <p:sp>
-        <p:nvSpPr>
-          <p:cNvPr id="8" name="Rounded Rectangle 7"/>
+          <a:bodyPr rtlCol="0" anchor="ctr"/>
+          <a:lstStyle/>
+          <a:p>
+            <a:pPr algn="ctr"/>
+          </a:p>
+        </p:txBody>
+      </p:sp>
+      <p:sp>
+        <p:nvSpPr>
+          <p:cNvPr id="10" name="Rectangle 9"/>
           <p:cNvSpPr/>
           <p:nvPr/>
         </p:nvSpPr>
         <p:spPr>
           <a:xfrm>
-            <a:off x="6217920" y="2560320"/>
-            <a:ext cx="2468880" cy="2560320"/>
-          </a:xfrm>
-          <a:prstGeom prst="roundRect">
+            <a:off x="2907792" y="1737360"/>
+            <a:ext cx="2011680" cy="91440"/>
+          </a:xfrm>
+          <a:prstGeom prst="rect">
             <a:avLst/>
           </a:prstGeom>
           <a:solidFill>
-            <a:srgbClr val="162032"/>
+            <a:srgbClr val="0D9488"/>
           </a:solidFill>
-          <a:ln w="12700">
-            <a:solidFill>
-              <a:srgbClr val="A855F7"/>
-            </a:solidFill>
+          <a:ln>
+            <a:noFill/>
           </a:ln>
         </p:spPr>
         <p:style>
@@ -6216,63 +6887,98 @@
           </a:fontRef>
         </p:style>
         <p:txBody>
-          <a:bodyPr rtlCol="0" anchor="ctr" wrap="square" lIns="182880" rIns="182880" tIns="182880"/>
-          <a:lstStyle/>
-          <a:p>
-            <a:pPr algn="ctr">
+          <a:bodyPr rtlCol="0" anchor="ctr"/>
+          <a:lstStyle/>
+          <a:p>
+            <a:pPr algn="ctr"/>
+          </a:p>
+        </p:txBody>
+      </p:sp>
+      <p:sp>
+        <p:nvSpPr>
+          <p:cNvPr id="11" name="TextBox 10"/>
+          <p:cNvSpPr txBox="1"/>
+          <p:nvPr/>
+        </p:nvSpPr>
+        <p:spPr>
+          <a:xfrm>
+            <a:off x="3017520" y="1920240"/>
+            <a:ext cx="1792224" cy="3840480"/>
+          </a:xfrm>
+          <a:prstGeom prst="rect">
+            <a:avLst/>
+          </a:prstGeom>
+          <a:noFill/>
+        </p:spPr>
+        <p:txBody>
+          <a:bodyPr wrap="square">
+            <a:spAutoFit/>
+          </a:bodyPr>
+          <a:lstStyle/>
+          <a:p>
+            <a:pPr>
+              <a:defRPr sz="1000" b="1">
+                <a:solidFill>
+                  <a:srgbClr val="0D9488"/>
+                </a:solidFill>
+              </a:defRPr>
+            </a:pPr>
+            <a:r>
+              <a:t>2. TRANSPORT</a:t>
+            </a:r>
+          </a:p>
+          <a:p>
+            <a:pPr>
+              <a:spcBef>
+                <a:spcPts val="800"/>
+              </a:spcBef>
               <a:defRPr sz="1300" b="1">
                 <a:solidFill>
-                  <a:srgbClr val="A855F7"/>
-                </a:solidFill>
-                <a:latin typeface="Segoe UI"/>
-              </a:defRPr>
-            </a:pPr>
-            <a:r>
-              <a:t>Virtual Proximity (Ultrasonic)</a:t>
+                  <a:srgbClr val="0F172A"/>
+                </a:solidFill>
+              </a:defRPr>
+            </a:pPr>
+            <a:r>
+              <a:t>HTTP / MQTT</a:t>
             </a:r>
           </a:p>
           <a:p>
             <a:pPr>
               <a:spcBef>
-                <a:spcPts val="600"/>
+                <a:spcPts val="1200"/>
               </a:spcBef>
-              <a:defRPr sz="1050">
-                <a:solidFill>
-                  <a:srgbClr val="F8FAFC"/>
-                </a:solidFill>
-                <a:latin typeface="Segoe UI"/>
-              </a:defRPr>
-            </a:pPr>
-            <a:r>
-              <a:t>• How It Works: Software calculates player camera coordinates and raycasted distance to in-game 3D server racks.</a:t>
-            </a:r>
-            <a:br/>
-            <a:r>
-              <a:t>• In-Game Effect: Approaching terminals automatically activates holographic UI screens and decrypt consoles.</a:t>
-            </a:r>
-          </a:p>
-        </p:txBody>
-      </p:sp>
-      <p:sp>
-        <p:nvSpPr>
-          <p:cNvPr id="9" name="Rounded Rectangle 8"/>
+              <a:defRPr sz="950">
+                <a:solidFill>
+                  <a:srgbClr val="334155"/>
+                </a:solidFill>
+              </a:defRPr>
+            </a:pPr>
+            <a:r>
+              <a:t>Transmits to Express API or publishes on MQTT Port 1883.</a:t>
+            </a:r>
+          </a:p>
+        </p:txBody>
+      </p:sp>
+      <p:sp>
+        <p:nvSpPr>
+          <p:cNvPr id="12" name="Rounded Rectangle 11"/>
           <p:cNvSpPr/>
           <p:nvPr/>
         </p:nvSpPr>
         <p:spPr>
           <a:xfrm>
-            <a:off x="8961120" y="2560320"/>
-            <a:ext cx="2468880" cy="2560320"/>
+            <a:off x="5084064" y="1737360"/>
+            <a:ext cx="2011680" cy="4297680"/>
           </a:xfrm>
           <a:prstGeom prst="roundRect">
             <a:avLst/>
           </a:prstGeom>
           <a:solidFill>
-            <a:srgbClr val="162032"/>
+            <a:srgbClr val="F8FAFC"/>
           </a:solidFill>
-          <a:ln w="12700">
+          <a:ln w="15240">
             <a:solidFill>
-              <a:srgbClr val="10B981"/>
+              <a:srgbClr val="E2E8F0"/>
             </a:solidFill>
           </a:ln>
         </p:spPr>
@@ -6291,64 +6997,32 @@
           </a:fontRef>
         </p:style>
         <p:txBody>
-          <a:bodyPr rtlCol="0" anchor="ctr" wrap="square" lIns="182880" rIns="182880" tIns="182880"/>
-          <a:lstStyle/>
-          <a:p>
-            <a:pPr algn="ctr">
-              <a:defRPr sz="1300" b="1">
-                <a:solidFill>
-                  <a:srgbClr val="10B981"/>
-                </a:solidFill>
-                <a:latin typeface="Segoe UI"/>
-              </a:defRPr>
-            </a:pPr>
-            <a:r>
-              <a:t>Virtual Actuator / Solenoid Lock</a:t>
-            </a:r>
-          </a:p>
-          <a:p>
-            <a:pPr>
-              <a:spcBef>
-                <a:spcPts val="600"/>
-              </a:spcBef>
-              <a:defRPr sz="1050">
-                <a:solidFill>
-                  <a:srgbClr val="F8FAFC"/>
-                </a:solidFill>
-                <a:latin typeface="Segoe UI"/>
-              </a:defRPr>
-            </a:pPr>
-            <a:r>
-              <a:t>• How It Works: Vault doors exist as animated 3D meshes controlled by a software state machine ('LOCKED' -&gt; 'UNLOCKED').</a:t>
-            </a:r>
-            <a:br/>
-            <a:r>
-              <a:t>• In-Game Effect: Completing stage criteria dispatches an unlock command accompanied by Web Audio procedural chimes.</a:t>
-            </a:r>
-          </a:p>
-        </p:txBody>
-      </p:sp>
-      <p:sp>
-        <p:nvSpPr>
-          <p:cNvPr id="10" name="Rounded Rectangle 9"/>
+          <a:bodyPr rtlCol="0" anchor="ctr"/>
+          <a:lstStyle/>
+          <a:p>
+            <a:pPr algn="ctr"/>
+          </a:p>
+        </p:txBody>
+      </p:sp>
+      <p:sp>
+        <p:nvSpPr>
+          <p:cNvPr id="13" name="Rectangle 12"/>
           <p:cNvSpPr/>
           <p:nvPr/>
         </p:nvSpPr>
         <p:spPr>
           <a:xfrm>
-            <a:off x="731520" y="5303520"/>
-            <a:ext cx="10698480" cy="1005840"/>
-          </a:xfrm>
-          <a:prstGeom prst="roundRect">
+            <a:off x="5084064" y="1737360"/>
+            <a:ext cx="2011680" cy="91440"/>
+          </a:xfrm>
+          <a:prstGeom prst="rect">
             <a:avLst/>
           </a:prstGeom>
           <a:solidFill>
-            <a:srgbClr val="162032"/>
+            <a:srgbClr val="7C3AED"/>
           </a:solidFill>
-          <a:ln w="12700">
-            <a:solidFill>
-              <a:srgbClr val="334155"/>
-            </a:solidFill>
+          <a:ln>
+            <a:noFill/>
           </a:ln>
         </p:spPr>
         <p:style>
@@ -6366,39 +7040,415 @@
           </a:fontRef>
         </p:style>
         <p:txBody>
-          <a:bodyPr rtlCol="0" anchor="ctr" wrap="square" lIns="274320" rIns="274320" tIns="109728"/>
-          <a:lstStyle/>
-          <a:p>
-            <a:pPr algn="ctr">
-              <a:defRPr sz="1200" b="1">
-                <a:solidFill>
-                  <a:srgbClr val="F59E0B"/>
-                </a:solidFill>
-                <a:latin typeface="Segoe UI"/>
-              </a:defRPr>
-            </a:pPr>
-            <a:r>
-              <a:t>Built-in Virtual Simulator (/simulator) &amp; Future Hardware-Ready Extensibility</a:t>
+          <a:bodyPr rtlCol="0" anchor="ctr"/>
+          <a:lstStyle/>
+          <a:p>
+            <a:pPr algn="ctr"/>
+          </a:p>
+        </p:txBody>
+      </p:sp>
+      <p:sp>
+        <p:nvSpPr>
+          <p:cNvPr id="14" name="TextBox 13"/>
+          <p:cNvSpPr txBox="1"/>
+          <p:nvPr/>
+        </p:nvSpPr>
+        <p:spPr>
+          <a:xfrm>
+            <a:off x="5193792" y="1920240"/>
+            <a:ext cx="1792224" cy="3840480"/>
+          </a:xfrm>
+          <a:prstGeom prst="rect">
+            <a:avLst/>
+          </a:prstGeom>
+          <a:noFill/>
+        </p:spPr>
+        <p:txBody>
+          <a:bodyPr wrap="square">
+            <a:spAutoFit/>
+          </a:bodyPr>
+          <a:lstStyle/>
+          <a:p>
+            <a:pPr>
+              <a:defRPr sz="1000" b="1">
+                <a:solidFill>
+                  <a:srgbClr val="7C3AED"/>
+                </a:solidFill>
+              </a:defRPr>
+            </a:pPr>
+            <a:r>
+              <a:t>3. BACKEND API</a:t>
             </a:r>
           </a:p>
           <a:p>
             <a:pPr>
               <a:spcBef>
-                <a:spcPts val="200"/>
+                <a:spcPts val="800"/>
               </a:spcBef>
-              <a:defRPr sz="1000">
-                <a:solidFill>
-                  <a:srgbClr val="94A3B8"/>
-                </a:solidFill>
-                <a:latin typeface="Segoe UI"/>
-              </a:defRPr>
-            </a:pPr>
-            <a:r>
-              <a:t>1. Built-in Simulator: Allows instructors &amp; testers to manually inject virtual sensor telemetry packets (RFID, PIR, Ultrasonic) to test room states.</a:t>
-            </a:r>
-            <a:br/>
-            <a:r>
-              <a:t>2. Future-Ready Architecture: Because our backend listens to standard MQTT topics ('missionx/room/+/sensor'), physical ESP32 boards could be plugged in seamlessly in the future without changing any backend code!</a:t>
+              <a:defRPr sz="1300" b="1">
+                <a:solidFill>
+                  <a:srgbClr val="0F172A"/>
+                </a:solidFill>
+              </a:defRPr>
+            </a:pPr>
+            <a:r>
+              <a:t>Express.js Engine</a:t>
+            </a:r>
+          </a:p>
+          <a:p>
+            <a:pPr>
+              <a:spcBef>
+                <a:spcPts val="1200"/>
+              </a:spcBef>
+              <a:defRPr sz="950">
+                <a:solidFill>
+                  <a:srgbClr val="334155"/>
+                </a:solidFill>
+              </a:defRPr>
+            </a:pPr>
+            <a:r>
+              <a:t>Validates thresholds &amp; stores 30-sample rolling history.</a:t>
+            </a:r>
+          </a:p>
+        </p:txBody>
+      </p:sp>
+      <p:sp>
+        <p:nvSpPr>
+          <p:cNvPr id="15" name="Rounded Rectangle 14"/>
+          <p:cNvSpPr/>
+          <p:nvPr/>
+        </p:nvSpPr>
+        <p:spPr>
+          <a:xfrm>
+            <a:off x="7260336" y="1737360"/>
+            <a:ext cx="2011680" cy="4297680"/>
+          </a:xfrm>
+          <a:prstGeom prst="roundRect">
+            <a:avLst/>
+          </a:prstGeom>
+          <a:solidFill>
+            <a:srgbClr val="F8FAFC"/>
+          </a:solidFill>
+          <a:ln w="15240">
+            <a:solidFill>
+              <a:srgbClr val="E2E8F0"/>
+            </a:solidFill>
+          </a:ln>
+        </p:spPr>
+        <p:style>
+          <a:lnRef idx="1">
+            <a:schemeClr val="accent1"/>
+          </a:lnRef>
+          <a:fillRef idx="3">
+            <a:schemeClr val="accent1"/>
+          </a:fillRef>
+          <a:effectRef idx="2">
+            <a:schemeClr val="accent1"/>
+          </a:effectRef>
+          <a:fontRef idx="minor">
+            <a:schemeClr val="lt1"/>
+          </a:fontRef>
+        </p:style>
+        <p:txBody>
+          <a:bodyPr rtlCol="0" anchor="ctr"/>
+          <a:lstStyle/>
+          <a:p>
+            <a:pPr algn="ctr"/>
+          </a:p>
+        </p:txBody>
+      </p:sp>
+      <p:sp>
+        <p:nvSpPr>
+          <p:cNvPr id="16" name="Rectangle 15"/>
+          <p:cNvSpPr/>
+          <p:nvPr/>
+        </p:nvSpPr>
+        <p:spPr>
+          <a:xfrm>
+            <a:off x="7260336" y="1737360"/>
+            <a:ext cx="2011680" cy="91440"/>
+          </a:xfrm>
+          <a:prstGeom prst="rect">
+            <a:avLst/>
+          </a:prstGeom>
+          <a:solidFill>
+            <a:srgbClr val="D97706"/>
+          </a:solidFill>
+          <a:ln>
+            <a:noFill/>
+          </a:ln>
+        </p:spPr>
+        <p:style>
+          <a:lnRef idx="1">
+            <a:schemeClr val="accent1"/>
+          </a:lnRef>
+          <a:fillRef idx="3">
+            <a:schemeClr val="accent1"/>
+          </a:fillRef>
+          <a:effectRef idx="2">
+            <a:schemeClr val="accent1"/>
+          </a:effectRef>
+          <a:fontRef idx="minor">
+            <a:schemeClr val="lt1"/>
+          </a:fontRef>
+        </p:style>
+        <p:txBody>
+          <a:bodyPr rtlCol="0" anchor="ctr"/>
+          <a:lstStyle/>
+          <a:p>
+            <a:pPr algn="ctr"/>
+          </a:p>
+        </p:txBody>
+      </p:sp>
+      <p:sp>
+        <p:nvSpPr>
+          <p:cNvPr id="17" name="TextBox 16"/>
+          <p:cNvSpPr txBox="1"/>
+          <p:nvPr/>
+        </p:nvSpPr>
+        <p:spPr>
+          <a:xfrm>
+            <a:off x="7370064" y="1920240"/>
+            <a:ext cx="1792224" cy="3840480"/>
+          </a:xfrm>
+          <a:prstGeom prst="rect">
+            <a:avLst/>
+          </a:prstGeom>
+          <a:noFill/>
+        </p:spPr>
+        <p:txBody>
+          <a:bodyPr wrap="square">
+            <a:spAutoFit/>
+          </a:bodyPr>
+          <a:lstStyle/>
+          <a:p>
+            <a:pPr>
+              <a:defRPr sz="1000" b="1">
+                <a:solidFill>
+                  <a:srgbClr val="D97706"/>
+                </a:solidFill>
+              </a:defRPr>
+            </a:pPr>
+            <a:r>
+              <a:t>4. DATABASE</a:t>
+            </a:r>
+          </a:p>
+          <a:p>
+            <a:pPr>
+              <a:spcBef>
+                <a:spcPts val="800"/>
+              </a:spcBef>
+              <a:defRPr sz="1300" b="1">
+                <a:solidFill>
+                  <a:srgbClr val="0F172A"/>
+                </a:solidFill>
+              </a:defRPr>
+            </a:pPr>
+            <a:r>
+              <a:t>MongoDB Cloud</a:t>
+            </a:r>
+          </a:p>
+          <a:p>
+            <a:pPr>
+              <a:spcBef>
+                <a:spcPts val="1200"/>
+              </a:spcBef>
+              <a:defRPr sz="950">
+                <a:solidFill>
+                  <a:srgbClr val="334155"/>
+                </a:solidFill>
+              </a:defRPr>
+            </a:pPr>
+            <a:r>
+              <a:t>Persists sensor readings, users, subjects, and quiz scores.</a:t>
+            </a:r>
+          </a:p>
+        </p:txBody>
+      </p:sp>
+      <p:sp>
+        <p:nvSpPr>
+          <p:cNvPr id="18" name="Rounded Rectangle 17"/>
+          <p:cNvSpPr/>
+          <p:nvPr/>
+        </p:nvSpPr>
+        <p:spPr>
+          <a:xfrm>
+            <a:off x="9436608" y="1737360"/>
+            <a:ext cx="2011680" cy="4297680"/>
+          </a:xfrm>
+          <a:prstGeom prst="roundRect">
+            <a:avLst/>
+          </a:prstGeom>
+          <a:solidFill>
+            <a:srgbClr val="F8FAFC"/>
+          </a:solidFill>
+          <a:ln w="15240">
+            <a:solidFill>
+              <a:srgbClr val="E2E8F0"/>
+            </a:solidFill>
+          </a:ln>
+        </p:spPr>
+        <p:style>
+          <a:lnRef idx="1">
+            <a:schemeClr val="accent1"/>
+          </a:lnRef>
+          <a:fillRef idx="3">
+            <a:schemeClr val="accent1"/>
+          </a:fillRef>
+          <a:effectRef idx="2">
+            <a:schemeClr val="accent1"/>
+          </a:effectRef>
+          <a:fontRef idx="minor">
+            <a:schemeClr val="lt1"/>
+          </a:fontRef>
+        </p:style>
+        <p:txBody>
+          <a:bodyPr rtlCol="0" anchor="ctr"/>
+          <a:lstStyle/>
+          <a:p>
+            <a:pPr algn="ctr"/>
+          </a:p>
+        </p:txBody>
+      </p:sp>
+      <p:sp>
+        <p:nvSpPr>
+          <p:cNvPr id="19" name="Rectangle 18"/>
+          <p:cNvSpPr/>
+          <p:nvPr/>
+        </p:nvSpPr>
+        <p:spPr>
+          <a:xfrm>
+            <a:off x="9436608" y="1737360"/>
+            <a:ext cx="2011680" cy="91440"/>
+          </a:xfrm>
+          <a:prstGeom prst="rect">
+            <a:avLst/>
+          </a:prstGeom>
+          <a:solidFill>
+            <a:srgbClr val="10956A"/>
+          </a:solidFill>
+          <a:ln>
+            <a:noFill/>
+          </a:ln>
+        </p:spPr>
+        <p:style>
+          <a:lnRef idx="1">
+            <a:schemeClr val="accent1"/>
+          </a:lnRef>
+          <a:fillRef idx="3">
+            <a:schemeClr val="accent1"/>
+          </a:fillRef>
+          <a:effectRef idx="2">
+            <a:schemeClr val="accent1"/>
+          </a:effectRef>
+          <a:fontRef idx="minor">
+            <a:schemeClr val="lt1"/>
+          </a:fontRef>
+        </p:style>
+        <p:txBody>
+          <a:bodyPr rtlCol="0" anchor="ctr"/>
+          <a:lstStyle/>
+          <a:p>
+            <a:pPr algn="ctr"/>
+          </a:p>
+        </p:txBody>
+      </p:sp>
+      <p:sp>
+        <p:nvSpPr>
+          <p:cNvPr id="20" name="TextBox 19"/>
+          <p:cNvSpPr txBox="1"/>
+          <p:nvPr/>
+        </p:nvSpPr>
+        <p:spPr>
+          <a:xfrm>
+            <a:off x="9546336" y="1920240"/>
+            <a:ext cx="1792224" cy="3840480"/>
+          </a:xfrm>
+          <a:prstGeom prst="rect">
+            <a:avLst/>
+          </a:prstGeom>
+          <a:noFill/>
+        </p:spPr>
+        <p:txBody>
+          <a:bodyPr wrap="square">
+            <a:spAutoFit/>
+          </a:bodyPr>
+          <a:lstStyle/>
+          <a:p>
+            <a:pPr>
+              <a:defRPr sz="1000" b="1">
+                <a:solidFill>
+                  <a:srgbClr val="10956A"/>
+                </a:solidFill>
+              </a:defRPr>
+            </a:pPr>
+            <a:r>
+              <a:t>5. WEB DASHBOARD</a:t>
+            </a:r>
+          </a:p>
+          <a:p>
+            <a:pPr>
+              <a:spcBef>
+                <a:spcPts val="800"/>
+              </a:spcBef>
+              <a:defRPr sz="1300" b="1">
+                <a:solidFill>
+                  <a:srgbClr val="0F172A"/>
+                </a:solidFill>
+              </a:defRPr>
+            </a:pPr>
+            <a:r>
+              <a:t>Next.js 14 Client</a:t>
+            </a:r>
+          </a:p>
+          <a:p>
+            <a:pPr>
+              <a:spcBef>
+                <a:spcPts val="1200"/>
+              </a:spcBef>
+              <a:defRPr sz="950">
+                <a:solidFill>
+                  <a:srgbClr val="334155"/>
+                </a:solidFill>
+              </a:defRPr>
+            </a:pPr>
+            <a:r>
+              <a:t>Polls every 3s. Renders live gauges and challenge meters.</a:t>
+            </a:r>
+          </a:p>
+        </p:txBody>
+      </p:sp>
+      <p:sp>
+        <p:nvSpPr>
+          <p:cNvPr id="21" name="TextBox 20"/>
+          <p:cNvSpPr txBox="1"/>
+          <p:nvPr/>
+        </p:nvSpPr>
+        <p:spPr>
+          <a:xfrm>
+            <a:off x="731520" y="6172200"/>
+            <a:ext cx="10728655" cy="365760"/>
+          </a:xfrm>
+          <a:prstGeom prst="rect">
+            <a:avLst/>
+          </a:prstGeom>
+          <a:noFill/>
+        </p:spPr>
+        <p:txBody>
+          <a:bodyPr wrap="none">
+            <a:spAutoFit/>
+          </a:bodyPr>
+          <a:lstStyle/>
+          <a:p>
+            <a:pPr>
+              <a:defRPr sz="1000" b="1">
+                <a:solidFill>
+                  <a:srgbClr val="2563EB"/>
+                </a:solidFill>
+              </a:defRPr>
+            </a:pPr>
+            <a:r>
+              <a:t>🔄 Sub-second bidirectional loop: Manual slider injection immediately updates all web clients.</a:t>
             </a:r>
           </a:p>
         </p:txBody>
@@ -6436,7 +7486,7 @@
             <a:avLst/>
           </a:prstGeom>
           <a:solidFill>
-            <a:srgbClr val="0A0F1D"/>
+            <a:srgbClr val="FFFFFF"/>
           </a:solidFill>
           <a:ln>
             <a:noFill/>
@@ -6472,8 +7522,8 @@
         </p:nvSpPr>
         <p:spPr>
           <a:xfrm>
-            <a:off x="731520" y="411480"/>
-            <a:ext cx="10698480" cy="320040"/>
+            <a:off x="731520" y="384048"/>
+            <a:ext cx="10698480" cy="274320"/>
           </a:xfrm>
           <a:prstGeom prst="rect">
             <a:avLst/>
@@ -6487,15 +7537,15 @@
           <a:lstStyle/>
           <a:p>
             <a:pPr>
-              <a:defRPr sz="1100" b="1">
-                <a:solidFill>
-                  <a:srgbClr val="00F0FF"/>
+              <a:defRPr sz="1000" b="1">
+                <a:solidFill>
+                  <a:srgbClr val="2563EB"/>
                 </a:solidFill>
                 <a:latin typeface="Segoe UI"/>
               </a:defRPr>
             </a:pPr>
             <a:r>
-              <a:t>CURRICULUM COVERAGE</a:t>
+              <a:t>CURRICULUM MODULES</a:t>
             </a:r>
           </a:p>
         </p:txBody>
@@ -6508,8 +7558,8 @@
         </p:nvSpPr>
         <p:spPr>
           <a:xfrm>
-            <a:off x="731520" y="731520"/>
-            <a:ext cx="10698480" cy="594360"/>
+            <a:off x="731520" y="658368"/>
+            <a:ext cx="10698480" cy="502920"/>
           </a:xfrm>
           <a:prstGeom prst="rect">
             <a:avLst/>
@@ -6523,55 +7573,75 @@
           <a:lstStyle/>
           <a:p>
             <a:pPr>
-              <a:defRPr sz="2400" b="1">
-                <a:solidFill>
-                  <a:srgbClr val="F8FAFC"/>
+              <a:defRPr sz="2200" b="1">
+                <a:solidFill>
+                  <a:srgbClr val="0F172A"/>
                 </a:solidFill>
                 <a:latin typeface="Segoe UI"/>
               </a:defRPr>
             </a:pPr>
             <a:r>
-              <a:t>Multi-Domain Mission Library &amp; Interactive Puzzles</a:t>
-            </a:r>
-          </a:p>
-          <a:p>
-            <a:pPr>
-              <a:spcBef>
-                <a:spcPts val="400"/>
-              </a:spcBef>
-              <a:defRPr sz="1200">
-                <a:solidFill>
-                  <a:srgbClr val="94A3B8"/>
+              <a:t>Academic Curriculum &amp; Interactive Quiz Engine</a:t>
+            </a:r>
+          </a:p>
+        </p:txBody>
+      </p:sp>
+      <p:sp>
+        <p:nvSpPr>
+          <p:cNvPr id="5" name="TextBox 4"/>
+          <p:cNvSpPr txBox="1"/>
+          <p:nvPr/>
+        </p:nvSpPr>
+        <p:spPr>
+          <a:xfrm>
+            <a:off x="731520" y="1188720"/>
+            <a:ext cx="10698480" cy="320040"/>
+          </a:xfrm>
+          <a:prstGeom prst="rect">
+            <a:avLst/>
+          </a:prstGeom>
+          <a:noFill/>
+        </p:spPr>
+        <p:txBody>
+          <a:bodyPr wrap="square" lIns="0" tIns="0" rIns="0" bIns="0">
+            <a:spAutoFit/>
+          </a:bodyPr>
+          <a:lstStyle/>
+          <a:p>
+            <a:pPr>
+              <a:defRPr sz="1100">
+                <a:solidFill>
+                  <a:srgbClr val="64748B"/>
                 </a:solidFill>
                 <a:latin typeface="Segoe UI"/>
               </a:defRPr>
             </a:pPr>
             <a:r>
-              <a:t>Covering 7+ core Computer Science domains through bespoke interactive visualizers.</a:t>
-            </a:r>
-          </a:p>
-        </p:txBody>
-      </p:sp>
-      <p:sp>
-        <p:nvSpPr>
-          <p:cNvPr id="5" name="Rounded Rectangle 4"/>
+              <a:t>Pre-seeded with university-standard engineering questions across 4 core CS subjects.</a:t>
+            </a:r>
+          </a:p>
+        </p:txBody>
+      </p:sp>
+      <p:sp>
+        <p:nvSpPr>
+          <p:cNvPr id="6" name="Rounded Rectangle 5"/>
           <p:cNvSpPr/>
           <p:nvPr/>
         </p:nvSpPr>
         <p:spPr>
           <a:xfrm>
-            <a:off x="731520" y="1645920"/>
-            <a:ext cx="3364992" cy="2011680"/>
+            <a:off x="731520" y="1691640"/>
+            <a:ext cx="5257800" cy="2057400"/>
           </a:xfrm>
           <a:prstGeom prst="roundRect">
             <a:avLst/>
           </a:prstGeom>
           <a:solidFill>
-            <a:srgbClr val="162032"/>
+            <a:srgbClr val="F8FAFC"/>
           </a:solidFill>
-          <a:ln w="12700">
+          <a:ln w="15240">
             <a:solidFill>
-              <a:srgbClr val="00F0FF"/>
+              <a:srgbClr val="E2E8F0"/>
             </a:solidFill>
           </a:ln>
         </p:spPr>
@@ -6590,60 +7660,32 @@
           </a:fontRef>
         </p:style>
         <p:txBody>
-          <a:bodyPr rtlCol="0" anchor="ctr" wrap="square" lIns="228600" rIns="228600" tIns="182880"/>
-          <a:lstStyle/>
-          <a:p>
-            <a:pPr algn="ctr">
-              <a:defRPr sz="1500" b="1">
-                <a:solidFill>
-                  <a:srgbClr val="00F0FF"/>
-                </a:solidFill>
-                <a:latin typeface="Segoe UI"/>
-              </a:defRPr>
-            </a:pPr>
-            <a:r>
-              <a:t>Artificial Intelligence</a:t>
-            </a:r>
-          </a:p>
-          <a:p>
-            <a:pPr>
-              <a:spcBef>
-                <a:spcPts val="600"/>
-              </a:spcBef>
-              <a:defRPr sz="1150">
-                <a:solidFill>
-                  <a:srgbClr val="F8FAFC"/>
-                </a:solidFill>
-                <a:latin typeface="Segoe UI"/>
-              </a:defRPr>
-            </a:pPr>
-            <a:r>
-              <a:t>A* Pathfinding Grid visualizer (Manhattan heuristics) &amp; Neural Network weight calibrator.</a:t>
-            </a:r>
-          </a:p>
-        </p:txBody>
-      </p:sp>
-      <p:sp>
-        <p:nvSpPr>
-          <p:cNvPr id="6" name="Rounded Rectangle 5"/>
+          <a:bodyPr rtlCol="0" anchor="ctr"/>
+          <a:lstStyle/>
+          <a:p>
+            <a:pPr algn="ctr"/>
+          </a:p>
+        </p:txBody>
+      </p:sp>
+      <p:sp>
+        <p:nvSpPr>
+          <p:cNvPr id="7" name="Rounded Rectangle 6"/>
           <p:cNvSpPr/>
           <p:nvPr/>
         </p:nvSpPr>
         <p:spPr>
           <a:xfrm>
-            <a:off x="4389120" y="1645920"/>
-            <a:ext cx="3364992" cy="2011680"/>
+            <a:off x="914400" y="1874520"/>
+            <a:ext cx="73152" cy="1691640"/>
           </a:xfrm>
           <a:prstGeom prst="roundRect">
             <a:avLst/>
           </a:prstGeom>
           <a:solidFill>
-            <a:srgbClr val="162032"/>
+            <a:srgbClr val="2563EB"/>
           </a:solidFill>
-          <a:ln w="12700">
-            <a:solidFill>
-              <a:srgbClr val="A855F7"/>
-            </a:solidFill>
+          <a:ln>
+            <a:noFill/>
           </a:ln>
         </p:spPr>
         <p:style>
@@ -6661,19 +7703,44 @@
           </a:fontRef>
         </p:style>
         <p:txBody>
-          <a:bodyPr rtlCol="0" anchor="ctr" wrap="square" lIns="228600" rIns="228600" tIns="182880"/>
-          <a:lstStyle/>
-          <a:p>
-            <a:pPr algn="ctr">
-              <a:defRPr sz="1500" b="1">
-                <a:solidFill>
-                  <a:srgbClr val="A855F7"/>
-                </a:solidFill>
-                <a:latin typeface="Segoe UI"/>
-              </a:defRPr>
-            </a:pPr>
-            <a:r>
-              <a:t>Computer Networks</a:t>
+          <a:bodyPr rtlCol="0" anchor="ctr"/>
+          <a:lstStyle/>
+          <a:p>
+            <a:pPr algn="ctr"/>
+          </a:p>
+        </p:txBody>
+      </p:sp>
+      <p:sp>
+        <p:nvSpPr>
+          <p:cNvPr id="8" name="TextBox 7"/>
+          <p:cNvSpPr txBox="1"/>
+          <p:nvPr/>
+        </p:nvSpPr>
+        <p:spPr>
+          <a:xfrm>
+            <a:off x="1097280" y="1874520"/>
+            <a:ext cx="4663440" cy="1691640"/>
+          </a:xfrm>
+          <a:prstGeom prst="rect">
+            <a:avLst/>
+          </a:prstGeom>
+          <a:noFill/>
+        </p:spPr>
+        <p:txBody>
+          <a:bodyPr wrap="square">
+            <a:spAutoFit/>
+          </a:bodyPr>
+          <a:lstStyle/>
+          <a:p>
+            <a:pPr>
+              <a:defRPr sz="1300" b="1">
+                <a:solidFill>
+                  <a:srgbClr val="2563EB"/>
+                </a:solidFill>
+              </a:defRPr>
+            </a:pPr>
+            <a:r>
+              <a:t>📚  Data Structures (DSA)</a:t>
             </a:r>
           </a:p>
           <a:p>
@@ -6681,39 +7748,53 @@
               <a:spcBef>
                 <a:spcPts val="600"/>
               </a:spcBef>
-              <a:defRPr sz="1150">
-                <a:solidFill>
-                  <a:srgbClr val="F8FAFC"/>
-                </a:solidFill>
-                <a:latin typeface="Segoe UI"/>
-              </a:defRPr>
-            </a:pPr>
-            <a:r>
-              <a:t>VLSM CIDR Subnetting (/24-/28) router configurator &amp; Breadth-First Search (BFS) packet routing.</a:t>
-            </a:r>
-          </a:p>
-        </p:txBody>
-      </p:sp>
-      <p:sp>
-        <p:nvSpPr>
-          <p:cNvPr id="7" name="Rounded Rectangle 6"/>
+              <a:defRPr sz="1000">
+                <a:solidFill>
+                  <a:srgbClr val="334155"/>
+                </a:solidFill>
+              </a:defRPr>
+            </a:pPr>
+            <a:r>
+              <a:t>Arrays, Stacks, Queues, Binary Trees, Heaps, and Graph algorithms. Evaluates Big-O time and space complexity.</a:t>
+            </a:r>
+          </a:p>
+          <a:p>
+            <a:pPr>
+              <a:spcBef>
+                <a:spcPts val="800"/>
+              </a:spcBef>
+              <a:defRPr sz="950" b="1">
+                <a:solidFill>
+                  <a:srgbClr val="0F172A"/>
+                </a:solidFill>
+              </a:defRPr>
+            </a:pPr>
+            <a:r>
+              <a:t>Status: 5 Questions • 80% Seed Score</a:t>
+            </a:r>
+          </a:p>
+        </p:txBody>
+      </p:sp>
+      <p:sp>
+        <p:nvSpPr>
+          <p:cNvPr id="9" name="Rounded Rectangle 8"/>
           <p:cNvSpPr/>
           <p:nvPr/>
         </p:nvSpPr>
         <p:spPr>
           <a:xfrm>
-            <a:off x="8046720" y="1645920"/>
-            <a:ext cx="3364992" cy="2011680"/>
+            <a:off x="6172200" y="1691640"/>
+            <a:ext cx="5257800" cy="2057400"/>
           </a:xfrm>
           <a:prstGeom prst="roundRect">
             <a:avLst/>
           </a:prstGeom>
           <a:solidFill>
-            <a:srgbClr val="162032"/>
+            <a:srgbClr val="F8FAFC"/>
           </a:solidFill>
-          <a:ln w="12700">
+          <a:ln w="15240">
             <a:solidFill>
-              <a:srgbClr val="10B981"/>
+              <a:srgbClr val="E2E8F0"/>
             </a:solidFill>
           </a:ln>
         </p:spPr>
@@ -6732,60 +7813,32 @@
           </a:fontRef>
         </p:style>
         <p:txBody>
-          <a:bodyPr rtlCol="0" anchor="ctr" wrap="square" lIns="228600" rIns="228600" tIns="182880"/>
-          <a:lstStyle/>
-          <a:p>
-            <a:pPr algn="ctr">
-              <a:defRPr sz="1500" b="1">
-                <a:solidFill>
-                  <a:srgbClr val="10B981"/>
-                </a:solidFill>
-                <a:latin typeface="Segoe UI"/>
-              </a:defRPr>
-            </a:pPr>
-            <a:r>
-              <a:t>Data Structures</a:t>
-            </a:r>
-          </a:p>
-          <a:p>
-            <a:pPr>
-              <a:spcBef>
-                <a:spcPts val="600"/>
-              </a:spcBef>
-              <a:defRPr sz="1150">
-                <a:solidFill>
-                  <a:srgbClr val="F8FAFC"/>
-                </a:solidFill>
-                <a:latin typeface="Segoe UI"/>
-              </a:defRPr>
-            </a:pPr>
-            <a:r>
-              <a:t>Self-Balancing AVL Tree Rotations (LL, RR, LR, RL) &amp; 0/1 Knapsack Dynamic Programming matrix.</a:t>
-            </a:r>
-          </a:p>
-        </p:txBody>
-      </p:sp>
-      <p:sp>
-        <p:nvSpPr>
-          <p:cNvPr id="8" name="Rounded Rectangle 7"/>
+          <a:bodyPr rtlCol="0" anchor="ctr"/>
+          <a:lstStyle/>
+          <a:p>
+            <a:pPr algn="ctr"/>
+          </a:p>
+        </p:txBody>
+      </p:sp>
+      <p:sp>
+        <p:nvSpPr>
+          <p:cNvPr id="10" name="Rounded Rectangle 9"/>
           <p:cNvSpPr/>
           <p:nvPr/>
         </p:nvSpPr>
         <p:spPr>
           <a:xfrm>
-            <a:off x="731520" y="3977640"/>
-            <a:ext cx="3364992" cy="2011680"/>
+            <a:off x="6355080" y="1874520"/>
+            <a:ext cx="73152" cy="1691640"/>
           </a:xfrm>
           <a:prstGeom prst="roundRect">
             <a:avLst/>
           </a:prstGeom>
           <a:solidFill>
-            <a:srgbClr val="162032"/>
+            <a:srgbClr val="0D9488"/>
           </a:solidFill>
-          <a:ln w="12700">
-            <a:solidFill>
-              <a:srgbClr val="F59E0B"/>
-            </a:solidFill>
+          <a:ln>
+            <a:noFill/>
           </a:ln>
         </p:spPr>
         <p:style>
@@ -6803,19 +7856,44 @@
           </a:fontRef>
         </p:style>
         <p:txBody>
-          <a:bodyPr rtlCol="0" anchor="ctr" wrap="square" lIns="228600" rIns="228600" tIns="182880"/>
-          <a:lstStyle/>
-          <a:p>
-            <a:pPr algn="ctr">
-              <a:defRPr sz="1500" b="1">
-                <a:solidFill>
-                  <a:srgbClr val="F59E0B"/>
-                </a:solidFill>
-                <a:latin typeface="Segoe UI"/>
-              </a:defRPr>
-            </a:pPr>
-            <a:r>
-              <a:t>Operating Systems</a:t>
+          <a:bodyPr rtlCol="0" anchor="ctr"/>
+          <a:lstStyle/>
+          <a:p>
+            <a:pPr algn="ctr"/>
+          </a:p>
+        </p:txBody>
+      </p:sp>
+      <p:sp>
+        <p:nvSpPr>
+          <p:cNvPr id="11" name="TextBox 10"/>
+          <p:cNvSpPr txBox="1"/>
+          <p:nvPr/>
+        </p:nvSpPr>
+        <p:spPr>
+          <a:xfrm>
+            <a:off x="6537960" y="1874520"/>
+            <a:ext cx="4663440" cy="1691640"/>
+          </a:xfrm>
+          <a:prstGeom prst="rect">
+            <a:avLst/>
+          </a:prstGeom>
+          <a:noFill/>
+        </p:spPr>
+        <p:txBody>
+          <a:bodyPr wrap="square">
+            <a:spAutoFit/>
+          </a:bodyPr>
+          <a:lstStyle/>
+          <a:p>
+            <a:pPr>
+              <a:defRPr sz="1300" b="1">
+                <a:solidFill>
+                  <a:srgbClr val="0D9488"/>
+                </a:solidFill>
+              </a:defRPr>
+            </a:pPr>
+            <a:r>
+              <a:t>📚  Database Systems (DBMS)</a:t>
             </a:r>
           </a:p>
           <a:p>
@@ -6823,39 +7901,53 @@
               <a:spcBef>
                 <a:spcPts val="600"/>
               </a:spcBef>
-              <a:defRPr sz="1150">
-                <a:solidFill>
-                  <a:srgbClr val="F8FAFC"/>
-                </a:solidFill>
-                <a:latin typeface="Segoe UI"/>
-              </a:defRPr>
-            </a:pPr>
-            <a:r>
-              <a:t>Virtual Memory Page Replacement Simulator (LRU, FIFO, Optimal) to clear memory thrashing.</a:t>
-            </a:r>
-          </a:p>
-        </p:txBody>
-      </p:sp>
-      <p:sp>
-        <p:nvSpPr>
-          <p:cNvPr id="9" name="Rounded Rectangle 8"/>
+              <a:defRPr sz="1000">
+                <a:solidFill>
+                  <a:srgbClr val="334155"/>
+                </a:solidFill>
+              </a:defRPr>
+            </a:pPr>
+            <a:r>
+              <a:t>Relational schemas, Normalization (1NF–BCNF), SQL Joins, ACID transactions, and Indexing optimizations.</a:t>
+            </a:r>
+          </a:p>
+          <a:p>
+            <a:pPr>
+              <a:spcBef>
+                <a:spcPts val="800"/>
+              </a:spcBef>
+              <a:defRPr sz="950" b="1">
+                <a:solidFill>
+                  <a:srgbClr val="0F172A"/>
+                </a:solidFill>
+              </a:defRPr>
+            </a:pPr>
+            <a:r>
+              <a:t>Status: 5 Questions • 60% Seed Score</a:t>
+            </a:r>
+          </a:p>
+        </p:txBody>
+      </p:sp>
+      <p:sp>
+        <p:nvSpPr>
+          <p:cNvPr id="12" name="Rounded Rectangle 11"/>
           <p:cNvSpPr/>
           <p:nvPr/>
         </p:nvSpPr>
         <p:spPr>
           <a:xfrm>
-            <a:off x="4389120" y="3977640"/>
-            <a:ext cx="3364992" cy="2011680"/>
+            <a:off x="731520" y="3977639"/>
+            <a:ext cx="5257800" cy="2057400"/>
           </a:xfrm>
           <a:prstGeom prst="roundRect">
             <a:avLst/>
           </a:prstGeom>
           <a:solidFill>
-            <a:srgbClr val="162032"/>
+            <a:srgbClr val="F8FAFC"/>
           </a:solidFill>
-          <a:ln w="12700">
+          <a:ln w="15240">
             <a:solidFill>
-              <a:srgbClr val="00F0FF"/>
+              <a:srgbClr val="E2E8F0"/>
             </a:solidFill>
           </a:ln>
         </p:spPr>
@@ -6874,60 +7966,32 @@
           </a:fontRef>
         </p:style>
         <p:txBody>
-          <a:bodyPr rtlCol="0" anchor="ctr" wrap="square" lIns="228600" rIns="228600" tIns="182880"/>
-          <a:lstStyle/>
-          <a:p>
-            <a:pPr algn="ctr">
-              <a:defRPr sz="1500" b="1">
-                <a:solidFill>
-                  <a:srgbClr val="00F0FF"/>
-                </a:solidFill>
-                <a:latin typeface="Segoe UI"/>
-              </a:defRPr>
-            </a:pPr>
-            <a:r>
-              <a:t>Databases &amp; SQL</a:t>
-            </a:r>
-          </a:p>
-          <a:p>
-            <a:pPr>
-              <a:spcBef>
-                <a:spcPts val="600"/>
-              </a:spcBef>
-              <a:defRPr sz="1150">
-                <a:solidFill>
-                  <a:srgbClr val="F8FAFC"/>
-                </a:solidFill>
-                <a:latin typeface="Segoe UI"/>
-              </a:defRPr>
-            </a:pPr>
-            <a:r>
-              <a:t>Multi-table Relational SQL Join console (patients, vault_keys) and transaction rollback auditors.</a:t>
-            </a:r>
-          </a:p>
-        </p:txBody>
-      </p:sp>
-      <p:sp>
-        <p:nvSpPr>
-          <p:cNvPr id="10" name="Rounded Rectangle 9"/>
+          <a:bodyPr rtlCol="0" anchor="ctr"/>
+          <a:lstStyle/>
+          <a:p>
+            <a:pPr algn="ctr"/>
+          </a:p>
+        </p:txBody>
+      </p:sp>
+      <p:sp>
+        <p:nvSpPr>
+          <p:cNvPr id="13" name="Rounded Rectangle 12"/>
           <p:cNvSpPr/>
           <p:nvPr/>
         </p:nvSpPr>
         <p:spPr>
           <a:xfrm>
-            <a:off x="8046720" y="3977640"/>
-            <a:ext cx="3364992" cy="2011680"/>
+            <a:off x="914400" y="4160519"/>
+            <a:ext cx="73152" cy="1691640"/>
           </a:xfrm>
           <a:prstGeom prst="roundRect">
             <a:avLst/>
           </a:prstGeom>
           <a:solidFill>
-            <a:srgbClr val="162032"/>
+            <a:srgbClr val="D97706"/>
           </a:solidFill>
-          <a:ln w="12700">
-            <a:solidFill>
-              <a:srgbClr val="EF4444"/>
-            </a:solidFill>
+          <a:ln>
+            <a:noFill/>
           </a:ln>
         </p:spPr>
         <p:style>
@@ -6945,19 +8009,44 @@
           </a:fontRef>
         </p:style>
         <p:txBody>
-          <a:bodyPr rtlCol="0" anchor="ctr" wrap="square" lIns="228600" rIns="228600" tIns="182880"/>
-          <a:lstStyle/>
-          <a:p>
-            <a:pPr algn="ctr">
-              <a:defRPr sz="1500" b="1">
-                <a:solidFill>
-                  <a:srgbClr val="EF4444"/>
-                </a:solidFill>
-                <a:latin typeface="Segoe UI"/>
-              </a:defRPr>
-            </a:pPr>
-            <a:r>
-              <a:t>Cyber Security</a:t>
+          <a:bodyPr rtlCol="0" anchor="ctr"/>
+          <a:lstStyle/>
+          <a:p>
+            <a:pPr algn="ctr"/>
+          </a:p>
+        </p:txBody>
+      </p:sp>
+      <p:sp>
+        <p:nvSpPr>
+          <p:cNvPr id="14" name="TextBox 13"/>
+          <p:cNvSpPr txBox="1"/>
+          <p:nvPr/>
+        </p:nvSpPr>
+        <p:spPr>
+          <a:xfrm>
+            <a:off x="1097280" y="4160519"/>
+            <a:ext cx="4663440" cy="1691640"/>
+          </a:xfrm>
+          <a:prstGeom prst="rect">
+            <a:avLst/>
+          </a:prstGeom>
+          <a:noFill/>
+        </p:spPr>
+        <p:txBody>
+          <a:bodyPr wrap="square">
+            <a:spAutoFit/>
+          </a:bodyPr>
+          <a:lstStyle/>
+          <a:p>
+            <a:pPr>
+              <a:defRPr sz="1300" b="1">
+                <a:solidFill>
+                  <a:srgbClr val="D97706"/>
+                </a:solidFill>
+              </a:defRPr>
+            </a:pPr>
+            <a:r>
+              <a:t>📚  Operating Systems (OS)</a:t>
             </a:r>
           </a:p>
           <a:p>
@@ -6965,15 +8054,182 @@
               <a:spcBef>
                 <a:spcPts val="600"/>
               </a:spcBef>
-              <a:defRPr sz="1150">
-                <a:solidFill>
-                  <a:srgbClr val="F8FAFC"/>
-                </a:solidFill>
-                <a:latin typeface="Segoe UI"/>
-              </a:defRPr>
-            </a:pPr>
-            <a:r>
-              <a:t>Bitwise XOR Cryptographic Ransomware Decryption &amp; Zero-Knowledge Proofs (zk-SNARKs) passcodes.</a:t>
+              <a:defRPr sz="1000">
+                <a:solidFill>
+                  <a:srgbClr val="334155"/>
+                </a:solidFill>
+              </a:defRPr>
+            </a:pPr>
+            <a:r>
+              <a:t>Process scheduling, CPU dispatching, Deadlocks, Paging, Virtual Memory, and Thrashing prevention.</a:t>
+            </a:r>
+          </a:p>
+          <a:p>
+            <a:pPr>
+              <a:spcBef>
+                <a:spcPts val="800"/>
+              </a:spcBef>
+              <a:defRPr sz="950" b="1">
+                <a:solidFill>
+                  <a:srgbClr val="0F172A"/>
+                </a:solidFill>
+              </a:defRPr>
+            </a:pPr>
+            <a:r>
+              <a:t>Status: 5 Questions • 40% Seed Score</a:t>
+            </a:r>
+          </a:p>
+        </p:txBody>
+      </p:sp>
+      <p:sp>
+        <p:nvSpPr>
+          <p:cNvPr id="15" name="Rounded Rectangle 14"/>
+          <p:cNvSpPr/>
+          <p:nvPr/>
+        </p:nvSpPr>
+        <p:spPr>
+          <a:xfrm>
+            <a:off x="6172200" y="3977639"/>
+            <a:ext cx="5257800" cy="2057400"/>
+          </a:xfrm>
+          <a:prstGeom prst="roundRect">
+            <a:avLst/>
+          </a:prstGeom>
+          <a:solidFill>
+            <a:srgbClr val="F8FAFC"/>
+          </a:solidFill>
+          <a:ln w="15240">
+            <a:solidFill>
+              <a:srgbClr val="E2E8F0"/>
+            </a:solidFill>
+          </a:ln>
+        </p:spPr>
+        <p:style>
+          <a:lnRef idx="1">
+            <a:schemeClr val="accent1"/>
+          </a:lnRef>
+          <a:fillRef idx="3">
+            <a:schemeClr val="accent1"/>
+          </a:fillRef>
+          <a:effectRef idx="2">
+            <a:schemeClr val="accent1"/>
+          </a:effectRef>
+          <a:fontRef idx="minor">
+            <a:schemeClr val="lt1"/>
+          </a:fontRef>
+        </p:style>
+        <p:txBody>
+          <a:bodyPr rtlCol="0" anchor="ctr"/>
+          <a:lstStyle/>
+          <a:p>
+            <a:pPr algn="ctr"/>
+          </a:p>
+        </p:txBody>
+      </p:sp>
+      <p:sp>
+        <p:nvSpPr>
+          <p:cNvPr id="16" name="Rounded Rectangle 15"/>
+          <p:cNvSpPr/>
+          <p:nvPr/>
+        </p:nvSpPr>
+        <p:spPr>
+          <a:xfrm>
+            <a:off x="6355080" y="4160519"/>
+            <a:ext cx="73152" cy="1691640"/>
+          </a:xfrm>
+          <a:prstGeom prst="roundRect">
+            <a:avLst/>
+          </a:prstGeom>
+          <a:solidFill>
+            <a:srgbClr val="7C3AED"/>
+          </a:solidFill>
+          <a:ln>
+            <a:noFill/>
+          </a:ln>
+        </p:spPr>
+        <p:style>
+          <a:lnRef idx="1">
+            <a:schemeClr val="accent1"/>
+          </a:lnRef>
+          <a:fillRef idx="3">
+            <a:schemeClr val="accent1"/>
+          </a:fillRef>
+          <a:effectRef idx="2">
+            <a:schemeClr val="accent1"/>
+          </a:effectRef>
+          <a:fontRef idx="minor">
+            <a:schemeClr val="lt1"/>
+          </a:fontRef>
+        </p:style>
+        <p:txBody>
+          <a:bodyPr rtlCol="0" anchor="ctr"/>
+          <a:lstStyle/>
+          <a:p>
+            <a:pPr algn="ctr"/>
+          </a:p>
+        </p:txBody>
+      </p:sp>
+      <p:sp>
+        <p:nvSpPr>
+          <p:cNvPr id="17" name="TextBox 16"/>
+          <p:cNvSpPr txBox="1"/>
+          <p:nvPr/>
+        </p:nvSpPr>
+        <p:spPr>
+          <a:xfrm>
+            <a:off x="6537960" y="4160519"/>
+            <a:ext cx="4663440" cy="1691640"/>
+          </a:xfrm>
+          <a:prstGeom prst="rect">
+            <a:avLst/>
+          </a:prstGeom>
+          <a:noFill/>
+        </p:spPr>
+        <p:txBody>
+          <a:bodyPr wrap="square">
+            <a:spAutoFit/>
+          </a:bodyPr>
+          <a:lstStyle/>
+          <a:p>
+            <a:pPr>
+              <a:defRPr sz="1300" b="1">
+                <a:solidFill>
+                  <a:srgbClr val="7C3AED"/>
+                </a:solidFill>
+              </a:defRPr>
+            </a:pPr>
+            <a:r>
+              <a:t>📚  Computer Networks (CN)</a:t>
+            </a:r>
+          </a:p>
+          <a:p>
+            <a:pPr>
+              <a:spcBef>
+                <a:spcPts val="600"/>
+              </a:spcBef>
+              <a:defRPr sz="1000">
+                <a:solidFill>
+                  <a:srgbClr val="334155"/>
+                </a:solidFill>
+              </a:defRPr>
+            </a:pPr>
+            <a:r>
+              <a:t>OSI 7 Layers, TCP/IP handshakes, VLSM Subnetting, Routing protocols, and DNS/DHCP infrastructure.</a:t>
+            </a:r>
+          </a:p>
+          <a:p>
+            <a:pPr>
+              <a:spcBef>
+                <a:spcPts val="800"/>
+              </a:spcBef>
+              <a:defRPr sz="950" b="1">
+                <a:solidFill>
+                  <a:srgbClr val="0F172A"/>
+                </a:solidFill>
+              </a:defRPr>
+            </a:pPr>
+            <a:r>
+              <a:t>Status: 5 Questions • 20% Seed Score</a:t>
             </a:r>
           </a:p>
         </p:txBody>
@@ -7011,7 +8267,7 @@
             <a:avLst/>
           </a:prstGeom>
           <a:solidFill>
-            <a:srgbClr val="0A0F1D"/>
+            <a:srgbClr val="FFFFFF"/>
           </a:solidFill>
           <a:ln>
             <a:noFill/>
@@ -7047,8 +8303,8 @@
         </p:nvSpPr>
         <p:spPr>
           <a:xfrm>
-            <a:off x="731520" y="411480"/>
-            <a:ext cx="10698480" cy="320040"/>
+            <a:off x="731520" y="384048"/>
+            <a:ext cx="10698480" cy="274320"/>
           </a:xfrm>
           <a:prstGeom prst="rect">
             <a:avLst/>
@@ -7062,15 +8318,15 @@
           <a:lstStyle/>
           <a:p>
             <a:pPr>
-              <a:defRPr sz="1100" b="1">
-                <a:solidFill>
-                  <a:srgbClr val="00F0FF"/>
+              <a:defRPr sz="1000" b="1">
+                <a:solidFill>
+                  <a:srgbClr val="2563EB"/>
                 </a:solidFill>
                 <a:latin typeface="Segoe UI"/>
               </a:defRPr>
             </a:pPr>
             <a:r>
-              <a:t>AI ENGINES</a:t>
+              <a:t>PLATFORM WALKTHROUGH</a:t>
             </a:r>
           </a:p>
         </p:txBody>
@@ -7083,8 +8339,8 @@
         </p:nvSpPr>
         <p:spPr>
           <a:xfrm>
-            <a:off x="731520" y="731520"/>
-            <a:ext cx="10698480" cy="594360"/>
+            <a:off x="731520" y="658368"/>
+            <a:ext cx="10698480" cy="502920"/>
           </a:xfrm>
           <a:prstGeom prst="rect">
             <a:avLst/>
@@ -7098,55 +8354,75 @@
           <a:lstStyle/>
           <a:p>
             <a:pPr>
-              <a:defRPr sz="2400" b="1">
-                <a:solidFill>
-                  <a:srgbClr val="F8FAFC"/>
+              <a:defRPr sz="2200" b="1">
+                <a:solidFill>
+                  <a:srgbClr val="0F172A"/>
                 </a:solidFill>
                 <a:latin typeface="Segoe UI"/>
               </a:defRPr>
             </a:pPr>
             <a:r>
-              <a:t>AI Mentorship Micro-Engines: Scaffolded Learning with Penalties</a:t>
-            </a:r>
-          </a:p>
-          <a:p>
-            <a:pPr>
-              <a:spcBef>
-                <a:spcPts val="400"/>
-              </a:spcBef>
-              <a:defRPr sz="1200">
-                <a:solidFill>
-                  <a:srgbClr val="94A3B8"/>
+              <a:t>MissionX Web Application &amp; Feature Walkthrough</a:t>
+            </a:r>
+          </a:p>
+        </p:txBody>
+      </p:sp>
+      <p:sp>
+        <p:nvSpPr>
+          <p:cNvPr id="5" name="TextBox 4"/>
+          <p:cNvSpPr txBox="1"/>
+          <p:nvPr/>
+        </p:nvSpPr>
+        <p:spPr>
+          <a:xfrm>
+            <a:off x="731520" y="1188720"/>
+            <a:ext cx="10698480" cy="320040"/>
+          </a:xfrm>
+          <a:prstGeom prst="rect">
+            <a:avLst/>
+          </a:prstGeom>
+          <a:noFill/>
+        </p:spPr>
+        <p:txBody>
+          <a:bodyPr wrap="square" lIns="0" tIns="0" rIns="0" bIns="0">
+            <a:spAutoFit/>
+          </a:bodyPr>
+          <a:lstStyle/>
+          <a:p>
+            <a:pPr>
+              <a:defRPr sz="1100">
+                <a:solidFill>
+                  <a:srgbClr val="64748B"/>
                 </a:solidFill>
                 <a:latin typeface="Segoe UI"/>
               </a:defRPr>
             </a:pPr>
             <a:r>
-              <a:t>Intelligent tutoring that guides students through crises without giving away direct answers.</a:t>
-            </a:r>
-          </a:p>
-        </p:txBody>
-      </p:sp>
-      <p:sp>
-        <p:nvSpPr>
-          <p:cNvPr id="5" name="Rounded Rectangle 4"/>
+              <a:t>Intuitive, modern web application designed for students and evaluators.</a:t>
+            </a:r>
+          </a:p>
+        </p:txBody>
+      </p:sp>
+      <p:sp>
+        <p:nvSpPr>
+          <p:cNvPr id="6" name="Rounded Rectangle 5"/>
           <p:cNvSpPr/>
           <p:nvPr/>
         </p:nvSpPr>
         <p:spPr>
           <a:xfrm>
-            <a:off x="731520" y="1645920"/>
-            <a:ext cx="3364992" cy="4389120"/>
+            <a:off x="731520" y="1691640"/>
+            <a:ext cx="10728655" cy="1005840"/>
           </a:xfrm>
           <a:prstGeom prst="roundRect">
             <a:avLst/>
           </a:prstGeom>
           <a:solidFill>
-            <a:srgbClr val="162032"/>
+            <a:srgbClr val="F8FAFC"/>
           </a:solidFill>
-          <a:ln w="12700">
+          <a:ln w="15240">
             <a:solidFill>
-              <a:srgbClr val="00F0FF"/>
+              <a:srgbClr val="E2E8F0"/>
             </a:solidFill>
           </a:ln>
         </p:spPr>
@@ -7165,73 +8441,32 @@
           </a:fontRef>
         </p:style>
         <p:txBody>
-          <a:bodyPr rtlCol="0" anchor="ctr" wrap="square" lIns="274320" rIns="274320" tIns="274320"/>
-          <a:lstStyle/>
-          <a:p>
-            <a:pPr algn="ctr">
-              <a:defRPr sz="1500" b="1">
-                <a:solidFill>
-                  <a:srgbClr val="00F0FF"/>
-                </a:solidFill>
-                <a:latin typeface="Segoe UI"/>
-              </a:defRPr>
-            </a:pPr>
-            <a:r>
-              <a:t>3-Tier Context-Aware Hint Engine</a:t>
-            </a:r>
-          </a:p>
-          <a:p>
-            <a:pPr>
-              <a:spcBef>
-                <a:spcPts val="1000"/>
-              </a:spcBef>
-              <a:defRPr sz="1150">
-                <a:solidFill>
-                  <a:srgbClr val="F8FAFC"/>
-                </a:solidFill>
-                <a:latin typeface="Segoe UI"/>
-              </a:defRPr>
-            </a:pPr>
-            <a:r>
-              <a:t>Prevents game deadlock using adaptive, tiered guidance tied to clock penalties:</a:t>
-            </a:r>
-            <a:br/>
-            <a:br/>
-            <a:r>
-              <a:t>• Tier 1 (Subtle Nudge): Points out conceptual focus areas. (0 min penalty)</a:t>
-            </a:r>
-            <a:br/>
-            <a:r>
-              <a:t>• Tier 2 (Technical Formula): Provides mathematical equations &amp; theory. (-2 min penalty)</a:t>
-            </a:r>
-            <a:br/>
-            <a:r>
-              <a:t>• Tier 3 (Direct Solution Step): Actionable override code when severely stuck. (-5 min penalty)</a:t>
-            </a:r>
-          </a:p>
-        </p:txBody>
-      </p:sp>
-      <p:sp>
-        <p:nvSpPr>
-          <p:cNvPr id="6" name="Rounded Rectangle 5"/>
+          <a:bodyPr rtlCol="0" anchor="ctr"/>
+          <a:lstStyle/>
+          <a:p>
+            <a:pPr algn="ctr"/>
+          </a:p>
+        </p:txBody>
+      </p:sp>
+      <p:sp>
+        <p:nvSpPr>
+          <p:cNvPr id="7" name="Rounded Rectangle 6"/>
           <p:cNvSpPr/>
           <p:nvPr/>
         </p:nvSpPr>
         <p:spPr>
           <a:xfrm>
-            <a:off x="4389120" y="1645920"/>
-            <a:ext cx="3364992" cy="4389120"/>
+            <a:off x="960120" y="1920240"/>
+            <a:ext cx="548640" cy="548640"/>
           </a:xfrm>
           <a:prstGeom prst="roundRect">
             <a:avLst/>
           </a:prstGeom>
           <a:solidFill>
-            <a:srgbClr val="162032"/>
+            <a:srgbClr val="2563EB"/>
           </a:solidFill>
-          <a:ln w="12700">
-            <a:solidFill>
-              <a:srgbClr val="A855F7"/>
-            </a:solidFill>
+          <a:ln>
+            <a:noFill/>
           </a:ln>
         </p:spPr>
         <p:style>
@@ -7249,72 +8484,83 @@
           </a:fontRef>
         </p:style>
         <p:txBody>
-          <a:bodyPr rtlCol="0" anchor="ctr" wrap="square" lIns="274320" rIns="274320" tIns="274320"/>
-          <a:lstStyle/>
-          <a:p>
-            <a:pPr algn="ctr">
-              <a:defRPr sz="1500" b="1">
-                <a:solidFill>
-                  <a:srgbClr val="A855F7"/>
-                </a:solidFill>
-                <a:latin typeface="Segoe UI"/>
-              </a:defRPr>
-            </a:pPr>
-            <a:r>
-              <a:t>Dual-LLM AI Tutor Chatbot</a:t>
+          <a:bodyPr rtlCol="0" anchor="ctr"/>
+          <a:lstStyle/>
+          <a:p>
+            <a:pPr algn="ctr"/>
+          </a:p>
+        </p:txBody>
+      </p:sp>
+      <p:sp>
+        <p:nvSpPr>
+          <p:cNvPr id="8" name="TextBox 7"/>
+          <p:cNvSpPr txBox="1"/>
+          <p:nvPr/>
+        </p:nvSpPr>
+        <p:spPr>
+          <a:xfrm>
+            <a:off x="1691640" y="1828800"/>
+            <a:ext cx="9509760" cy="731520"/>
+          </a:xfrm>
+          <a:prstGeom prst="rect">
+            <a:avLst/>
+          </a:prstGeom>
+          <a:noFill/>
+        </p:spPr>
+        <p:txBody>
+          <a:bodyPr wrap="square">
+            <a:spAutoFit/>
+          </a:bodyPr>
+          <a:lstStyle/>
+          <a:p>
+            <a:pPr>
+              <a:defRPr sz="1200" b="1">
+                <a:solidFill>
+                  <a:srgbClr val="2563EB"/>
+                </a:solidFill>
+              </a:defRPr>
+            </a:pPr>
+            <a:r>
+              <a:t>Dashboard (/dashboard)</a:t>
             </a:r>
           </a:p>
           <a:p>
             <a:pPr>
               <a:spcBef>
-                <a:spcPts val="1000"/>
+                <a:spcPts val="300"/>
               </a:spcBef>
-              <a:defRPr sz="1150">
-                <a:solidFill>
-                  <a:srgbClr val="F8FAFC"/>
-                </a:solidFill>
-                <a:latin typeface="Segoe UI"/>
-              </a:defRPr>
-            </a:pPr>
-            <a:r>
-              <a:t>In-game floating HUD co-pilot supporting multiple leading models:</a:t>
-            </a:r>
-            <a:br/>
-            <a:br/>
-            <a:r>
-              <a:t>• OpenAI GPT-4o &amp; Google Gemini 1.5 Pro/Flash integration via secure backend micro-services.</a:t>
-            </a:r>
-            <a:br/>
-            <a:r>
-              <a:t>• Context-Aware Prompting: The LLM knows the current room stage, failed attempts, and elapsed time.</a:t>
-            </a:r>
-            <a:br/>
-            <a:r>
-              <a:t>• Web Speech API integration for audible AI voice responses in the browser.</a:t>
-            </a:r>
-          </a:p>
-        </p:txBody>
-      </p:sp>
-      <p:sp>
-        <p:nvSpPr>
-          <p:cNvPr id="7" name="Rounded Rectangle 6"/>
+              <a:defRPr sz="1000">
+                <a:solidFill>
+                  <a:srgbClr val="334155"/>
+                </a:solidFill>
+              </a:defRPr>
+            </a:pPr>
+            <a:r>
+              <a:t>Unified command center with live sensor widgets, 4-subject learning progress meters, and quick actions.</a:t>
+            </a:r>
+          </a:p>
+        </p:txBody>
+      </p:sp>
+      <p:sp>
+        <p:nvSpPr>
+          <p:cNvPr id="9" name="Rounded Rectangle 8"/>
           <p:cNvSpPr/>
           <p:nvPr/>
         </p:nvSpPr>
         <p:spPr>
           <a:xfrm>
-            <a:off x="8046720" y="1645920"/>
-            <a:ext cx="3364992" cy="4389120"/>
+            <a:off x="731520" y="2834640"/>
+            <a:ext cx="10728655" cy="1005840"/>
           </a:xfrm>
           <a:prstGeom prst="roundRect">
             <a:avLst/>
           </a:prstGeom>
           <a:solidFill>
-            <a:srgbClr val="162032"/>
+            <a:srgbClr val="F8FAFC"/>
           </a:solidFill>
-          <a:ln w="12700">
+          <a:ln w="15240">
             <a:solidFill>
-              <a:srgbClr val="10B981"/>
+              <a:srgbClr val="E2E8F0"/>
             </a:solidFill>
           </a:ln>
         </p:spPr>
@@ -7333,48 +8579,378 @@
           </a:fontRef>
         </p:style>
         <p:txBody>
-          <a:bodyPr rtlCol="0" anchor="ctr" wrap="square" lIns="274320" rIns="274320" tIns="274320"/>
-          <a:lstStyle/>
-          <a:p>
-            <a:pPr algn="ctr">
-              <a:defRPr sz="1500" b="1">
-                <a:solidFill>
-                  <a:srgbClr val="10B981"/>
-                </a:solidFill>
-                <a:latin typeface="Segoe UI"/>
-              </a:defRPr>
-            </a:pPr>
-            <a:r>
-              <a:t>Automated AI Code Reviewer</a:t>
+          <a:bodyPr rtlCol="0" anchor="ctr"/>
+          <a:lstStyle/>
+          <a:p>
+            <a:pPr algn="ctr"/>
+          </a:p>
+        </p:txBody>
+      </p:sp>
+      <p:sp>
+        <p:nvSpPr>
+          <p:cNvPr id="10" name="Rounded Rectangle 9"/>
+          <p:cNvSpPr/>
+          <p:nvPr/>
+        </p:nvSpPr>
+        <p:spPr>
+          <a:xfrm>
+            <a:off x="960120" y="3063240"/>
+            <a:ext cx="548640" cy="548640"/>
+          </a:xfrm>
+          <a:prstGeom prst="roundRect">
+            <a:avLst/>
+          </a:prstGeom>
+          <a:solidFill>
+            <a:srgbClr val="0D9488"/>
+          </a:solidFill>
+          <a:ln>
+            <a:noFill/>
+          </a:ln>
+        </p:spPr>
+        <p:style>
+          <a:lnRef idx="1">
+            <a:schemeClr val="accent1"/>
+          </a:lnRef>
+          <a:fillRef idx="3">
+            <a:schemeClr val="accent1"/>
+          </a:fillRef>
+          <a:effectRef idx="2">
+            <a:schemeClr val="accent1"/>
+          </a:effectRef>
+          <a:fontRef idx="minor">
+            <a:schemeClr val="lt1"/>
+          </a:fontRef>
+        </p:style>
+        <p:txBody>
+          <a:bodyPr rtlCol="0" anchor="ctr"/>
+          <a:lstStyle/>
+          <a:p>
+            <a:pPr algn="ctr"/>
+          </a:p>
+        </p:txBody>
+      </p:sp>
+      <p:sp>
+        <p:nvSpPr>
+          <p:cNvPr id="11" name="TextBox 10"/>
+          <p:cNvSpPr txBox="1"/>
+          <p:nvPr/>
+        </p:nvSpPr>
+        <p:spPr>
+          <a:xfrm>
+            <a:off x="1691640" y="2971800"/>
+            <a:ext cx="9509760" cy="731520"/>
+          </a:xfrm>
+          <a:prstGeom prst="rect">
+            <a:avLst/>
+          </a:prstGeom>
+          <a:noFill/>
+        </p:spPr>
+        <p:txBody>
+          <a:bodyPr wrap="square">
+            <a:spAutoFit/>
+          </a:bodyPr>
+          <a:lstStyle/>
+          <a:p>
+            <a:pPr>
+              <a:defRPr sz="1200" b="1">
+                <a:solidFill>
+                  <a:srgbClr val="0D9488"/>
+                </a:solidFill>
+              </a:defRPr>
+            </a:pPr>
+            <a:r>
+              <a:t>Live Sensor Console (/sensor)</a:t>
             </a:r>
           </a:p>
           <a:p>
             <a:pPr>
               <a:spcBef>
-                <a:spcPts val="1000"/>
+                <a:spcPts val="300"/>
               </a:spcBef>
-              <a:defRPr sz="1150">
-                <a:solidFill>
-                  <a:srgbClr val="F8FAFC"/>
-                </a:solidFill>
-                <a:latin typeface="Segoe UI"/>
-              </a:defRPr>
-            </a:pPr>
-            <a:r>
-              <a:t>Static algorithmic analysis of student submissions:</a:t>
-            </a:r>
-            <a:br/>
-            <a:br/>
-            <a:r>
-              <a:t>• Evaluates student solutions for Big-O time and space complexity (e.g. validating O(N log N)).</a:t>
-            </a:r>
-            <a:br/>
-            <a:r>
-              <a:t>• Flags subtle security flaws, memory leaks, or unhandled edge cases.</a:t>
-            </a:r>
-            <a:br/>
-            <a:r>
-              <a:t>• Dynamic Difficulty Scaler: Dynamically adjusts puzzle distractors based on escape velocity.</a:t>
+              <a:defRPr sz="1000">
+                <a:solidFill>
+                  <a:srgbClr val="334155"/>
+                </a:solidFill>
+              </a:defRPr>
+            </a:pPr>
+            <a:r>
+              <a:t>Primary sensor dial, 3-second live sampling loop, technical specifications, and rolling 8-sample history.</a:t>
+            </a:r>
+          </a:p>
+        </p:txBody>
+      </p:sp>
+      <p:sp>
+        <p:nvSpPr>
+          <p:cNvPr id="12" name="Rounded Rectangle 11"/>
+          <p:cNvSpPr/>
+          <p:nvPr/>
+        </p:nvSpPr>
+        <p:spPr>
+          <a:xfrm>
+            <a:off x="731520" y="3977639"/>
+            <a:ext cx="10728655" cy="1005840"/>
+          </a:xfrm>
+          <a:prstGeom prst="roundRect">
+            <a:avLst/>
+          </a:prstGeom>
+          <a:solidFill>
+            <a:srgbClr val="F8FAFC"/>
+          </a:solidFill>
+          <a:ln w="15240">
+            <a:solidFill>
+              <a:srgbClr val="E2E8F0"/>
+            </a:solidFill>
+          </a:ln>
+        </p:spPr>
+        <p:style>
+          <a:lnRef idx="1">
+            <a:schemeClr val="accent1"/>
+          </a:lnRef>
+          <a:fillRef idx="3">
+            <a:schemeClr val="accent1"/>
+          </a:fillRef>
+          <a:effectRef idx="2">
+            <a:schemeClr val="accent1"/>
+          </a:effectRef>
+          <a:fontRef idx="minor">
+            <a:schemeClr val="lt1"/>
+          </a:fontRef>
+        </p:style>
+        <p:txBody>
+          <a:bodyPr rtlCol="0" anchor="ctr"/>
+          <a:lstStyle/>
+          <a:p>
+            <a:pPr algn="ctr"/>
+          </a:p>
+        </p:txBody>
+      </p:sp>
+      <p:sp>
+        <p:nvSpPr>
+          <p:cNvPr id="13" name="Rounded Rectangle 12"/>
+          <p:cNvSpPr/>
+          <p:nvPr/>
+        </p:nvSpPr>
+        <p:spPr>
+          <a:xfrm>
+            <a:off x="960120" y="4206239"/>
+            <a:ext cx="548640" cy="548640"/>
+          </a:xfrm>
+          <a:prstGeom prst="roundRect">
+            <a:avLst/>
+          </a:prstGeom>
+          <a:solidFill>
+            <a:srgbClr val="D97706"/>
+          </a:solidFill>
+          <a:ln>
+            <a:noFill/>
+          </a:ln>
+        </p:spPr>
+        <p:style>
+          <a:lnRef idx="1">
+            <a:schemeClr val="accent1"/>
+          </a:lnRef>
+          <a:fillRef idx="3">
+            <a:schemeClr val="accent1"/>
+          </a:fillRef>
+          <a:effectRef idx="2">
+            <a:schemeClr val="accent1"/>
+          </a:effectRef>
+          <a:fontRef idx="minor">
+            <a:schemeClr val="lt1"/>
+          </a:fontRef>
+        </p:style>
+        <p:txBody>
+          <a:bodyPr rtlCol="0" anchor="ctr"/>
+          <a:lstStyle/>
+          <a:p>
+            <a:pPr algn="ctr"/>
+          </a:p>
+        </p:txBody>
+      </p:sp>
+      <p:sp>
+        <p:nvSpPr>
+          <p:cNvPr id="14" name="TextBox 13"/>
+          <p:cNvSpPr txBox="1"/>
+          <p:nvPr/>
+        </p:nvSpPr>
+        <p:spPr>
+          <a:xfrm>
+            <a:off x="1691640" y="4114799"/>
+            <a:ext cx="9509760" cy="731520"/>
+          </a:xfrm>
+          <a:prstGeom prst="rect">
+            <a:avLst/>
+          </a:prstGeom>
+          <a:noFill/>
+        </p:spPr>
+        <p:txBody>
+          <a:bodyPr wrap="square">
+            <a:spAutoFit/>
+          </a:bodyPr>
+          <a:lstStyle/>
+          <a:p>
+            <a:pPr>
+              <a:defRPr sz="1200" b="1">
+                <a:solidFill>
+                  <a:srgbClr val="D97706"/>
+                </a:solidFill>
+              </a:defRPr>
+            </a:pPr>
+            <a:r>
+              <a:t>Hardware Simulator (/simulator)</a:t>
+            </a:r>
+          </a:p>
+          <a:p>
+            <a:pPr>
+              <a:spcBef>
+                <a:spcPts val="300"/>
+              </a:spcBef>
+              <a:defRPr sz="1000">
+                <a:solidFill>
+                  <a:srgbClr val="334155"/>
+                </a:solidFill>
+              </a:defRPr>
+            </a:pPr>
+            <a:r>
+              <a:t>Full breadboard visualizer, temp/humidity sliders, presets, 115200 baud serial monitor, and C++ sketch viewer.</a:t>
+            </a:r>
+          </a:p>
+        </p:txBody>
+      </p:sp>
+      <p:sp>
+        <p:nvSpPr>
+          <p:cNvPr id="15" name="Rounded Rectangle 14"/>
+          <p:cNvSpPr/>
+          <p:nvPr/>
+        </p:nvSpPr>
+        <p:spPr>
+          <a:xfrm>
+            <a:off x="731520" y="5120640"/>
+            <a:ext cx="10728655" cy="1005840"/>
+          </a:xfrm>
+          <a:prstGeom prst="roundRect">
+            <a:avLst/>
+          </a:prstGeom>
+          <a:solidFill>
+            <a:srgbClr val="F8FAFC"/>
+          </a:solidFill>
+          <a:ln w="15240">
+            <a:solidFill>
+              <a:srgbClr val="E2E8F0"/>
+            </a:solidFill>
+          </a:ln>
+        </p:spPr>
+        <p:style>
+          <a:lnRef idx="1">
+            <a:schemeClr val="accent1"/>
+          </a:lnRef>
+          <a:fillRef idx="3">
+            <a:schemeClr val="accent1"/>
+          </a:fillRef>
+          <a:effectRef idx="2">
+            <a:schemeClr val="accent1"/>
+          </a:effectRef>
+          <a:fontRef idx="minor">
+            <a:schemeClr val="lt1"/>
+          </a:fontRef>
+        </p:style>
+        <p:txBody>
+          <a:bodyPr rtlCol="0" anchor="ctr"/>
+          <a:lstStyle/>
+          <a:p>
+            <a:pPr algn="ctr"/>
+          </a:p>
+        </p:txBody>
+      </p:sp>
+      <p:sp>
+        <p:nvSpPr>
+          <p:cNvPr id="16" name="Rounded Rectangle 15"/>
+          <p:cNvSpPr/>
+          <p:nvPr/>
+        </p:nvSpPr>
+        <p:spPr>
+          <a:xfrm>
+            <a:off x="960120" y="5349240"/>
+            <a:ext cx="548640" cy="548640"/>
+          </a:xfrm>
+          <a:prstGeom prst="roundRect">
+            <a:avLst/>
+          </a:prstGeom>
+          <a:solidFill>
+            <a:srgbClr val="10956A"/>
+          </a:solidFill>
+          <a:ln>
+            <a:noFill/>
+          </a:ln>
+        </p:spPr>
+        <p:style>
+          <a:lnRef idx="1">
+            <a:schemeClr val="accent1"/>
+          </a:lnRef>
+          <a:fillRef idx="3">
+            <a:schemeClr val="accent1"/>
+          </a:fillRef>
+          <a:effectRef idx="2">
+            <a:schemeClr val="accent1"/>
+          </a:effectRef>
+          <a:fontRef idx="minor">
+            <a:schemeClr val="lt1"/>
+          </a:fontRef>
+        </p:style>
+        <p:txBody>
+          <a:bodyPr rtlCol="0" anchor="ctr"/>
+          <a:lstStyle/>
+          <a:p>
+            <a:pPr algn="ctr"/>
+          </a:p>
+        </p:txBody>
+      </p:sp>
+      <p:sp>
+        <p:nvSpPr>
+          <p:cNvPr id="17" name="TextBox 16"/>
+          <p:cNvSpPr txBox="1"/>
+          <p:nvPr/>
+        </p:nvSpPr>
+        <p:spPr>
+          <a:xfrm>
+            <a:off x="1691640" y="5257800"/>
+            <a:ext cx="9509760" cy="731520"/>
+          </a:xfrm>
+          <a:prstGeom prst="rect">
+            <a:avLst/>
+          </a:prstGeom>
+          <a:noFill/>
+        </p:spPr>
+        <p:txBody>
+          <a:bodyPr wrap="square">
+            <a:spAutoFit/>
+          </a:bodyPr>
+          <a:lstStyle/>
+          <a:p>
+            <a:pPr>
+              <a:defRPr sz="1200" b="1">
+                <a:solidFill>
+                  <a:srgbClr val="10956A"/>
+                </a:solidFill>
+              </a:defRPr>
+            </a:pPr>
+            <a:r>
+              <a:t>Subject Challenge Quizzes (/quiz/[id])</a:t>
+            </a:r>
+          </a:p>
+          <a:p>
+            <a:pPr>
+              <a:spcBef>
+                <a:spcPts val="300"/>
+              </a:spcBef>
+              <a:defRPr sz="1000">
+                <a:solidFill>
+                  <a:srgbClr val="334155"/>
+                </a:solidFill>
+              </a:defRPr>
+            </a:pPr>
+            <a:r>
+              <a:t>Interactive quiz engine with option selection, immediate validation feedback, explanations, and score persistence.</a:t>
             </a:r>
           </a:p>
         </p:txBody>
@@ -7412,7 +8988,7 @@
             <a:avLst/>
           </a:prstGeom>
           <a:solidFill>
-            <a:srgbClr val="0A0F1D"/>
+            <a:srgbClr val="FFFFFF"/>
           </a:solidFill>
           <a:ln>
             <a:noFill/>
@@ -7448,8 +9024,8 @@
         </p:nvSpPr>
         <p:spPr>
           <a:xfrm>
-            <a:off x="731520" y="411480"/>
-            <a:ext cx="10698480" cy="320040"/>
+            <a:off x="731520" y="384048"/>
+            <a:ext cx="10698480" cy="274320"/>
           </a:xfrm>
           <a:prstGeom prst="rect">
             <a:avLst/>
@@ -7463,15 +9039,15 @@
           <a:lstStyle/>
           <a:p>
             <a:pPr>
-              <a:defRPr sz="1100" b="1">
-                <a:solidFill>
-                  <a:srgbClr val="00F0FF"/>
+              <a:defRPr sz="1000" b="1">
+                <a:solidFill>
+                  <a:srgbClr val="2563EB"/>
                 </a:solidFill>
                 <a:latin typeface="Segoe UI"/>
               </a:defRPr>
             </a:pPr>
             <a:r>
-              <a:t>DEVOPS &amp; DEPLOYMENT</a:t>
+              <a:t>CONCLUSION</a:t>
             </a:r>
           </a:p>
         </p:txBody>
@@ -7484,8 +9060,8 @@
         </p:nvSpPr>
         <p:spPr>
           <a:xfrm>
-            <a:off x="731520" y="731520"/>
-            <a:ext cx="10698480" cy="594360"/>
+            <a:off x="731520" y="658368"/>
+            <a:ext cx="10698480" cy="502920"/>
           </a:xfrm>
           <a:prstGeom prst="rect">
             <a:avLst/>
@@ -7499,55 +9075,75 @@
           <a:lstStyle/>
           <a:p>
             <a:pPr>
-              <a:defRPr sz="2400" b="1">
-                <a:solidFill>
-                  <a:srgbClr val="F8FAFC"/>
+              <a:defRPr sz="2200" b="1">
+                <a:solidFill>
+                  <a:srgbClr val="0F172A"/>
                 </a:solidFill>
                 <a:latin typeface="Segoe UI"/>
               </a:defRPr>
             </a:pPr>
             <a:r>
-              <a:t>Enterprise Cloud Architecture, Observability &amp; Resilience</a:t>
-            </a:r>
-          </a:p>
-          <a:p>
-            <a:pPr>
-              <a:spcBef>
-                <a:spcPts val="400"/>
-              </a:spcBef>
-              <a:defRPr sz="1200">
-                <a:solidFill>
-                  <a:srgbClr val="94A3B8"/>
+              <a:t>Project Summary, Academic Impact &amp; Future Scope</a:t>
+            </a:r>
+          </a:p>
+        </p:txBody>
+      </p:sp>
+      <p:sp>
+        <p:nvSpPr>
+          <p:cNvPr id="5" name="TextBox 4"/>
+          <p:cNvSpPr txBox="1"/>
+          <p:nvPr/>
+        </p:nvSpPr>
+        <p:spPr>
+          <a:xfrm>
+            <a:off x="731520" y="1188720"/>
+            <a:ext cx="10698480" cy="320040"/>
+          </a:xfrm>
+          <a:prstGeom prst="rect">
+            <a:avLst/>
+          </a:prstGeom>
+          <a:noFill/>
+        </p:spPr>
+        <p:txBody>
+          <a:bodyPr wrap="square" lIns="0" tIns="0" rIns="0" bIns="0">
+            <a:spAutoFit/>
+          </a:bodyPr>
+          <a:lstStyle/>
+          <a:p>
+            <a:pPr>
+              <a:defRPr sz="1100">
+                <a:solidFill>
+                  <a:srgbClr val="64748B"/>
                 </a:solidFill>
                 <a:latin typeface="Segoe UI"/>
               </a:defRPr>
             </a:pPr>
             <a:r>
-              <a:t>Engineered for high availability, low latency, and zero downtime in production.</a:t>
-            </a:r>
-          </a:p>
-        </p:txBody>
-      </p:sp>
-      <p:sp>
-        <p:nvSpPr>
-          <p:cNvPr id="5" name="Rounded Rectangle 4"/>
+              <a:t>Demonstrating cyber-physical systems engineering with zero hardware barriers.</a:t>
+            </a:r>
+          </a:p>
+        </p:txBody>
+      </p:sp>
+      <p:sp>
+        <p:nvSpPr>
+          <p:cNvPr id="6" name="Rounded Rectangle 5"/>
           <p:cNvSpPr/>
           <p:nvPr/>
         </p:nvSpPr>
         <p:spPr>
           <a:xfrm>
-            <a:off x="731520" y="1645920"/>
-            <a:ext cx="3364992" cy="4389120"/>
+            <a:off x="731520" y="1691640"/>
+            <a:ext cx="5120640" cy="4480560"/>
           </a:xfrm>
           <a:prstGeom prst="roundRect">
             <a:avLst/>
           </a:prstGeom>
           <a:solidFill>
-            <a:srgbClr val="162032"/>
+            <a:srgbClr val="F0FDFA"/>
           </a:solidFill>
-          <a:ln w="12700">
+          <a:ln w="15240">
             <a:solidFill>
-              <a:srgbClr val="00F0FF"/>
+              <a:srgbClr val="99F6E4"/>
             </a:solidFill>
           </a:ln>
         </p:spPr>
@@ -7566,67 +9162,176 @@
           </a:fontRef>
         </p:style>
         <p:txBody>
-          <a:bodyPr rtlCol="0" anchor="ctr" wrap="square" lIns="274320" rIns="274320" tIns="274320"/>
-          <a:lstStyle/>
-          <a:p>
-            <a:pPr algn="ctr">
-              <a:defRPr sz="1500" b="1">
-                <a:solidFill>
-                  <a:srgbClr val="00F0FF"/>
-                </a:solidFill>
-                <a:latin typeface="Segoe UI"/>
-              </a:defRPr>
-            </a:pPr>
-            <a:r>
-              <a:t>Containerization &amp; Orchestration</a:t>
+          <a:bodyPr rtlCol="0" anchor="ctr"/>
+          <a:lstStyle/>
+          <a:p>
+            <a:pPr algn="ctr"/>
+          </a:p>
+        </p:txBody>
+      </p:sp>
+      <p:sp>
+        <p:nvSpPr>
+          <p:cNvPr id="7" name="TextBox 6"/>
+          <p:cNvSpPr txBox="1"/>
+          <p:nvPr/>
+        </p:nvSpPr>
+        <p:spPr>
+          <a:xfrm>
+            <a:off x="960120" y="1874519"/>
+            <a:ext cx="4663440" cy="4023360"/>
+          </a:xfrm>
+          <a:prstGeom prst="rect">
+            <a:avLst/>
+          </a:prstGeom>
+          <a:noFill/>
+        </p:spPr>
+        <p:txBody>
+          <a:bodyPr wrap="square">
+            <a:spAutoFit/>
+          </a:bodyPr>
+          <a:lstStyle/>
+          <a:p>
+            <a:pPr>
+              <a:defRPr sz="1200" b="1">
+                <a:solidFill>
+                  <a:srgbClr val="0D9488"/>
+                </a:solidFill>
+              </a:defRPr>
+            </a:pPr>
+            <a:r>
+              <a:t>KEY PROJECT ACHIEVEMENTS</a:t>
             </a:r>
           </a:p>
           <a:p>
             <a:pPr>
               <a:spcBef>
-                <a:spcPts val="1000"/>
+                <a:spcPts val="800"/>
               </a:spcBef>
-              <a:defRPr sz="1150">
-                <a:solidFill>
-                  <a:srgbClr val="F8FAFC"/>
-                </a:solidFill>
-                <a:latin typeface="Segoe UI"/>
-              </a:defRPr>
-            </a:pPr>
-            <a:r>
-              <a:t>• Multi-Stage Dockerfiles: Lightweight production images with multi-stage caching.</a:t>
-            </a:r>
-            <a:br/>
-            <a:r>
-              <a:t>• Docker Compose &amp; Kubernetes (Helm): Automated deployment charts for Frontend, Backend, MongoDB, and HiveMQ.</a:t>
-            </a:r>
-            <a:br/>
-            <a:r>
-              <a:t>• Terraform IaC: Multi-cloud Infrastructure-as-Code templates for AWS EKS, GCP GKE, and Azure AKS.</a:t>
-            </a:r>
-          </a:p>
-        </p:txBody>
-      </p:sp>
-      <p:sp>
-        <p:nvSpPr>
-          <p:cNvPr id="6" name="Rounded Rectangle 5"/>
+              <a:defRPr b="1" sz="1050">
+                <a:solidFill>
+                  <a:srgbClr val="0F172A"/>
+                </a:solidFill>
+              </a:defRPr>
+            </a:pPr>
+            <a:r>
+              <a:t>✔  Full-Stack Cyber-Physical System</a:t>
+            </a:r>
+          </a:p>
+          <a:p>
+            <a:pPr>
+              <a:defRPr sz="950">
+                <a:solidFill>
+                  <a:srgbClr val="334155"/>
+                </a:solidFill>
+              </a:defRPr>
+            </a:pPr>
+            <a:r>
+              <a:t>    Working integration of Next.js 14, Node/Express, MongoDB, and ESP32 telemetry.</a:t>
+            </a:r>
+          </a:p>
+          <a:p>
+            <a:pPr>
+              <a:spcBef>
+                <a:spcPts val="800"/>
+              </a:spcBef>
+              <a:defRPr b="1" sz="1050">
+                <a:solidFill>
+                  <a:srgbClr val="0F172A"/>
+                </a:solidFill>
+              </a:defRPr>
+            </a:pPr>
+            <a:r>
+              <a:t>✔  Zero-Hardware Accessibility</a:t>
+            </a:r>
+          </a:p>
+          <a:p>
+            <a:pPr>
+              <a:defRPr sz="950">
+                <a:solidFill>
+                  <a:srgbClr val="334155"/>
+                </a:solidFill>
+              </a:defRPr>
+            </a:pPr>
+            <a:r>
+              <a:t>    Solves component shortages via built-in Web Workbench &amp; Wokwi simulation.</a:t>
+            </a:r>
+          </a:p>
+          <a:p>
+            <a:pPr>
+              <a:spcBef>
+                <a:spcPts val="800"/>
+              </a:spcBef>
+              <a:defRPr b="1" sz="1050">
+                <a:solidFill>
+                  <a:srgbClr val="0F172A"/>
+                </a:solidFill>
+              </a:defRPr>
+            </a:pPr>
+            <a:r>
+              <a:t>✔  Real-Time Telemetry Pipeline</a:t>
+            </a:r>
+          </a:p>
+          <a:p>
+            <a:pPr>
+              <a:defRPr sz="950">
+                <a:solidFill>
+                  <a:srgbClr val="334155"/>
+                </a:solidFill>
+              </a:defRPr>
+            </a:pPr>
+            <a:r>
+              <a:t>    Continuous 3s sampling, threshold warnings (&gt;28°C), and acoustic alarms (&gt;32°C).</a:t>
+            </a:r>
+          </a:p>
+          <a:p>
+            <a:pPr>
+              <a:spcBef>
+                <a:spcPts val="800"/>
+              </a:spcBef>
+              <a:defRPr b="1" sz="1050">
+                <a:solidFill>
+                  <a:srgbClr val="0F172A"/>
+                </a:solidFill>
+              </a:defRPr>
+            </a:pPr>
+            <a:r>
+              <a:t>✔  Gamified CS Pedagogy</a:t>
+            </a:r>
+          </a:p>
+          <a:p>
+            <a:pPr>
+              <a:defRPr sz="950">
+                <a:solidFill>
+                  <a:srgbClr val="334155"/>
+                </a:solidFill>
+              </a:defRPr>
+            </a:pPr>
+            <a:r>
+              <a:t>    Measurable student progress tracking across Data Structures, DBMS, OS, and Networks.</a:t>
+            </a:r>
+          </a:p>
+        </p:txBody>
+      </p:sp>
+      <p:sp>
+        <p:nvSpPr>
+          <p:cNvPr id="8" name="Rounded Rectangle 7"/>
           <p:cNvSpPr/>
           <p:nvPr/>
         </p:nvSpPr>
         <p:spPr>
           <a:xfrm>
-            <a:off x="4389120" y="1645920"/>
-            <a:ext cx="3364992" cy="4389120"/>
+            <a:off x="6172200" y="1691640"/>
+            <a:ext cx="5257800" cy="4480560"/>
           </a:xfrm>
           <a:prstGeom prst="roundRect">
             <a:avLst/>
           </a:prstGeom>
           <a:solidFill>
-            <a:srgbClr val="162032"/>
+            <a:srgbClr val="EFF6FF"/>
           </a:solidFill>
-          <a:ln w="12700">
+          <a:ln w="15240">
             <a:solidFill>
-              <a:srgbClr val="A855F7"/>
+              <a:srgbClr val="BFDBFE"/>
             </a:solidFill>
           </a:ln>
         </p:spPr>
@@ -7645,122 +9350,152 @@
           </a:fontRef>
         </p:style>
         <p:txBody>
-          <a:bodyPr rtlCol="0" anchor="ctr" wrap="square" lIns="274320" rIns="274320" tIns="274320"/>
-          <a:lstStyle/>
-          <a:p>
-            <a:pPr algn="ctr">
-              <a:defRPr sz="1500" b="1">
-                <a:solidFill>
-                  <a:srgbClr val="A855F7"/>
-                </a:solidFill>
-                <a:latin typeface="Segoe UI"/>
-              </a:defRPr>
-            </a:pPr>
-            <a:r>
-              <a:t>Service Mesh &amp; Security</a:t>
+          <a:bodyPr rtlCol="0" anchor="ctr"/>
+          <a:lstStyle/>
+          <a:p>
+            <a:pPr algn="ctr"/>
+          </a:p>
+        </p:txBody>
+      </p:sp>
+      <p:sp>
+        <p:nvSpPr>
+          <p:cNvPr id="9" name="TextBox 8"/>
+          <p:cNvSpPr txBox="1"/>
+          <p:nvPr/>
+        </p:nvSpPr>
+        <p:spPr>
+          <a:xfrm>
+            <a:off x="6400800" y="1874519"/>
+            <a:ext cx="4754880" cy="4023360"/>
+          </a:xfrm>
+          <a:prstGeom prst="rect">
+            <a:avLst/>
+          </a:prstGeom>
+          <a:noFill/>
+        </p:spPr>
+        <p:txBody>
+          <a:bodyPr wrap="square">
+            <a:spAutoFit/>
+          </a:bodyPr>
+          <a:lstStyle/>
+          <a:p>
+            <a:pPr>
+              <a:defRPr sz="1200" b="1">
+                <a:solidFill>
+                  <a:srgbClr val="2563EB"/>
+                </a:solidFill>
+              </a:defRPr>
+            </a:pPr>
+            <a:r>
+              <a:t>FUTURE EXPANSION ROADMAP</a:t>
             </a:r>
           </a:p>
           <a:p>
             <a:pPr>
               <a:spcBef>
-                <a:spcPts val="1000"/>
+                <a:spcPts val="800"/>
               </a:spcBef>
-              <a:defRPr sz="1150">
-                <a:solidFill>
-                  <a:srgbClr val="F8FAFC"/>
-                </a:solidFill>
-                <a:latin typeface="Segoe UI"/>
-              </a:defRPr>
-            </a:pPr>
-            <a:r>
-              <a:t>• Istio Service Mesh &amp; Envoy Proxies: Sidecar proxy routing with mutual TLS (mTLS) zero-trust encryption.</a:t>
-            </a:r>
-            <a:br/>
-            <a:r>
-              <a:t>• Circuit Breaker Policies: Protects backend from telemetry overload during concurrent classroom sessions.</a:t>
-            </a:r>
-            <a:br/>
-            <a:r>
-              <a:t>• Helmet &amp; CORS Security Headers: Enforces strict HTTP policies and XSS protections.</a:t>
-            </a:r>
-          </a:p>
-        </p:txBody>
-      </p:sp>
-      <p:sp>
-        <p:nvSpPr>
-          <p:cNvPr id="7" name="Rounded Rectangle 6"/>
-          <p:cNvSpPr/>
-          <p:nvPr/>
-        </p:nvSpPr>
-        <p:spPr>
-          <a:xfrm>
-            <a:off x="8046720" y="1645920"/>
-            <a:ext cx="3364992" cy="4389120"/>
-          </a:xfrm>
-          <a:prstGeom prst="roundRect">
-            <a:avLst/>
-          </a:prstGeom>
-          <a:solidFill>
-            <a:srgbClr val="162032"/>
-          </a:solidFill>
-          <a:ln w="12700">
-            <a:solidFill>
-              <a:srgbClr val="10B981"/>
-            </a:solidFill>
-          </a:ln>
-        </p:spPr>
-        <p:style>
-          <a:lnRef idx="1">
-            <a:schemeClr val="accent1"/>
-          </a:lnRef>
-          <a:fillRef idx="3">
-            <a:schemeClr val="accent1"/>
-          </a:fillRef>
-          <a:effectRef idx="2">
-            <a:schemeClr val="accent1"/>
-          </a:effectRef>
-          <a:fontRef idx="minor">
-            <a:schemeClr val="lt1"/>
-          </a:fontRef>
-        </p:style>
-        <p:txBody>
-          <a:bodyPr rtlCol="0" anchor="ctr" wrap="square" lIns="274320" rIns="274320" tIns="274320"/>
-          <a:lstStyle/>
-          <a:p>
-            <a:pPr algn="ctr">
-              <a:defRPr sz="1500" b="1">
-                <a:solidFill>
-                  <a:srgbClr val="10B981"/>
-                </a:solidFill>
-                <a:latin typeface="Segoe UI"/>
-              </a:defRPr>
-            </a:pPr>
-            <a:r>
-              <a:t>Observability &amp; Self-Healing</a:t>
+              <a:defRPr b="1" sz="1050">
+                <a:solidFill>
+                  <a:srgbClr val="0F172A"/>
+                </a:solidFill>
+              </a:defRPr>
+            </a:pPr>
+            <a:r>
+              <a:t>🚀  Physical Testbed Deployment</a:t>
+            </a:r>
+          </a:p>
+          <a:p>
+            <a:pPr>
+              <a:defRPr sz="950">
+                <a:solidFill>
+                  <a:srgbClr val="334155"/>
+                </a:solidFill>
+              </a:defRPr>
+            </a:pPr>
+            <a:r>
+              <a:t>    Flash firmware to physical ESP32 boards with RFID readers &amp; Solenoid locks.</a:t>
             </a:r>
           </a:p>
           <a:p>
             <a:pPr>
               <a:spcBef>
-                <a:spcPts val="1000"/>
+                <a:spcPts val="800"/>
               </a:spcBef>
-              <a:defRPr sz="1150">
-                <a:solidFill>
-                  <a:srgbClr val="F8FAFC"/>
-                </a:solidFill>
-                <a:latin typeface="Segoe UI"/>
-              </a:defRPr>
-            </a:pPr>
-            <a:r>
-              <a:t>• Prometheus &amp; Grafana Dashboards: Live tracking of WebSocket room latency (&lt;15ms) and MQTT message throughput.</a:t>
-            </a:r>
-            <a:br/>
-            <a:r>
-              <a:t>• Autonomous Self-Healing Watchdog: Background service automatically reconnecting dropped sockets and telemetry buses.</a:t>
-            </a:r>
-            <a:br/>
-            <a:r>
-              <a:t>• Chaos Engineering: Resilience validated with Chaos Mesh network latency and pod kill experiments.</a:t>
+              <a:defRPr b="1" sz="1050">
+                <a:solidFill>
+                  <a:srgbClr val="0F172A"/>
+                </a:solidFill>
+              </a:defRPr>
+            </a:pPr>
+            <a:r>
+              <a:t>🚀  Multi-Sensor Sensor Grid</a:t>
+            </a:r>
+          </a:p>
+          <a:p>
+            <a:pPr>
+              <a:defRPr sz="950">
+                <a:solidFill>
+                  <a:srgbClr val="334155"/>
+                </a:solidFill>
+              </a:defRPr>
+            </a:pPr>
+            <a:r>
+              <a:t>    Add Ultrasonic proximity sensors, PIR motion detectors, and MQ-2 smoke sensors.</a:t>
+            </a:r>
+          </a:p>
+          <a:p>
+            <a:pPr>
+              <a:spcBef>
+                <a:spcPts val="800"/>
+              </a:spcBef>
+              <a:defRPr b="1" sz="1050">
+                <a:solidFill>
+                  <a:srgbClr val="0F172A"/>
+                </a:solidFill>
+              </a:defRPr>
+            </a:pPr>
+            <a:r>
+              <a:t>🚀  AI Dynamic Hint Engine</a:t>
+            </a:r>
+          </a:p>
+          <a:p>
+            <a:pPr>
+              <a:defRPr sz="950">
+                <a:solidFill>
+                  <a:srgbClr val="334155"/>
+                </a:solidFill>
+              </a:defRPr>
+            </a:pPr>
+            <a:r>
+              <a:t>    LLM-driven hint generation with dynamic time penalty trade-offs.</a:t>
+            </a:r>
+          </a:p>
+          <a:p>
+            <a:pPr>
+              <a:spcBef>
+                <a:spcPts val="800"/>
+              </a:spcBef>
+              <a:defRPr b="1" sz="1050">
+                <a:solidFill>
+                  <a:srgbClr val="0F172A"/>
+                </a:solidFill>
+              </a:defRPr>
+            </a:pPr>
+            <a:r>
+              <a:t>🚀  Multiplayer Co-op Rooms</a:t>
+            </a:r>
+          </a:p>
+          <a:p>
+            <a:pPr>
+              <a:defRPr sz="950">
+                <a:solidFill>
+                  <a:srgbClr val="334155"/>
+                </a:solidFill>
+              </a:defRPr>
+            </a:pPr>
+            <a:r>
+              <a:t>    WebSocket room synchronization for multi-student collaborative escape rooms.</a:t>
             </a:r>
           </a:p>
         </p:txBody>
